--- a/docs/EvidenceRing-初赛路演.pptx
+++ b/docs/EvidenceRing-初赛路演.pptx
@@ -1,26 +1,26 @@
 
 <file path=ppt/presentation.xml><?xml version="1.0" encoding="utf-8"?>
-<p:presentation xmlns:a="http://schemas.openxmlformats.org/drawingml/2006/main" xmlns:r="http://schemas.openxmlformats.org/officeDocument/2006/relationships" xmlns:p="http://schemas.openxmlformats.org/presentationml/2006/main" saveSubsetFonts="1" autoCompressPictures="0">
+<p:presentation xmlns:a="http://schemas.openxmlformats.org/drawingml/2006/main" xmlns:r="http://schemas.openxmlformats.org/officeDocument/2006/relationships" xmlns:p="http://schemas.openxmlformats.org/presentationml/2006/main" autoCompressPictures="0">
   <p:sldMasterIdLst>
     <p:sldMasterId id="2147483648" r:id="rId1"/>
   </p:sldMasterIdLst>
+  <p:notesMasterIdLst>
+    <p:notesMasterId r:id="rId4"/>
+  </p:notesMasterIdLst>
   <p:sldIdLst>
-    <p:sldId id="256" r:id="rId2"/>
-    <p:sldId id="257" r:id="rId3"/>
-    <p:sldId id="258" r:id="rId4"/>
-    <p:sldId id="259" r:id="rId5"/>
-    <p:sldId id="260" r:id="rId6"/>
-    <p:sldId id="261" r:id="rId7"/>
-    <p:sldId id="262" r:id="rId8"/>
-    <p:sldId id="263" r:id="rId9"/>
-    <p:sldId id="264" r:id="rId10"/>
-    <p:sldId id="265" r:id="rId11"/>
+    <p:sldId id="256" r:id="rId3"/>
+    <p:sldId id="257" r:id="rId5"/>
+    <p:sldId id="258" r:id="rId6"/>
+    <p:sldId id="259" r:id="rId7"/>
+    <p:sldId id="260" r:id="rId8"/>
+    <p:sldId id="261" r:id="rId9"/>
+    <p:sldId id="262" r:id="rId10"/>
+    <p:sldId id="263" r:id="rId11"/>
+    <p:sldId id="264" r:id="rId12"/>
+    <p:sldId id="265" r:id="rId13"/>
   </p:sldIdLst>
-  <p:notesMasterIdLst>
-    <p:notesMasterId r:id="rId12"/>
-  </p:notesMasterIdLst>
-  <p:sldSz cx="12191695" cy="6858000"/>
-  <p:notesSz cx="6858000" cy="12191695"/>
+  <p:sldSz cx="12191365" cy="6858000"/>
+  <p:notesSz cx="6858000" cy="12191365"/>
   <p:defaultTextStyle>
     <a:lvl1pPr marL="0" algn="l" defTabSz="914400" rtl="0" eaLnBrk="1" latinLnBrk="0" hangingPunct="1">
       <a:defRPr sz="1800" kern="1200">
@@ -198,7 +198,6 @@
           <a:p>
             <a:fld id="{5282F153-3F37-0F45-9E97-73ACFA13230C}" type="datetimeFigureOut">
               <a:rPr lang="en-US"/>
-              <a:t>7/23/19</a:t>
             </a:fld>
             <a:endParaRPr lang="en-US"/>
           </a:p>
@@ -265,6 +264,7 @@
               <a:rPr lang="en-US"/>
               <a:t>Click to edit Master text styles</a:t>
             </a:r>
+            <a:endParaRPr lang="en-US"/>
           </a:p>
           <a:p>
             <a:pPr lvl="1"/>
@@ -272,6 +272,7 @@
               <a:rPr lang="en-US"/>
               <a:t>Second level</a:t>
             </a:r>
+            <a:endParaRPr lang="en-US"/>
           </a:p>
           <a:p>
             <a:pPr lvl="2"/>
@@ -279,6 +280,7 @@
               <a:rPr lang="en-US"/>
               <a:t>Third level</a:t>
             </a:r>
+            <a:endParaRPr lang="en-US"/>
           </a:p>
           <a:p>
             <a:pPr lvl="3"/>
@@ -286,6 +288,7 @@
               <a:rPr lang="en-US"/>
               <a:t>Fourth level</a:t>
             </a:r>
+            <a:endParaRPr lang="en-US"/>
           </a:p>
           <a:p>
             <a:pPr lvl="4"/>
@@ -293,6 +296,7 @@
               <a:rPr lang="en-US"/>
               <a:t>Fifth level</a:t>
             </a:r>
+            <a:endParaRPr lang="en-US"/>
           </a:p>
         </p:txBody>
       </p:sp>
@@ -356,18 +360,12 @@
           <a:p>
             <a:fld id="{CE5E9CC1-C706-0F49-92D6-E571CC5EEA8F}" type="slidenum">
               <a:rPr lang="en-US"/>
-              <a:t>‹#›</a:t>
             </a:fld>
             <a:endParaRPr lang="en-US"/>
           </a:p>
         </p:txBody>
       </p:sp>
     </p:spTree>
-    <p:extLst>
-      <p:ext uri="{BB962C8B-B14F-4D97-AF65-F5344CB8AC3E}">
-        <p14:creationId xmlns:p14="http://schemas.microsoft.com/office/powerpoint/2010/main" val="1024086991"/>
-      </p:ext>
-    </p:extLst>
   </p:cSld>
   <p:clrMap bg1="lt1" tx1="dk1" bg2="lt2" tx2="dk2" accent1="accent1" accent2="accent2" accent3="accent3" accent4="accent4" accent5="accent5" accent6="accent6" hlink="hlink" folHlink="folHlink"/>
   <p:notesStyle>
@@ -509,10 +507,6 @@
           <a:bodyPr/>
           <a:lstStyle/>
           <a:p>
-            <a:r>
-              <a:rPr lang="en-US" dirty="0"/>
-              <a:t/>
-            </a:r>
             <a:endParaRPr lang="en-US" dirty="0"/>
           </a:p>
         </p:txBody>
@@ -534,18 +528,12 @@
           <a:p>
             <a:fld id="{F7021451-1387-4CA6-816F-3879F97B5CBC}" type="slidenum">
               <a:rPr lang="en-US"/>
-              <a:t>1</a:t>
             </a:fld>
             <a:endParaRPr lang="en-US"/>
           </a:p>
         </p:txBody>
       </p:sp>
     </p:spTree>
-    <p:extLst>
-      <p:ext uri="{BB962C8B-B14F-4D97-AF65-F5344CB8AC3E}">
-        <p14:creationId xmlns:p14="http://schemas.microsoft.com/office/powerpoint/2010/main" val="1024086991"/>
-      </p:ext>
-    </p:extLst>
   </p:cSld>
   <p:clrMapOvr>
     <a:masterClrMapping/>
@@ -597,10 +585,6 @@
           <a:bodyPr/>
           <a:lstStyle/>
           <a:p>
-            <a:r>
-              <a:rPr lang="en-US" dirty="0"/>
-              <a:t/>
-            </a:r>
             <a:endParaRPr lang="en-US" dirty="0"/>
           </a:p>
         </p:txBody>
@@ -622,18 +606,12 @@
           <a:p>
             <a:fld id="{F7021451-1387-4CA6-816F-3879F97B5CBC}" type="slidenum">
               <a:rPr lang="en-US"/>
-              <a:t>10</a:t>
             </a:fld>
             <a:endParaRPr lang="en-US"/>
           </a:p>
         </p:txBody>
       </p:sp>
     </p:spTree>
-    <p:extLst>
-      <p:ext uri="{BB962C8B-B14F-4D97-AF65-F5344CB8AC3E}">
-        <p14:creationId xmlns:p14="http://schemas.microsoft.com/office/powerpoint/2010/main" val="1024086991"/>
-      </p:ext>
-    </p:extLst>
   </p:cSld>
   <p:clrMapOvr>
     <a:masterClrMapping/>
@@ -685,10 +663,6 @@
           <a:bodyPr/>
           <a:lstStyle/>
           <a:p>
-            <a:r>
-              <a:rPr lang="en-US" dirty="0"/>
-              <a:t/>
-            </a:r>
             <a:endParaRPr lang="en-US" dirty="0"/>
           </a:p>
         </p:txBody>
@@ -710,18 +684,12 @@
           <a:p>
             <a:fld id="{F7021451-1387-4CA6-816F-3879F97B5CBC}" type="slidenum">
               <a:rPr lang="en-US"/>
-              <a:t>2</a:t>
             </a:fld>
             <a:endParaRPr lang="en-US"/>
           </a:p>
         </p:txBody>
       </p:sp>
     </p:spTree>
-    <p:extLst>
-      <p:ext uri="{BB962C8B-B14F-4D97-AF65-F5344CB8AC3E}">
-        <p14:creationId xmlns:p14="http://schemas.microsoft.com/office/powerpoint/2010/main" val="1024086991"/>
-      </p:ext>
-    </p:extLst>
   </p:cSld>
   <p:clrMapOvr>
     <a:masterClrMapping/>
@@ -773,10 +741,6 @@
           <a:bodyPr/>
           <a:lstStyle/>
           <a:p>
-            <a:r>
-              <a:rPr lang="en-US" dirty="0"/>
-              <a:t/>
-            </a:r>
             <a:endParaRPr lang="en-US" dirty="0"/>
           </a:p>
         </p:txBody>
@@ -798,18 +762,12 @@
           <a:p>
             <a:fld id="{F7021451-1387-4CA6-816F-3879F97B5CBC}" type="slidenum">
               <a:rPr lang="en-US"/>
-              <a:t>3</a:t>
             </a:fld>
             <a:endParaRPr lang="en-US"/>
           </a:p>
         </p:txBody>
       </p:sp>
     </p:spTree>
-    <p:extLst>
-      <p:ext uri="{BB962C8B-B14F-4D97-AF65-F5344CB8AC3E}">
-        <p14:creationId xmlns:p14="http://schemas.microsoft.com/office/powerpoint/2010/main" val="1024086991"/>
-      </p:ext>
-    </p:extLst>
   </p:cSld>
   <p:clrMapOvr>
     <a:masterClrMapping/>
@@ -861,10 +819,6 @@
           <a:bodyPr/>
           <a:lstStyle/>
           <a:p>
-            <a:r>
-              <a:rPr lang="en-US" dirty="0"/>
-              <a:t/>
-            </a:r>
             <a:endParaRPr lang="en-US" dirty="0"/>
           </a:p>
         </p:txBody>
@@ -886,18 +840,12 @@
           <a:p>
             <a:fld id="{F7021451-1387-4CA6-816F-3879F97B5CBC}" type="slidenum">
               <a:rPr lang="en-US"/>
-              <a:t>4</a:t>
             </a:fld>
             <a:endParaRPr lang="en-US"/>
           </a:p>
         </p:txBody>
       </p:sp>
     </p:spTree>
-    <p:extLst>
-      <p:ext uri="{BB962C8B-B14F-4D97-AF65-F5344CB8AC3E}">
-        <p14:creationId xmlns:p14="http://schemas.microsoft.com/office/powerpoint/2010/main" val="1024086991"/>
-      </p:ext>
-    </p:extLst>
   </p:cSld>
   <p:clrMapOvr>
     <a:masterClrMapping/>
@@ -949,10 +897,6 @@
           <a:bodyPr/>
           <a:lstStyle/>
           <a:p>
-            <a:r>
-              <a:rPr lang="en-US" dirty="0"/>
-              <a:t/>
-            </a:r>
             <a:endParaRPr lang="en-US" dirty="0"/>
           </a:p>
         </p:txBody>
@@ -974,18 +918,12 @@
           <a:p>
             <a:fld id="{F7021451-1387-4CA6-816F-3879F97B5CBC}" type="slidenum">
               <a:rPr lang="en-US"/>
-              <a:t>5</a:t>
             </a:fld>
             <a:endParaRPr lang="en-US"/>
           </a:p>
         </p:txBody>
       </p:sp>
     </p:spTree>
-    <p:extLst>
-      <p:ext uri="{BB962C8B-B14F-4D97-AF65-F5344CB8AC3E}">
-        <p14:creationId xmlns:p14="http://schemas.microsoft.com/office/powerpoint/2010/main" val="1024086991"/>
-      </p:ext>
-    </p:extLst>
   </p:cSld>
   <p:clrMapOvr>
     <a:masterClrMapping/>
@@ -1037,10 +975,6 @@
           <a:bodyPr/>
           <a:lstStyle/>
           <a:p>
-            <a:r>
-              <a:rPr lang="en-US" dirty="0"/>
-              <a:t/>
-            </a:r>
             <a:endParaRPr lang="en-US" dirty="0"/>
           </a:p>
         </p:txBody>
@@ -1062,18 +996,12 @@
           <a:p>
             <a:fld id="{F7021451-1387-4CA6-816F-3879F97B5CBC}" type="slidenum">
               <a:rPr lang="en-US"/>
-              <a:t>6</a:t>
             </a:fld>
             <a:endParaRPr lang="en-US"/>
           </a:p>
         </p:txBody>
       </p:sp>
     </p:spTree>
-    <p:extLst>
-      <p:ext uri="{BB962C8B-B14F-4D97-AF65-F5344CB8AC3E}">
-        <p14:creationId xmlns:p14="http://schemas.microsoft.com/office/powerpoint/2010/main" val="1024086991"/>
-      </p:ext>
-    </p:extLst>
   </p:cSld>
   <p:clrMapOvr>
     <a:masterClrMapping/>
@@ -1125,10 +1053,6 @@
           <a:bodyPr/>
           <a:lstStyle/>
           <a:p>
-            <a:r>
-              <a:rPr lang="en-US" dirty="0"/>
-              <a:t/>
-            </a:r>
             <a:endParaRPr lang="en-US" dirty="0"/>
           </a:p>
         </p:txBody>
@@ -1150,18 +1074,12 @@
           <a:p>
             <a:fld id="{F7021451-1387-4CA6-816F-3879F97B5CBC}" type="slidenum">
               <a:rPr lang="en-US"/>
-              <a:t>7</a:t>
             </a:fld>
             <a:endParaRPr lang="en-US"/>
           </a:p>
         </p:txBody>
       </p:sp>
     </p:spTree>
-    <p:extLst>
-      <p:ext uri="{BB962C8B-B14F-4D97-AF65-F5344CB8AC3E}">
-        <p14:creationId xmlns:p14="http://schemas.microsoft.com/office/powerpoint/2010/main" val="1024086991"/>
-      </p:ext>
-    </p:extLst>
   </p:cSld>
   <p:clrMapOvr>
     <a:masterClrMapping/>
@@ -1213,10 +1131,6 @@
           <a:bodyPr/>
           <a:lstStyle/>
           <a:p>
-            <a:r>
-              <a:rPr lang="en-US" dirty="0"/>
-              <a:t/>
-            </a:r>
             <a:endParaRPr lang="en-US" dirty="0"/>
           </a:p>
         </p:txBody>
@@ -1238,18 +1152,12 @@
           <a:p>
             <a:fld id="{F7021451-1387-4CA6-816F-3879F97B5CBC}" type="slidenum">
               <a:rPr lang="en-US"/>
-              <a:t>8</a:t>
             </a:fld>
             <a:endParaRPr lang="en-US"/>
           </a:p>
         </p:txBody>
       </p:sp>
     </p:spTree>
-    <p:extLst>
-      <p:ext uri="{BB962C8B-B14F-4D97-AF65-F5344CB8AC3E}">
-        <p14:creationId xmlns:p14="http://schemas.microsoft.com/office/powerpoint/2010/main" val="1024086991"/>
-      </p:ext>
-    </p:extLst>
   </p:cSld>
   <p:clrMapOvr>
     <a:masterClrMapping/>
@@ -1301,10 +1209,6 @@
           <a:bodyPr/>
           <a:lstStyle/>
           <a:p>
-            <a:r>
-              <a:rPr lang="en-US" dirty="0"/>
-              <a:t/>
-            </a:r>
             <a:endParaRPr lang="en-US" dirty="0"/>
           </a:p>
         </p:txBody>
@@ -1326,18 +1230,12 @@
           <a:p>
             <a:fld id="{F7021451-1387-4CA6-816F-3879F97B5CBC}" type="slidenum">
               <a:rPr lang="en-US"/>
-              <a:t>9</a:t>
             </a:fld>
             <a:endParaRPr lang="en-US"/>
           </a:p>
         </p:txBody>
       </p:sp>
     </p:spTree>
-    <p:extLst>
-      <p:ext uri="{BB962C8B-B14F-4D97-AF65-F5344CB8AC3E}">
-        <p14:creationId xmlns:p14="http://schemas.microsoft.com/office/powerpoint/2010/main" val="1024086991"/>
-      </p:ext>
-    </p:extLst>
   </p:cSld>
   <p:clrMapOvr>
     <a:masterClrMapping/>
@@ -1378,6 +1276,11 @@
 <file path=ppt/slideMasters/slideMaster1.xml><?xml version="1.0" encoding="utf-8"?>
 <p:sldMaster xmlns:a="http://schemas.openxmlformats.org/drawingml/2006/main" xmlns:r="http://schemas.openxmlformats.org/officeDocument/2006/relationships" xmlns:p="http://schemas.openxmlformats.org/presentationml/2006/main">
   <p:cSld>
+    <p:bg>
+      <p:bgRef idx="1001">
+        <a:schemeClr val="bg1"/>
+      </p:bgRef>
+    </p:bg>
     <p:spTree>
       <p:nvGrpSpPr>
         <p:cNvPr id="1" name=""/>
@@ -1421,7 +1324,7 @@
         <a:spcBef>
           <a:spcPct val="20000"/>
         </a:spcBef>
-        <a:buFont typeface="Arial" pitchFamily="34" charset="0"/>
+        <a:buFont typeface="Arial" panose="020B0604020202020204" pitchFamily="34" charset="0"/>
         <a:buChar char="•"/>
         <a:defRPr sz="3200" kern="1200">
           <a:solidFill>
@@ -1436,7 +1339,7 @@
         <a:spcBef>
           <a:spcPct val="20000"/>
         </a:spcBef>
-        <a:buFont typeface="Arial" pitchFamily="34" charset="0"/>
+        <a:buFont typeface="Arial" panose="020B0604020202020204" pitchFamily="34" charset="0"/>
         <a:buChar char="–"/>
         <a:defRPr sz="2800" kern="1200">
           <a:solidFill>
@@ -1451,7 +1354,7 @@
         <a:spcBef>
           <a:spcPct val="20000"/>
         </a:spcBef>
-        <a:buFont typeface="Arial" pitchFamily="34" charset="0"/>
+        <a:buFont typeface="Arial" panose="020B0604020202020204" pitchFamily="34" charset="0"/>
         <a:buChar char="•"/>
         <a:defRPr sz="2400" kern="1200">
           <a:solidFill>
@@ -1466,7 +1369,7 @@
         <a:spcBef>
           <a:spcPct val="20000"/>
         </a:spcBef>
-        <a:buFont typeface="Arial" pitchFamily="34" charset="0"/>
+        <a:buFont typeface="Arial" panose="020B0604020202020204" pitchFamily="34" charset="0"/>
         <a:buChar char="–"/>
         <a:defRPr sz="2000" kern="1200">
           <a:solidFill>
@@ -1481,7 +1384,7 @@
         <a:spcBef>
           <a:spcPct val="20000"/>
         </a:spcBef>
-        <a:buFont typeface="Arial" pitchFamily="34" charset="0"/>
+        <a:buFont typeface="Arial" panose="020B0604020202020204" pitchFamily="34" charset="0"/>
         <a:buChar char="»"/>
         <a:defRPr sz="2000" kern="1200">
           <a:solidFill>
@@ -1496,7 +1399,7 @@
         <a:spcBef>
           <a:spcPct val="20000"/>
         </a:spcBef>
-        <a:buFont typeface="Arial" pitchFamily="34" charset="0"/>
+        <a:buFont typeface="Arial" panose="020B0604020202020204" pitchFamily="34" charset="0"/>
         <a:buChar char="•"/>
         <a:defRPr sz="2000" kern="1200">
           <a:solidFill>
@@ -1511,7 +1414,7 @@
         <a:spcBef>
           <a:spcPct val="20000"/>
         </a:spcBef>
-        <a:buFont typeface="Arial" pitchFamily="34" charset="0"/>
+        <a:buFont typeface="Arial" panose="020B0604020202020204" pitchFamily="34" charset="0"/>
         <a:buChar char="•"/>
         <a:defRPr sz="2000" kern="1200">
           <a:solidFill>
@@ -1526,7 +1429,7 @@
         <a:spcBef>
           <a:spcPct val="20000"/>
         </a:spcBef>
-        <a:buFont typeface="Arial" pitchFamily="34" charset="0"/>
+        <a:buFont typeface="Arial" panose="020B0604020202020204" pitchFamily="34" charset="0"/>
         <a:buChar char="•"/>
         <a:defRPr sz="2000" kern="1200">
           <a:solidFill>
@@ -1541,7 +1444,7 @@
         <a:spcBef>
           <a:spcPct val="20000"/>
         </a:spcBef>
-        <a:buFont typeface="Arial" pitchFamily="34" charset="0"/>
+        <a:buFont typeface="Arial" panose="020B0604020202020204" pitchFamily="34" charset="0"/>
         <a:buChar char="•"/>
         <a:defRPr sz="2000" kern="1200">
           <a:solidFill>
@@ -1654,7 +1557,7 @@
 
 <file path=ppt/slides/slide1.xml><?xml version="1.0" encoding="utf-8"?>
 <p:sld xmlns:a="http://schemas.openxmlformats.org/drawingml/2006/main" xmlns:r="http://schemas.openxmlformats.org/officeDocument/2006/relationships" xmlns:p="http://schemas.openxmlformats.org/presentationml/2006/main">
-  <p:cSld name="Slide 1">
+  <p:cSld>
     <p:spTree>
       <p:nvGrpSpPr>
         <p:cNvPr id="1" name=""/>
@@ -1759,13 +1662,12 @@
             <a:avLst/>
           </a:prstGeom>
           <a:noFill/>
-          <a:ln/>
-        </p:spPr>
-        <p:txBody>
-          <a:bodyPr wrap="square" rtlCol="0" anchor="ctr"/>
-          <a:lstStyle/>
-          <a:p>
-            <a:pPr indent="0" marL="0">
+        </p:spPr>
+        <p:txBody>
+          <a:bodyPr wrap="square" rtlCol="0" anchor="ctr"/>
+          <a:lstStyle/>
+          <a:p>
+            <a:pPr marL="0" indent="0">
               <a:buNone/>
             </a:pPr>
             <a:r>
@@ -1773,9 +1675,9 @@
                 <a:solidFill>
                   <a:srgbClr val="22D3EE"/>
                 </a:solidFill>
-                <a:latin typeface="Microsoft YaHei" pitchFamily="34" charset="0"/>
-                <a:ea typeface="Microsoft YaHei" pitchFamily="34" charset="-122"/>
-                <a:cs typeface="Microsoft YaHei" pitchFamily="34" charset="-120"/>
+                <a:latin typeface="微软雅黑" panose="020B0503020204020204" pitchFamily="34" charset="-122"/>
+                <a:ea typeface="微软雅黑" panose="020B0503020204020204" pitchFamily="34" charset="-122"/>
+                <a:cs typeface="微软雅黑" panose="020B0503020204020204" pitchFamily="34" charset="-120"/>
               </a:rPr>
               <a:t>GOAI 杭州全球人工智能技术创新大赛</a:t>
             </a:r>
@@ -1798,27 +1700,33 @@
             <a:avLst/>
           </a:prstGeom>
           <a:noFill/>
-          <a:ln/>
-        </p:spPr>
-        <p:txBody>
-          <a:bodyPr wrap="square" rtlCol="0" anchor="ctr"/>
-          <a:lstStyle/>
-          <a:p>
-            <a:pPr indent="0" marL="0">
-              <a:buNone/>
-            </a:pPr>
-            <a:r>
-              <a:rPr lang="en-US" sz="4800" b="1" dirty="0">
+        </p:spPr>
+        <p:txBody>
+          <a:bodyPr wrap="square" rtlCol="0" anchor="ctr"/>
+          <a:lstStyle/>
+          <a:p>
+            <a:pPr marL="0" indent="0">
+              <a:buNone/>
+            </a:pPr>
+            <a:r>
+              <a:rPr lang="en-US" altLang="zh-CN" sz="4800" b="1" dirty="0">
                 <a:solidFill>
                   <a:srgbClr val="F8FAFC"/>
                 </a:solidFill>
-                <a:latin typeface="Microsoft YaHei" pitchFamily="34" charset="0"/>
-                <a:ea typeface="Microsoft YaHei" pitchFamily="34" charset="-122"/>
-                <a:cs typeface="Microsoft YaHei" pitchFamily="34" charset="-120"/>
-              </a:rPr>
-              <a:t>EvidenceLoop</a:t>
-            </a:r>
-            <a:endParaRPr lang="en-US" sz="4800" dirty="0"/>
+                <a:latin typeface="微软雅黑" panose="020B0503020204020204" pitchFamily="34" charset="-122"/>
+                <a:ea typeface="微软雅黑" panose="020B0503020204020204" pitchFamily="34" charset="-122"/>
+                <a:cs typeface="微软雅黑" panose="020B0503020204020204" pitchFamily="34" charset="-120"/>
+              </a:rPr>
+              <a:t>EvidenceRing</a:t>
+            </a:r>
+            <a:endParaRPr lang="en-US" altLang="zh-CN" sz="4800" b="1" dirty="0">
+              <a:solidFill>
+                <a:srgbClr val="F8FAFC"/>
+              </a:solidFill>
+              <a:latin typeface="微软雅黑" panose="020B0503020204020204" pitchFamily="34" charset="-122"/>
+              <a:ea typeface="微软雅黑" panose="020B0503020204020204" pitchFamily="34" charset="-122"/>
+              <a:cs typeface="微软雅黑" panose="020B0503020204020204" pitchFamily="34" charset="-120"/>
+            </a:endParaRPr>
           </a:p>
         </p:txBody>
       </p:sp>
@@ -1837,13 +1745,12 @@
             <a:avLst/>
           </a:prstGeom>
           <a:noFill/>
-          <a:ln/>
-        </p:spPr>
-        <p:txBody>
-          <a:bodyPr wrap="square" rtlCol="0" anchor="ctr"/>
-          <a:lstStyle/>
-          <a:p>
-            <a:pPr indent="0" marL="0">
+        </p:spPr>
+        <p:txBody>
+          <a:bodyPr wrap="square" rtlCol="0" anchor="ctr"/>
+          <a:lstStyle/>
+          <a:p>
+            <a:pPr marL="0" indent="0">
               <a:buNone/>
             </a:pPr>
             <a:r>
@@ -1851,9 +1758,9 @@
                 <a:solidFill>
                   <a:srgbClr val="38BDF8"/>
                 </a:solidFill>
-                <a:latin typeface="Microsoft YaHei" pitchFamily="34" charset="0"/>
-                <a:ea typeface="Microsoft YaHei" pitchFamily="34" charset="-122"/>
-                <a:cs typeface="Microsoft YaHei" pitchFamily="34" charset="-120"/>
+                <a:latin typeface="微软雅黑" panose="020B0503020204020204" pitchFamily="34" charset="-122"/>
+                <a:ea typeface="微软雅黑" panose="020B0503020204020204" pitchFamily="34" charset="-122"/>
+                <a:cs typeface="微软雅黑" panose="020B0503020204020204" pitchFamily="34" charset="-120"/>
               </a:rPr>
               <a:t>循证实训 Agent</a:t>
             </a:r>
@@ -1876,13 +1783,12 @@
             <a:avLst/>
           </a:prstGeom>
           <a:noFill/>
-          <a:ln/>
-        </p:spPr>
-        <p:txBody>
-          <a:bodyPr wrap="square" rtlCol="0" anchor="ctr"/>
-          <a:lstStyle/>
-          <a:p>
-            <a:pPr indent="0" marL="0">
+        </p:spPr>
+        <p:txBody>
+          <a:bodyPr wrap="square" rtlCol="0" anchor="ctr"/>
+          <a:lstStyle/>
+          <a:p>
+            <a:pPr marL="0" indent="0">
               <a:buNone/>
             </a:pPr>
             <a:r>
@@ -1890,9 +1796,9 @@
                 <a:solidFill>
                   <a:srgbClr val="94A3B8"/>
                 </a:solidFill>
-                <a:latin typeface="Microsoft YaHei" pitchFamily="34" charset="0"/>
-                <a:ea typeface="Microsoft YaHei" pitchFamily="34" charset="-122"/>
-                <a:cs typeface="Microsoft YaHei" pitchFamily="34" charset="-120"/>
+                <a:latin typeface="微软雅黑" panose="020B0503020204020204" pitchFamily="34" charset="-122"/>
+                <a:ea typeface="微软雅黑" panose="020B0503020204020204" pitchFamily="34" charset="-122"/>
+                <a:cs typeface="微软雅黑" panose="020B0503020204020204" pitchFamily="34" charset="-120"/>
               </a:rPr>
               <a:t>提交 → 证据 → 诊断 → 再验证</a:t>
             </a:r>
@@ -1942,13 +1848,12 @@
             <a:avLst/>
           </a:prstGeom>
           <a:noFill/>
-          <a:ln/>
-        </p:spPr>
-        <p:txBody>
-          <a:bodyPr wrap="square" rtlCol="0" anchor="ctr"/>
-          <a:lstStyle/>
-          <a:p>
-            <a:pPr indent="0" marL="0">
+        </p:spPr>
+        <p:txBody>
+          <a:bodyPr wrap="square" rtlCol="0" anchor="ctr"/>
+          <a:lstStyle/>
+          <a:p>
+            <a:pPr marL="0" indent="0">
               <a:buNone/>
             </a:pPr>
             <a:r>
@@ -1956,9 +1861,9 @@
                 <a:solidFill>
                   <a:srgbClr val="22D3EE"/>
                 </a:solidFill>
-                <a:latin typeface="Microsoft YaHei" pitchFamily="34" charset="0"/>
-                <a:ea typeface="Microsoft YaHei" pitchFamily="34" charset="-122"/>
-                <a:cs typeface="Microsoft YaHei" pitchFamily="34" charset="-120"/>
+                <a:latin typeface="微软雅黑" panose="020B0503020204020204" pitchFamily="34" charset="-122"/>
+                <a:ea typeface="微软雅黑" panose="020B0503020204020204" pitchFamily="34" charset="-122"/>
+                <a:cs typeface="微软雅黑" panose="020B0503020204020204" pitchFamily="34" charset="-120"/>
               </a:rPr>
               <a:t>赛道</a:t>
             </a:r>
@@ -1981,13 +1886,12 @@
             <a:avLst/>
           </a:prstGeom>
           <a:noFill/>
-          <a:ln/>
-        </p:spPr>
-        <p:txBody>
-          <a:bodyPr wrap="square" rtlCol="0" anchor="ctr"/>
-          <a:lstStyle/>
-          <a:p>
-            <a:pPr indent="0" marL="0">
+        </p:spPr>
+        <p:txBody>
+          <a:bodyPr wrap="square" rtlCol="0" anchor="ctr"/>
+          <a:lstStyle/>
+          <a:p>
+            <a:pPr marL="0" indent="0">
               <a:buNone/>
             </a:pPr>
             <a:r>
@@ -1995,9 +1899,9 @@
                 <a:solidFill>
                   <a:srgbClr val="F8FAFC"/>
                 </a:solidFill>
-                <a:latin typeface="Microsoft YaHei" pitchFamily="34" charset="0"/>
-                <a:ea typeface="Microsoft YaHei" pitchFamily="34" charset="-122"/>
-                <a:cs typeface="Microsoft YaHei" pitchFamily="34" charset="-120"/>
+                <a:latin typeface="微软雅黑" panose="020B0503020204020204" pitchFamily="34" charset="-122"/>
+                <a:ea typeface="微软雅黑" panose="020B0503020204020204" pitchFamily="34" charset="-122"/>
+                <a:cs typeface="微软雅黑" panose="020B0503020204020204" pitchFamily="34" charset="-120"/>
               </a:rPr>
               <a:t>Boundless Agents · AI+教育</a:t>
             </a:r>
@@ -2047,13 +1951,12 @@
             <a:avLst/>
           </a:prstGeom>
           <a:noFill/>
-          <a:ln/>
-        </p:spPr>
-        <p:txBody>
-          <a:bodyPr wrap="square" rtlCol="0" anchor="ctr"/>
-          <a:lstStyle/>
-          <a:p>
-            <a:pPr indent="0" marL="0">
+        </p:spPr>
+        <p:txBody>
+          <a:bodyPr wrap="square" rtlCol="0" anchor="ctr"/>
+          <a:lstStyle/>
+          <a:p>
+            <a:pPr marL="0" indent="0">
               <a:buNone/>
             </a:pPr>
             <a:r>
@@ -2061,9 +1964,9 @@
                 <a:solidFill>
                   <a:srgbClr val="22D3EE"/>
                 </a:solidFill>
-                <a:latin typeface="Microsoft YaHei" pitchFamily="34" charset="0"/>
-                <a:ea typeface="Microsoft YaHei" pitchFamily="34" charset="-122"/>
-                <a:cs typeface="Microsoft YaHei" pitchFamily="34" charset="-120"/>
+                <a:latin typeface="微软雅黑" panose="020B0503020204020204" pitchFamily="34" charset="-122"/>
+                <a:ea typeface="微软雅黑" panose="020B0503020204020204" pitchFamily="34" charset="-122"/>
+                <a:cs typeface="微软雅黑" panose="020B0503020204020204" pitchFamily="34" charset="-120"/>
               </a:rPr>
               <a:t>定位</a:t>
             </a:r>
@@ -2086,13 +1989,12 @@
             <a:avLst/>
           </a:prstGeom>
           <a:noFill/>
-          <a:ln/>
-        </p:spPr>
-        <p:txBody>
-          <a:bodyPr wrap="square" rtlCol="0" anchor="ctr"/>
-          <a:lstStyle/>
-          <a:p>
-            <a:pPr indent="0" marL="0">
+        </p:spPr>
+        <p:txBody>
+          <a:bodyPr wrap="square" rtlCol="0" anchor="ctr"/>
+          <a:lstStyle/>
+          <a:p>
+            <a:pPr marL="0" indent="0">
               <a:buNone/>
             </a:pPr>
             <a:r>
@@ -2100,9 +2002,9 @@
                 <a:solidFill>
                   <a:srgbClr val="F8FAFC"/>
                 </a:solidFill>
-                <a:latin typeface="Microsoft YaHei" pitchFamily="34" charset="0"/>
-                <a:ea typeface="Microsoft YaHei" pitchFamily="34" charset="-122"/>
-                <a:cs typeface="Microsoft YaHei" pitchFamily="34" charset="-120"/>
+                <a:latin typeface="微软雅黑" panose="020B0503020204020204" pitchFamily="34" charset="-122"/>
+                <a:ea typeface="微软雅黑" panose="020B0503020204020204" pitchFamily="34" charset="-122"/>
+                <a:cs typeface="微软雅黑" panose="020B0503020204020204" pitchFamily="34" charset="-120"/>
               </a:rPr>
               <a:t>证据优先的编程实训闭环</a:t>
             </a:r>
@@ -2152,13 +2054,12 @@
             <a:avLst/>
           </a:prstGeom>
           <a:noFill/>
-          <a:ln/>
-        </p:spPr>
-        <p:txBody>
-          <a:bodyPr wrap="square" rtlCol="0" anchor="ctr"/>
-          <a:lstStyle/>
-          <a:p>
-            <a:pPr indent="0" marL="0">
+        </p:spPr>
+        <p:txBody>
+          <a:bodyPr wrap="square" rtlCol="0" anchor="ctr"/>
+          <a:lstStyle/>
+          <a:p>
+            <a:pPr marL="0" indent="0">
               <a:buNone/>
             </a:pPr>
             <a:r>
@@ -2166,9 +2067,9 @@
                 <a:solidFill>
                   <a:srgbClr val="22D3EE"/>
                 </a:solidFill>
-                <a:latin typeface="Microsoft YaHei" pitchFamily="34" charset="0"/>
-                <a:ea typeface="Microsoft YaHei" pitchFamily="34" charset="-122"/>
-                <a:cs typeface="Microsoft YaHei" pitchFamily="34" charset="-120"/>
+                <a:latin typeface="微软雅黑" panose="020B0503020204020204" pitchFamily="34" charset="-122"/>
+                <a:ea typeface="微软雅黑" panose="020B0503020204020204" pitchFamily="34" charset="-122"/>
+                <a:cs typeface="微软雅黑" panose="020B0503020204020204" pitchFamily="34" charset="-120"/>
               </a:rPr>
               <a:t>许可</a:t>
             </a:r>
@@ -2191,13 +2092,12 @@
             <a:avLst/>
           </a:prstGeom>
           <a:noFill/>
-          <a:ln/>
-        </p:spPr>
-        <p:txBody>
-          <a:bodyPr wrap="square" rtlCol="0" anchor="ctr"/>
-          <a:lstStyle/>
-          <a:p>
-            <a:pPr indent="0" marL="0">
+        </p:spPr>
+        <p:txBody>
+          <a:bodyPr wrap="square" rtlCol="0" anchor="ctr"/>
+          <a:lstStyle/>
+          <a:p>
+            <a:pPr marL="0" indent="0">
               <a:buNone/>
             </a:pPr>
             <a:r>
@@ -2205,9 +2105,9 @@
                 <a:solidFill>
                   <a:srgbClr val="F8FAFC"/>
                 </a:solidFill>
-                <a:latin typeface="Microsoft YaHei" pitchFamily="34" charset="0"/>
-                <a:ea typeface="Microsoft YaHei" pitchFamily="34" charset="-122"/>
-                <a:cs typeface="Microsoft YaHei" pitchFamily="34" charset="-120"/>
+                <a:latin typeface="微软雅黑" panose="020B0503020204020204" pitchFamily="34" charset="-122"/>
+                <a:ea typeface="微软雅黑" panose="020B0503020204020204" pitchFamily="34" charset="-122"/>
+                <a:cs typeface="微软雅黑" panose="020B0503020204020204" pitchFamily="34" charset="-120"/>
               </a:rPr>
               <a:t>Apache-2.0 可复用</a:t>
             </a:r>
@@ -2230,13 +2130,12 @@
             <a:avLst/>
           </a:prstGeom>
           <a:noFill/>
-          <a:ln/>
-        </p:spPr>
-        <p:txBody>
-          <a:bodyPr wrap="square" rtlCol="0" anchor="ctr"/>
-          <a:lstStyle/>
-          <a:p>
-            <a:pPr indent="0" marL="0">
+        </p:spPr>
+        <p:txBody>
+          <a:bodyPr wrap="square" rtlCol="0" anchor="ctr"/>
+          <a:lstStyle/>
+          <a:p>
+            <a:pPr marL="0" indent="0">
               <a:buNone/>
             </a:pPr>
             <a:r>
@@ -2244,9 +2143,9 @@
                 <a:solidFill>
                   <a:srgbClr val="94A3B8"/>
                 </a:solidFill>
-                <a:latin typeface="Microsoft YaHei" pitchFamily="34" charset="0"/>
-                <a:ea typeface="Microsoft YaHei" pitchFamily="34" charset="-122"/>
-                <a:cs typeface="Microsoft YaHei" pitchFamily="34" charset="-120"/>
+                <a:latin typeface="微软雅黑" panose="020B0503020204020204" pitchFamily="34" charset="-122"/>
+                <a:ea typeface="微软雅黑" panose="020B0503020204020204" pitchFamily="34" charset="-122"/>
+                <a:cs typeface="微软雅黑" panose="020B0503020204020204" pitchFamily="34" charset="-120"/>
               </a:rPr>
               <a:t>初赛材料 · 方案 PPT</a:t>
             </a:r>
@@ -2264,7 +2163,7 @@
 
 <file path=ppt/slides/slide10.xml><?xml version="1.0" encoding="utf-8"?>
 <p:sld xmlns:a="http://schemas.openxmlformats.org/drawingml/2006/main" xmlns:r="http://schemas.openxmlformats.org/officeDocument/2006/relationships" xmlns:p="http://schemas.openxmlformats.org/presentationml/2006/main">
-  <p:cSld name="Slide 10">
+  <p:cSld>
     <p:spTree>
       <p:nvGrpSpPr>
         <p:cNvPr id="1" name=""/>
@@ -2344,13 +2243,12 @@
             <a:avLst/>
           </a:prstGeom>
           <a:noFill/>
-          <a:ln/>
-        </p:spPr>
-        <p:txBody>
-          <a:bodyPr wrap="square" rtlCol="0" anchor="ctr"/>
-          <a:lstStyle/>
-          <a:p>
-            <a:pPr indent="0" marL="0">
+        </p:spPr>
+        <p:txBody>
+          <a:bodyPr wrap="square" rtlCol="0" anchor="ctr"/>
+          <a:lstStyle/>
+          <a:p>
+            <a:pPr marL="0" indent="0">
               <a:buNone/>
             </a:pPr>
             <a:r>
@@ -2358,9 +2256,9 @@
                 <a:solidFill>
                   <a:srgbClr val="F8FAFC"/>
                 </a:solidFill>
-                <a:latin typeface="Microsoft YaHei" pitchFamily="34" charset="0"/>
-                <a:ea typeface="Microsoft YaHei" pitchFamily="34" charset="-122"/>
-                <a:cs typeface="Microsoft YaHei" pitchFamily="34" charset="-120"/>
+                <a:latin typeface="微软雅黑" panose="020B0503020204020204" pitchFamily="34" charset="-122"/>
+                <a:ea typeface="微软雅黑" panose="020B0503020204020204" pitchFamily="34" charset="-122"/>
+                <a:cs typeface="微软雅黑" panose="020B0503020204020204" pitchFamily="34" charset="-120"/>
               </a:rPr>
               <a:t>路线图与请求支持</a:t>
             </a:r>
@@ -2383,13 +2281,12 @@
             <a:avLst/>
           </a:prstGeom>
           <a:noFill/>
-          <a:ln/>
-        </p:spPr>
-        <p:txBody>
-          <a:bodyPr wrap="square" rtlCol="0" anchor="ctr"/>
-          <a:lstStyle/>
-          <a:p>
-            <a:pPr indent="0" marL="0">
+        </p:spPr>
+        <p:txBody>
+          <a:bodyPr wrap="square" rtlCol="0" anchor="ctr"/>
+          <a:lstStyle/>
+          <a:p>
+            <a:pPr marL="0" indent="0">
               <a:buNone/>
             </a:pPr>
             <a:r>
@@ -2397,9 +2294,9 @@
                 <a:solidFill>
                   <a:srgbClr val="94A3B8"/>
                 </a:solidFill>
-                <a:latin typeface="Microsoft YaHei" pitchFamily="34" charset="0"/>
-                <a:ea typeface="Microsoft YaHei" pitchFamily="34" charset="-122"/>
-                <a:cs typeface="Microsoft YaHei" pitchFamily="34" charset="-120"/>
+                <a:latin typeface="微软雅黑" panose="020B0503020204020204" pitchFamily="34" charset="-122"/>
+                <a:ea typeface="微软雅黑" panose="020B0503020204020204" pitchFamily="34" charset="-122"/>
+                <a:cs typeface="微软雅黑" panose="020B0503020204020204" pitchFamily="34" charset="-120"/>
               </a:rPr>
               <a:t>初赛交方案，复赛交可运行 Demo，决赛交现场闭环</a:t>
             </a:r>
@@ -2449,13 +2346,12 @@
             <a:avLst/>
           </a:prstGeom>
           <a:noFill/>
-          <a:ln/>
-        </p:spPr>
-        <p:txBody>
-          <a:bodyPr wrap="square" rtlCol="0" anchor="ctr"/>
-          <a:lstStyle/>
-          <a:p>
-            <a:pPr algn="ctr" indent="0" marL="0">
+        </p:spPr>
+        <p:txBody>
+          <a:bodyPr wrap="square" rtlCol="0" anchor="ctr"/>
+          <a:lstStyle/>
+          <a:p>
+            <a:pPr marL="0" indent="0" algn="ctr">
               <a:buNone/>
             </a:pPr>
             <a:r>
@@ -2463,9 +2359,9 @@
                 <a:solidFill>
                   <a:srgbClr val="22D3EE"/>
                 </a:solidFill>
-                <a:latin typeface="Microsoft YaHei" pitchFamily="34" charset="0"/>
-                <a:ea typeface="Microsoft YaHei" pitchFamily="34" charset="-122"/>
-                <a:cs typeface="Microsoft YaHei" pitchFamily="34" charset="-120"/>
+                <a:latin typeface="微软雅黑" panose="020B0503020204020204" pitchFamily="34" charset="-122"/>
+                <a:ea typeface="微软雅黑" panose="020B0503020204020204" pitchFamily="34" charset="-122"/>
+                <a:cs typeface="微软雅黑" panose="020B0503020204020204" pitchFamily="34" charset="-120"/>
               </a:rPr>
               <a:t>初赛</a:t>
             </a:r>
@@ -2488,13 +2384,12 @@
             <a:avLst/>
           </a:prstGeom>
           <a:noFill/>
-          <a:ln/>
-        </p:spPr>
-        <p:txBody>
-          <a:bodyPr wrap="square" rtlCol="0" anchor="ctr"/>
-          <a:lstStyle/>
-          <a:p>
-            <a:pPr algn="ctr" indent="0" marL="0">
+        </p:spPr>
+        <p:txBody>
+          <a:bodyPr wrap="square" rtlCol="0" anchor="ctr"/>
+          <a:lstStyle/>
+          <a:p>
+            <a:pPr marL="0" indent="0" algn="ctr">
               <a:buNone/>
             </a:pPr>
             <a:r>
@@ -2502,9 +2397,9 @@
                 <a:solidFill>
                   <a:srgbClr val="94A3B8"/>
                 </a:solidFill>
-                <a:latin typeface="Microsoft YaHei" pitchFamily="34" charset="0"/>
-                <a:ea typeface="Microsoft YaHei" pitchFamily="34" charset="-122"/>
-                <a:cs typeface="Microsoft YaHei" pitchFamily="34" charset="-120"/>
+                <a:latin typeface="微软雅黑" panose="020B0503020204020204" pitchFamily="34" charset="-122"/>
+                <a:ea typeface="微软雅黑" panose="020B0503020204020204" pitchFamily="34" charset="-122"/>
+                <a:cs typeface="微软雅黑" panose="020B0503020204020204" pitchFamily="34" charset="-120"/>
               </a:rPr>
               <a:t>7/16–8/16</a:t>
             </a:r>
@@ -2527,13 +2422,12 @@
             <a:avLst/>
           </a:prstGeom>
           <a:noFill/>
-          <a:ln/>
-        </p:spPr>
-        <p:txBody>
-          <a:bodyPr wrap="square" rtlCol="0" anchor="ctr"/>
-          <a:lstStyle/>
-          <a:p>
-            <a:pPr algn="ctr" indent="0" marL="0">
+        </p:spPr>
+        <p:txBody>
+          <a:bodyPr wrap="square" rtlCol="0" anchor="ctr"/>
+          <a:lstStyle/>
+          <a:p>
+            <a:pPr marL="0" indent="0" algn="ctr">
               <a:buNone/>
             </a:pPr>
             <a:r>
@@ -2541,16 +2435,16 @@
                 <a:solidFill>
                   <a:srgbClr val="F8FAFC"/>
                 </a:solidFill>
-                <a:latin typeface="Microsoft YaHei" pitchFamily="34" charset="0"/>
-                <a:ea typeface="Microsoft YaHei" pitchFamily="34" charset="-122"/>
-                <a:cs typeface="Microsoft YaHei" pitchFamily="34" charset="-120"/>
+                <a:latin typeface="微软雅黑" panose="020B0503020204020204" pitchFamily="34" charset="-122"/>
+                <a:ea typeface="微软雅黑" panose="020B0503020204020204" pitchFamily="34" charset="-122"/>
+                <a:cs typeface="微软雅黑" panose="020B0503020204020204" pitchFamily="34" charset="-120"/>
               </a:rPr>
               <a:t>作品简介</a:t>
             </a:r>
             <a:endParaRPr lang="en-US" sz="1400" dirty="0"/>
           </a:p>
           <a:p>
-            <a:pPr algn="ctr" indent="0" marL="0">
+            <a:pPr marL="0" indent="0" algn="ctr">
               <a:buNone/>
             </a:pPr>
             <a:r>
@@ -2558,16 +2452,16 @@
                 <a:solidFill>
                   <a:srgbClr val="F8FAFC"/>
                 </a:solidFill>
-                <a:latin typeface="Microsoft YaHei" pitchFamily="34" charset="0"/>
-                <a:ea typeface="Microsoft YaHei" pitchFamily="34" charset="-122"/>
-                <a:cs typeface="Microsoft YaHei" pitchFamily="34" charset="-120"/>
+                <a:latin typeface="微软雅黑" panose="020B0503020204020204" pitchFamily="34" charset="-122"/>
+                <a:ea typeface="微软雅黑" panose="020B0503020204020204" pitchFamily="34" charset="-122"/>
+                <a:cs typeface="微软雅黑" panose="020B0503020204020204" pitchFamily="34" charset="-120"/>
               </a:rPr>
               <a:t>方案 PPT/PDF</a:t>
             </a:r>
             <a:endParaRPr lang="en-US" sz="1400" dirty="0"/>
           </a:p>
           <a:p>
-            <a:pPr algn="ctr" indent="0" marL="0">
+            <a:pPr marL="0" indent="0" algn="ctr">
               <a:buNone/>
             </a:pPr>
             <a:r>
@@ -2575,9 +2469,9 @@
                 <a:solidFill>
                   <a:srgbClr val="F8FAFC"/>
                 </a:solidFill>
-                <a:latin typeface="Microsoft YaHei" pitchFamily="34" charset="0"/>
-                <a:ea typeface="Microsoft YaHei" pitchFamily="34" charset="-122"/>
-                <a:cs typeface="Microsoft YaHei" pitchFamily="34" charset="-120"/>
+                <a:latin typeface="微软雅黑" panose="020B0503020204020204" pitchFamily="34" charset="-122"/>
+                <a:ea typeface="微软雅黑" panose="020B0503020204020204" pitchFamily="34" charset="-122"/>
+                <a:cs typeface="微软雅黑" panose="020B0503020204020204" pitchFamily="34" charset="-120"/>
               </a:rPr>
               <a:t>可选原型/视频</a:t>
             </a:r>
@@ -2627,13 +2521,12 @@
             <a:avLst/>
           </a:prstGeom>
           <a:noFill/>
-          <a:ln/>
-        </p:spPr>
-        <p:txBody>
-          <a:bodyPr wrap="square" rtlCol="0" anchor="ctr"/>
-          <a:lstStyle/>
-          <a:p>
-            <a:pPr algn="ctr" indent="0" marL="0">
+        </p:spPr>
+        <p:txBody>
+          <a:bodyPr wrap="square" rtlCol="0" anchor="ctr"/>
+          <a:lstStyle/>
+          <a:p>
+            <a:pPr marL="0" indent="0" algn="ctr">
               <a:buNone/>
             </a:pPr>
             <a:r>
@@ -2641,9 +2534,9 @@
                 <a:solidFill>
                   <a:srgbClr val="22D3EE"/>
                 </a:solidFill>
-                <a:latin typeface="Microsoft YaHei" pitchFamily="34" charset="0"/>
-                <a:ea typeface="Microsoft YaHei" pitchFamily="34" charset="-122"/>
-                <a:cs typeface="Microsoft YaHei" pitchFamily="34" charset="-120"/>
+                <a:latin typeface="微软雅黑" panose="020B0503020204020204" pitchFamily="34" charset="-122"/>
+                <a:ea typeface="微软雅黑" panose="020B0503020204020204" pitchFamily="34" charset="-122"/>
+                <a:cs typeface="微软雅黑" panose="020B0503020204020204" pitchFamily="34" charset="-120"/>
               </a:rPr>
               <a:t>复赛</a:t>
             </a:r>
@@ -2666,13 +2559,12 @@
             <a:avLst/>
           </a:prstGeom>
           <a:noFill/>
-          <a:ln/>
-        </p:spPr>
-        <p:txBody>
-          <a:bodyPr wrap="square" rtlCol="0" anchor="ctr"/>
-          <a:lstStyle/>
-          <a:p>
-            <a:pPr algn="ctr" indent="0" marL="0">
+        </p:spPr>
+        <p:txBody>
+          <a:bodyPr wrap="square" rtlCol="0" anchor="ctr"/>
+          <a:lstStyle/>
+          <a:p>
+            <a:pPr marL="0" indent="0" algn="ctr">
               <a:buNone/>
             </a:pPr>
             <a:r>
@@ -2680,9 +2572,9 @@
                 <a:solidFill>
                   <a:srgbClr val="94A3B8"/>
                 </a:solidFill>
-                <a:latin typeface="Microsoft YaHei" pitchFamily="34" charset="0"/>
-                <a:ea typeface="Microsoft YaHei" pitchFamily="34" charset="-122"/>
-                <a:cs typeface="Microsoft YaHei" pitchFamily="34" charset="-120"/>
+                <a:latin typeface="微软雅黑" panose="020B0503020204020204" pitchFamily="34" charset="-122"/>
+                <a:ea typeface="微软雅黑" panose="020B0503020204020204" pitchFamily="34" charset="-122"/>
+                <a:cs typeface="微软雅黑" panose="020B0503020204020204" pitchFamily="34" charset="-120"/>
               </a:rPr>
               <a:t>8/25–9/23</a:t>
             </a:r>
@@ -2705,13 +2597,12 @@
             <a:avLst/>
           </a:prstGeom>
           <a:noFill/>
-          <a:ln/>
-        </p:spPr>
-        <p:txBody>
-          <a:bodyPr wrap="square" rtlCol="0" anchor="ctr"/>
-          <a:lstStyle/>
-          <a:p>
-            <a:pPr algn="ctr" indent="0" marL="0">
+        </p:spPr>
+        <p:txBody>
+          <a:bodyPr wrap="square" rtlCol="0" anchor="ctr"/>
+          <a:lstStyle/>
+          <a:p>
+            <a:pPr marL="0" indent="0" algn="ctr">
               <a:buNone/>
             </a:pPr>
             <a:r>
@@ -2719,16 +2610,16 @@
                 <a:solidFill>
                   <a:srgbClr val="F8FAFC"/>
                 </a:solidFill>
-                <a:latin typeface="Microsoft YaHei" pitchFamily="34" charset="0"/>
-                <a:ea typeface="Microsoft YaHei" pitchFamily="34" charset="-122"/>
-                <a:cs typeface="Microsoft YaHei" pitchFamily="34" charset="-120"/>
+                <a:latin typeface="微软雅黑" panose="020B0503020204020204" pitchFamily="34" charset="-122"/>
+                <a:ea typeface="微软雅黑" panose="020B0503020204020204" pitchFamily="34" charset="-122"/>
+                <a:cs typeface="微软雅黑" panose="020B0503020204020204" pitchFamily="34" charset="-120"/>
               </a:rPr>
               <a:t>容器沙箱</a:t>
             </a:r>
             <a:endParaRPr lang="en-US" sz="1400" dirty="0"/>
           </a:p>
           <a:p>
-            <a:pPr algn="ctr" indent="0" marL="0">
+            <a:pPr marL="0" indent="0" algn="ctr">
               <a:buNone/>
             </a:pPr>
             <a:r>
@@ -2736,16 +2627,16 @@
                 <a:solidFill>
                   <a:srgbClr val="F8FAFC"/>
                 </a:solidFill>
-                <a:latin typeface="Microsoft YaHei" pitchFamily="34" charset="0"/>
-                <a:ea typeface="Microsoft YaHei" pitchFamily="34" charset="-122"/>
-                <a:cs typeface="Microsoft YaHei" pitchFamily="34" charset="-120"/>
+                <a:latin typeface="微软雅黑" panose="020B0503020204020204" pitchFamily="34" charset="-122"/>
+                <a:ea typeface="微软雅黑" panose="020B0503020204020204" pitchFamily="34" charset="-122"/>
+                <a:cs typeface="微软雅黑" panose="020B0503020204020204" pitchFamily="34" charset="-120"/>
               </a:rPr>
               <a:t>数据库</a:t>
             </a:r>
             <a:endParaRPr lang="en-US" sz="1400" dirty="0"/>
           </a:p>
           <a:p>
-            <a:pPr algn="ctr" indent="0" marL="0">
+            <a:pPr marL="0" indent="0" algn="ctr">
               <a:buNone/>
             </a:pPr>
             <a:r>
@@ -2753,9 +2644,9 @@
                 <a:solidFill>
                   <a:srgbClr val="F8FAFC"/>
                 </a:solidFill>
-                <a:latin typeface="Microsoft YaHei" pitchFamily="34" charset="0"/>
-                <a:ea typeface="Microsoft YaHei" pitchFamily="34" charset="-122"/>
-                <a:cs typeface="Microsoft YaHei" pitchFamily="34" charset="-120"/>
+                <a:latin typeface="微软雅黑" panose="020B0503020204020204" pitchFamily="34" charset="-122"/>
+                <a:ea typeface="微软雅黑" panose="020B0503020204020204" pitchFamily="34" charset="-122"/>
+                <a:cs typeface="微软雅黑" panose="020B0503020204020204" pitchFamily="34" charset="-120"/>
               </a:rPr>
               <a:t>更多任务与运行说明</a:t>
             </a:r>
@@ -2805,13 +2696,12 @@
             <a:avLst/>
           </a:prstGeom>
           <a:noFill/>
-          <a:ln/>
-        </p:spPr>
-        <p:txBody>
-          <a:bodyPr wrap="square" rtlCol="0" anchor="ctr"/>
-          <a:lstStyle/>
-          <a:p>
-            <a:pPr algn="ctr" indent="0" marL="0">
+        </p:spPr>
+        <p:txBody>
+          <a:bodyPr wrap="square" rtlCol="0" anchor="ctr"/>
+          <a:lstStyle/>
+          <a:p>
+            <a:pPr marL="0" indent="0" algn="ctr">
               <a:buNone/>
             </a:pPr>
             <a:r>
@@ -2819,9 +2709,9 @@
                 <a:solidFill>
                   <a:srgbClr val="22D3EE"/>
                 </a:solidFill>
-                <a:latin typeface="Microsoft YaHei" pitchFamily="34" charset="0"/>
-                <a:ea typeface="Microsoft YaHei" pitchFamily="34" charset="-122"/>
-                <a:cs typeface="Microsoft YaHei" pitchFamily="34" charset="-120"/>
+                <a:latin typeface="微软雅黑" panose="020B0503020204020204" pitchFamily="34" charset="-122"/>
+                <a:ea typeface="微软雅黑" panose="020B0503020204020204" pitchFamily="34" charset="-122"/>
+                <a:cs typeface="微软雅黑" panose="020B0503020204020204" pitchFamily="34" charset="-120"/>
               </a:rPr>
               <a:t>决赛</a:t>
             </a:r>
@@ -2844,13 +2734,12 @@
             <a:avLst/>
           </a:prstGeom>
           <a:noFill/>
-          <a:ln/>
-        </p:spPr>
-        <p:txBody>
-          <a:bodyPr wrap="square" rtlCol="0" anchor="ctr"/>
-          <a:lstStyle/>
-          <a:p>
-            <a:pPr algn="ctr" indent="0" marL="0">
+        </p:spPr>
+        <p:txBody>
+          <a:bodyPr wrap="square" rtlCol="0" anchor="ctr"/>
+          <a:lstStyle/>
+          <a:p>
+            <a:pPr marL="0" indent="0" algn="ctr">
               <a:buNone/>
             </a:pPr>
             <a:r>
@@ -2858,9 +2747,9 @@
                 <a:solidFill>
                   <a:srgbClr val="94A3B8"/>
                 </a:solidFill>
-                <a:latin typeface="Microsoft YaHei" pitchFamily="34" charset="0"/>
-                <a:ea typeface="Microsoft YaHei" pitchFamily="34" charset="-122"/>
-                <a:cs typeface="Microsoft YaHei" pitchFamily="34" charset="-120"/>
+                <a:latin typeface="微软雅黑" panose="020B0503020204020204" pitchFamily="34" charset="-122"/>
+                <a:ea typeface="微软雅黑" panose="020B0503020204020204" pitchFamily="34" charset="-122"/>
+                <a:cs typeface="微软雅黑" panose="020B0503020204020204" pitchFamily="34" charset="-120"/>
               </a:rPr>
               <a:t>9/22–9/23</a:t>
             </a:r>
@@ -2883,13 +2772,12 @@
             <a:avLst/>
           </a:prstGeom>
           <a:noFill/>
-          <a:ln/>
-        </p:spPr>
-        <p:txBody>
-          <a:bodyPr wrap="square" rtlCol="0" anchor="ctr"/>
-          <a:lstStyle/>
-          <a:p>
-            <a:pPr algn="ctr" indent="0" marL="0">
+        </p:spPr>
+        <p:txBody>
+          <a:bodyPr wrap="square" rtlCol="0" anchor="ctr"/>
+          <a:lstStyle/>
+          <a:p>
+            <a:pPr marL="0" indent="0" algn="ctr">
               <a:buNone/>
             </a:pPr>
             <a:r>
@@ -2897,16 +2785,16 @@
                 <a:solidFill>
                   <a:srgbClr val="F8FAFC"/>
                 </a:solidFill>
-                <a:latin typeface="Microsoft YaHei" pitchFamily="34" charset="0"/>
-                <a:ea typeface="Microsoft YaHei" pitchFamily="34" charset="-122"/>
-                <a:cs typeface="Microsoft YaHei" pitchFamily="34" charset="-120"/>
+                <a:latin typeface="微软雅黑" panose="020B0503020204020204" pitchFamily="34" charset="-122"/>
+                <a:ea typeface="微软雅黑" panose="020B0503020204020204" pitchFamily="34" charset="-122"/>
+                <a:cs typeface="微软雅黑" panose="020B0503020204020204" pitchFamily="34" charset="-120"/>
               </a:rPr>
               <a:t>现场 Demo</a:t>
             </a:r>
             <a:endParaRPr lang="en-US" sz="1400" dirty="0"/>
           </a:p>
           <a:p>
-            <a:pPr algn="ctr" indent="0" marL="0">
+            <a:pPr marL="0" indent="0" algn="ctr">
               <a:buNone/>
             </a:pPr>
             <a:r>
@@ -2914,16 +2802,16 @@
                 <a:solidFill>
                   <a:srgbClr val="F8FAFC"/>
                 </a:solidFill>
-                <a:latin typeface="Microsoft YaHei" pitchFamily="34" charset="0"/>
-                <a:ea typeface="Microsoft YaHei" pitchFamily="34" charset="-122"/>
-                <a:cs typeface="Microsoft YaHei" pitchFamily="34" charset="-120"/>
+                <a:latin typeface="微软雅黑" panose="020B0503020204020204" pitchFamily="34" charset="-122"/>
+                <a:ea typeface="微软雅黑" panose="020B0503020204020204" pitchFamily="34" charset="-122"/>
+                <a:cs typeface="微软雅黑" panose="020B0503020204020204" pitchFamily="34" charset="-120"/>
               </a:rPr>
               <a:t>路演答辩</a:t>
             </a:r>
             <a:endParaRPr lang="en-US" sz="1400" dirty="0"/>
           </a:p>
           <a:p>
-            <a:pPr algn="ctr" indent="0" marL="0">
+            <a:pPr marL="0" indent="0" algn="ctr">
               <a:buNone/>
             </a:pPr>
             <a:r>
@@ -2931,9 +2819,9 @@
                 <a:solidFill>
                   <a:srgbClr val="F8FAFC"/>
                 </a:solidFill>
-                <a:latin typeface="Microsoft YaHei" pitchFamily="34" charset="0"/>
-                <a:ea typeface="Microsoft YaHei" pitchFamily="34" charset="-122"/>
-                <a:cs typeface="Microsoft YaHei" pitchFamily="34" charset="-120"/>
+                <a:latin typeface="微软雅黑" panose="020B0503020204020204" pitchFamily="34" charset="-122"/>
+                <a:ea typeface="微软雅黑" panose="020B0503020204020204" pitchFamily="34" charset="-122"/>
+                <a:cs typeface="微软雅黑" panose="020B0503020204020204" pitchFamily="34" charset="-120"/>
               </a:rPr>
               <a:t>最终工程材料</a:t>
             </a:r>
@@ -2983,13 +2871,12 @@
             <a:avLst/>
           </a:prstGeom>
           <a:noFill/>
-          <a:ln/>
-        </p:spPr>
-        <p:txBody>
-          <a:bodyPr wrap="square" rtlCol="0" anchor="ctr"/>
-          <a:lstStyle/>
-          <a:p>
-            <a:pPr algn="ctr" indent="0" marL="0">
+        </p:spPr>
+        <p:txBody>
+          <a:bodyPr wrap="square" rtlCol="0" anchor="ctr"/>
+          <a:lstStyle/>
+          <a:p>
+            <a:pPr marL="0" indent="0" algn="ctr">
               <a:buNone/>
             </a:pPr>
             <a:r>
@@ -2997,9 +2884,9 @@
                 <a:solidFill>
                   <a:srgbClr val="22D3EE"/>
                 </a:solidFill>
-                <a:latin typeface="Microsoft YaHei" pitchFamily="34" charset="0"/>
-                <a:ea typeface="Microsoft YaHei" pitchFamily="34" charset="-122"/>
-                <a:cs typeface="Microsoft YaHei" pitchFamily="34" charset="-120"/>
+                <a:latin typeface="微软雅黑" panose="020B0503020204020204" pitchFamily="34" charset="-122"/>
+                <a:ea typeface="微软雅黑" panose="020B0503020204020204" pitchFamily="34" charset="-122"/>
+                <a:cs typeface="微软雅黑" panose="020B0503020204020204" pitchFamily="34" charset="-120"/>
               </a:rPr>
               <a:t>产品化</a:t>
             </a:r>
@@ -3022,13 +2909,12 @@
             <a:avLst/>
           </a:prstGeom>
           <a:noFill/>
-          <a:ln/>
-        </p:spPr>
-        <p:txBody>
-          <a:bodyPr wrap="square" rtlCol="0" anchor="ctr"/>
-          <a:lstStyle/>
-          <a:p>
-            <a:pPr algn="ctr" indent="0" marL="0">
+        </p:spPr>
+        <p:txBody>
+          <a:bodyPr wrap="square" rtlCol="0" anchor="ctr"/>
+          <a:lstStyle/>
+          <a:p>
+            <a:pPr marL="0" indent="0" algn="ctr">
               <a:buNone/>
             </a:pPr>
             <a:r>
@@ -3036,9 +2922,9 @@
                 <a:solidFill>
                   <a:srgbClr val="94A3B8"/>
                 </a:solidFill>
-                <a:latin typeface="Microsoft YaHei" pitchFamily="34" charset="0"/>
-                <a:ea typeface="Microsoft YaHei" pitchFamily="34" charset="-122"/>
-                <a:cs typeface="Microsoft YaHei" pitchFamily="34" charset="-120"/>
+                <a:latin typeface="微软雅黑" panose="020B0503020204020204" pitchFamily="34" charset="-122"/>
+                <a:ea typeface="微软雅黑" panose="020B0503020204020204" pitchFamily="34" charset="-122"/>
+                <a:cs typeface="微软雅黑" panose="020B0503020204020204" pitchFamily="34" charset="-120"/>
               </a:rPr>
               <a:t>赛后</a:t>
             </a:r>
@@ -3061,13 +2947,12 @@
             <a:avLst/>
           </a:prstGeom>
           <a:noFill/>
-          <a:ln/>
-        </p:spPr>
-        <p:txBody>
-          <a:bodyPr wrap="square" rtlCol="0" anchor="ctr"/>
-          <a:lstStyle/>
-          <a:p>
-            <a:pPr algn="ctr" indent="0" marL="0">
+        </p:spPr>
+        <p:txBody>
+          <a:bodyPr wrap="square" rtlCol="0" anchor="ctr"/>
+          <a:lstStyle/>
+          <a:p>
+            <a:pPr marL="0" indent="0" algn="ctr">
               <a:buNone/>
             </a:pPr>
             <a:r>
@@ -3075,16 +2960,16 @@
                 <a:solidFill>
                   <a:srgbClr val="F8FAFC"/>
                 </a:solidFill>
-                <a:latin typeface="Microsoft YaHei" pitchFamily="34" charset="0"/>
-                <a:ea typeface="Microsoft YaHei" pitchFamily="34" charset="-122"/>
-                <a:cs typeface="Microsoft YaHei" pitchFamily="34" charset="-120"/>
+                <a:latin typeface="微软雅黑" panose="020B0503020204020204" pitchFamily="34" charset="-122"/>
+                <a:ea typeface="微软雅黑" panose="020B0503020204020204" pitchFamily="34" charset="-122"/>
+                <a:cs typeface="微软雅黑" panose="020B0503020204020204" pitchFamily="34" charset="-120"/>
               </a:rPr>
               <a:t>LMS 对接</a:t>
             </a:r>
             <a:endParaRPr lang="en-US" sz="1400" dirty="0"/>
           </a:p>
           <a:p>
-            <a:pPr algn="ctr" indent="0" marL="0">
+            <a:pPr marL="0" indent="0" algn="ctr">
               <a:buNone/>
             </a:pPr>
             <a:r>
@@ -3092,16 +2977,16 @@
                 <a:solidFill>
                   <a:srgbClr val="F8FAFC"/>
                 </a:solidFill>
-                <a:latin typeface="Microsoft YaHei" pitchFamily="34" charset="0"/>
-                <a:ea typeface="Microsoft YaHei" pitchFamily="34" charset="-122"/>
-                <a:cs typeface="Microsoft YaHei" pitchFamily="34" charset="-120"/>
+                <a:latin typeface="微软雅黑" panose="020B0503020204020204" pitchFamily="34" charset="-122"/>
+                <a:ea typeface="微软雅黑" panose="020B0503020204020204" pitchFamily="34" charset="-122"/>
+                <a:cs typeface="微软雅黑" panose="020B0503020204020204" pitchFamily="34" charset="-120"/>
               </a:rPr>
               <a:t>人工确认写分</a:t>
             </a:r>
             <a:endParaRPr lang="en-US" sz="1400" dirty="0"/>
           </a:p>
           <a:p>
-            <a:pPr algn="ctr" indent="0" marL="0">
+            <a:pPr marL="0" indent="0" algn="ctr">
               <a:buNone/>
             </a:pPr>
             <a:r>
@@ -3109,9 +2994,9 @@
                 <a:solidFill>
                   <a:srgbClr val="F8FAFC"/>
                 </a:solidFill>
-                <a:latin typeface="Microsoft YaHei" pitchFamily="34" charset="0"/>
-                <a:ea typeface="Microsoft YaHei" pitchFamily="34" charset="-122"/>
-                <a:cs typeface="Microsoft YaHei" pitchFamily="34" charset="-120"/>
+                <a:latin typeface="微软雅黑" panose="020B0503020204020204" pitchFamily="34" charset="-122"/>
+                <a:ea typeface="微软雅黑" panose="020B0503020204020204" pitchFamily="34" charset="-122"/>
+                <a:cs typeface="微软雅黑" panose="020B0503020204020204" pitchFamily="34" charset="-120"/>
               </a:rPr>
               <a:t>课程模板市场</a:t>
             </a:r>
@@ -3134,13 +3019,12 @@
             <a:avLst/>
           </a:prstGeom>
           <a:noFill/>
-          <a:ln/>
-        </p:spPr>
-        <p:txBody>
-          <a:bodyPr wrap="square" rtlCol="0" anchor="ctr"/>
-          <a:lstStyle/>
-          <a:p>
-            <a:pPr indent="0" marL="0">
+        </p:spPr>
+        <p:txBody>
+          <a:bodyPr wrap="square" rtlCol="0" anchor="ctr"/>
+          <a:lstStyle/>
+          <a:p>
+            <a:pPr marL="0" indent="0">
               <a:buNone/>
             </a:pPr>
             <a:r>
@@ -3148,9 +3032,9 @@
                 <a:solidFill>
                   <a:srgbClr val="F8FAFC"/>
                 </a:solidFill>
-                <a:latin typeface="Microsoft YaHei" pitchFamily="34" charset="0"/>
-                <a:ea typeface="Microsoft YaHei" pitchFamily="34" charset="-122"/>
-                <a:cs typeface="Microsoft YaHei" pitchFamily="34" charset="-120"/>
+                <a:latin typeface="微软雅黑" panose="020B0503020204020204" pitchFamily="34" charset="-122"/>
+                <a:ea typeface="微软雅黑" panose="020B0503020204020204" pitchFamily="34" charset="-122"/>
+                <a:cs typeface="微软雅黑" panose="020B0503020204020204" pitchFamily="34" charset="-120"/>
               </a:rPr>
               <a:t>一句话：用可验证证据驱动编程实训，而不是又一个会聊天的助教。</a:t>
             </a:r>
@@ -3173,13 +3057,12 @@
             <a:avLst/>
           </a:prstGeom>
           <a:noFill/>
-          <a:ln/>
-        </p:spPr>
-        <p:txBody>
-          <a:bodyPr wrap="square" rtlCol="0" anchor="ctr"/>
-          <a:lstStyle/>
-          <a:p>
-            <a:pPr indent="0" marL="0">
+        </p:spPr>
+        <p:txBody>
+          <a:bodyPr wrap="square" rtlCol="0" anchor="ctr"/>
+          <a:lstStyle/>
+          <a:p>
+            <a:pPr marL="0" indent="0">
               <a:buNone/>
             </a:pPr>
             <a:r>
@@ -3187,9 +3070,9 @@
                 <a:solidFill>
                   <a:srgbClr val="94A3B8"/>
                 </a:solidFill>
-                <a:latin typeface="Consolas" pitchFamily="34" charset="0"/>
-                <a:ea typeface="Consolas" pitchFamily="34" charset="-122"/>
-                <a:cs typeface="Consolas" pitchFamily="34" charset="-120"/>
+                <a:latin typeface="Consolas" panose="020B0609020204030204" pitchFamily="34" charset="0"/>
+                <a:ea typeface="Consolas" panose="020B0609020204030204" pitchFamily="34" charset="-122"/>
+                <a:cs typeface="Consolas" panose="020B0609020204030204" pitchFamily="34" charset="-120"/>
               </a:rPr>
               <a:t>本地演示：cd D:\code_space\evidence-loop  →  npm run dev  →  http://localhost:4173</a:t>
             </a:r>
@@ -3212,13 +3095,12 @@
             <a:avLst/>
           </a:prstGeom>
           <a:noFill/>
-          <a:ln/>
-        </p:spPr>
-        <p:txBody>
-          <a:bodyPr wrap="square" rtlCol="0" anchor="ctr"/>
-          <a:lstStyle/>
-          <a:p>
-            <a:pPr indent="0" marL="0">
+        </p:spPr>
+        <p:txBody>
+          <a:bodyPr wrap="square" rtlCol="0" anchor="ctr"/>
+          <a:lstStyle/>
+          <a:p>
+            <a:pPr marL="0" indent="0">
               <a:buNone/>
             </a:pPr>
             <a:r>
@@ -3226,9 +3108,9 @@
                 <a:solidFill>
                   <a:srgbClr val="94A3B8"/>
                 </a:solidFill>
-                <a:latin typeface="Microsoft YaHei" pitchFamily="34" charset="0"/>
-                <a:ea typeface="Microsoft YaHei" pitchFamily="34" charset="-122"/>
-                <a:cs typeface="Microsoft YaHei" pitchFamily="34" charset="-120"/>
+                <a:latin typeface="微软雅黑" panose="020B0503020204020204" pitchFamily="34" charset="-122"/>
+                <a:ea typeface="微软雅黑" panose="020B0503020204020204" pitchFamily="34" charset="-122"/>
+                <a:cs typeface="微软雅黑" panose="020B0503020204020204" pitchFamily="34" charset="-120"/>
               </a:rPr>
               <a:t>EvidenceLoop · GOAI Boundless Agents · AI+教育</a:t>
             </a:r>
@@ -3251,13 +3133,12 @@
             <a:avLst/>
           </a:prstGeom>
           <a:noFill/>
-          <a:ln/>
-        </p:spPr>
-        <p:txBody>
-          <a:bodyPr wrap="square" rtlCol="0" anchor="ctr"/>
-          <a:lstStyle/>
-          <a:p>
-            <a:pPr algn="r" indent="0" marL="0">
+        </p:spPr>
+        <p:txBody>
+          <a:bodyPr wrap="square" rtlCol="0" anchor="ctr"/>
+          <a:lstStyle/>
+          <a:p>
+            <a:pPr marL="0" indent="0" algn="r">
               <a:buNone/>
             </a:pPr>
             <a:r>
@@ -3265,9 +3146,9 @@
                 <a:solidFill>
                   <a:srgbClr val="94A3B8"/>
                 </a:solidFill>
-                <a:latin typeface="Microsoft YaHei" pitchFamily="34" charset="0"/>
-                <a:ea typeface="Microsoft YaHei" pitchFamily="34" charset="-122"/>
-                <a:cs typeface="Microsoft YaHei" pitchFamily="34" charset="-120"/>
+                <a:latin typeface="微软雅黑" panose="020B0503020204020204" pitchFamily="34" charset="-122"/>
+                <a:ea typeface="微软雅黑" panose="020B0503020204020204" pitchFamily="34" charset="-122"/>
+                <a:cs typeface="微软雅黑" panose="020B0503020204020204" pitchFamily="34" charset="-120"/>
               </a:rPr>
               <a:t>10 / 10</a:t>
             </a:r>
@@ -3285,7 +3166,7 @@
 
 <file path=ppt/slides/slide2.xml><?xml version="1.0" encoding="utf-8"?>
 <p:sld xmlns:a="http://schemas.openxmlformats.org/drawingml/2006/main" xmlns:r="http://schemas.openxmlformats.org/officeDocument/2006/relationships" xmlns:p="http://schemas.openxmlformats.org/presentationml/2006/main">
-  <p:cSld name="Slide 2">
+  <p:cSld>
     <p:spTree>
       <p:nvGrpSpPr>
         <p:cNvPr id="1" name=""/>
@@ -3365,13 +3246,12 @@
             <a:avLst/>
           </a:prstGeom>
           <a:noFill/>
-          <a:ln/>
-        </p:spPr>
-        <p:txBody>
-          <a:bodyPr wrap="square" rtlCol="0" anchor="ctr"/>
-          <a:lstStyle/>
-          <a:p>
-            <a:pPr indent="0" marL="0">
+        </p:spPr>
+        <p:txBody>
+          <a:bodyPr wrap="square" rtlCol="0" anchor="ctr"/>
+          <a:lstStyle/>
+          <a:p>
+            <a:pPr marL="0" indent="0">
               <a:buNone/>
             </a:pPr>
             <a:r>
@@ -3379,9 +3259,9 @@
                 <a:solidFill>
                   <a:srgbClr val="F8FAFC"/>
                 </a:solidFill>
-                <a:latin typeface="Microsoft YaHei" pitchFamily="34" charset="0"/>
-                <a:ea typeface="Microsoft YaHei" pitchFamily="34" charset="-122"/>
-                <a:cs typeface="Microsoft YaHei" pitchFamily="34" charset="-120"/>
+                <a:latin typeface="微软雅黑" panose="020B0503020204020204" pitchFamily="34" charset="-122"/>
+                <a:ea typeface="微软雅黑" panose="020B0503020204020204" pitchFamily="34" charset="-122"/>
+                <a:cs typeface="微软雅黑" panose="020B0503020204020204" pitchFamily="34" charset="-120"/>
               </a:rPr>
               <a:t>问题：实训反馈缺证据、不可复验</a:t>
             </a:r>
@@ -3404,13 +3284,12 @@
             <a:avLst/>
           </a:prstGeom>
           <a:noFill/>
-          <a:ln/>
-        </p:spPr>
-        <p:txBody>
-          <a:bodyPr wrap="square" rtlCol="0" anchor="ctr"/>
-          <a:lstStyle/>
-          <a:p>
-            <a:pPr indent="0" marL="0">
+        </p:spPr>
+        <p:txBody>
+          <a:bodyPr wrap="square" rtlCol="0" anchor="ctr"/>
+          <a:lstStyle/>
+          <a:p>
+            <a:pPr marL="0" indent="0">
               <a:buNone/>
             </a:pPr>
             <a:r>
@@ -3418,9 +3297,9 @@
                 <a:solidFill>
                   <a:srgbClr val="94A3B8"/>
                 </a:solidFill>
-                <a:latin typeface="Microsoft YaHei" pitchFamily="34" charset="0"/>
-                <a:ea typeface="Microsoft YaHei" pitchFamily="34" charset="-122"/>
-                <a:cs typeface="Microsoft YaHei" pitchFamily="34" charset="-120"/>
+                <a:latin typeface="微软雅黑" panose="020B0503020204020204" pitchFamily="34" charset="-122"/>
+                <a:ea typeface="微软雅黑" panose="020B0503020204020204" pitchFamily="34" charset="-122"/>
+                <a:cs typeface="微软雅黑" panose="020B0503020204020204" pitchFamily="34" charset="-120"/>
               </a:rPr>
               <a:t>当前 AI 助教与传统 OJ 都没把“评分—解释—下一动作”闭环打通</a:t>
             </a:r>
@@ -3497,13 +3376,12 @@
             <a:avLst/>
           </a:prstGeom>
           <a:noFill/>
-          <a:ln/>
-        </p:spPr>
-        <p:txBody>
-          <a:bodyPr wrap="square" rtlCol="0" anchor="ctr"/>
-          <a:lstStyle/>
-          <a:p>
-            <a:pPr algn="ctr" indent="0" marL="0">
+        </p:spPr>
+        <p:txBody>
+          <a:bodyPr wrap="square" rtlCol="0" anchor="ctr"/>
+          <a:lstStyle/>
+          <a:p>
+            <a:pPr marL="0" indent="0" algn="ctr">
               <a:buNone/>
             </a:pPr>
             <a:r>
@@ -3511,9 +3389,9 @@
                 <a:solidFill>
                   <a:srgbClr val="22D3EE"/>
                 </a:solidFill>
-                <a:latin typeface="Microsoft YaHei" pitchFamily="34" charset="0"/>
-                <a:ea typeface="Microsoft YaHei" pitchFamily="34" charset="-122"/>
-                <a:cs typeface="Microsoft YaHei" pitchFamily="34" charset="-120"/>
+                <a:latin typeface="微软雅黑" panose="020B0503020204020204" pitchFamily="34" charset="-122"/>
+                <a:ea typeface="微软雅黑" panose="020B0503020204020204" pitchFamily="34" charset="-122"/>
+                <a:cs typeface="微软雅黑" panose="020B0503020204020204" pitchFamily="34" charset="-120"/>
               </a:rPr>
               <a:t>1</a:t>
             </a:r>
@@ -3536,13 +3414,12 @@
             <a:avLst/>
           </a:prstGeom>
           <a:noFill/>
-          <a:ln/>
-        </p:spPr>
-        <p:txBody>
-          <a:bodyPr wrap="square" rtlCol="0" anchor="ctr"/>
-          <a:lstStyle/>
-          <a:p>
-            <a:pPr indent="0" marL="0">
+        </p:spPr>
+        <p:txBody>
+          <a:bodyPr wrap="square" rtlCol="0" anchor="ctr"/>
+          <a:lstStyle/>
+          <a:p>
+            <a:pPr marL="0" indent="0">
               <a:buNone/>
             </a:pPr>
             <a:r>
@@ -3550,9 +3427,9 @@
                 <a:solidFill>
                   <a:srgbClr val="F8FAFC"/>
                 </a:solidFill>
-                <a:latin typeface="Microsoft YaHei" pitchFamily="34" charset="0"/>
-                <a:ea typeface="Microsoft YaHei" pitchFamily="34" charset="-122"/>
-                <a:cs typeface="Microsoft YaHei" pitchFamily="34" charset="-120"/>
+                <a:latin typeface="微软雅黑" panose="020B0503020204020204" pitchFamily="34" charset="-122"/>
+                <a:ea typeface="微软雅黑" panose="020B0503020204020204" pitchFamily="34" charset="-122"/>
+                <a:cs typeface="微软雅黑" panose="020B0503020204020204" pitchFamily="34" charset="-120"/>
               </a:rPr>
               <a:t>自动批改只给对错</a:t>
             </a:r>
@@ -3575,13 +3452,12 @@
             <a:avLst/>
           </a:prstGeom>
           <a:noFill/>
-          <a:ln/>
-        </p:spPr>
-        <p:txBody>
-          <a:bodyPr wrap="square" rtlCol="0" anchor="ctr"/>
-          <a:lstStyle/>
-          <a:p>
-            <a:pPr indent="0" marL="0">
+        </p:spPr>
+        <p:txBody>
+          <a:bodyPr wrap="square" rtlCol="0" anchor="ctr"/>
+          <a:lstStyle/>
+          <a:p>
+            <a:pPr marL="0" indent="0">
               <a:buNone/>
             </a:pPr>
             <a:r>
@@ -3589,9 +3465,9 @@
                 <a:solidFill>
                   <a:srgbClr val="94A3B8"/>
                 </a:solidFill>
-                <a:latin typeface="Microsoft YaHei" pitchFamily="34" charset="0"/>
-                <a:ea typeface="Microsoft YaHei" pitchFamily="34" charset="-122"/>
-                <a:cs typeface="Microsoft YaHei" pitchFamily="34" charset="-120"/>
+                <a:latin typeface="微软雅黑" panose="020B0503020204020204" pitchFamily="34" charset="-122"/>
+                <a:ea typeface="微软雅黑" panose="020B0503020204020204" pitchFamily="34" charset="-122"/>
+                <a:cs typeface="微软雅黑" panose="020B0503020204020204" pitchFamily="34" charset="-120"/>
               </a:rPr>
               <a:t>学员看到 Fail，却不知道为什么错、下一题该修什么。</a:t>
             </a:r>
@@ -3668,13 +3544,12 @@
             <a:avLst/>
           </a:prstGeom>
           <a:noFill/>
-          <a:ln/>
-        </p:spPr>
-        <p:txBody>
-          <a:bodyPr wrap="square" rtlCol="0" anchor="ctr"/>
-          <a:lstStyle/>
-          <a:p>
-            <a:pPr algn="ctr" indent="0" marL="0">
+        </p:spPr>
+        <p:txBody>
+          <a:bodyPr wrap="square" rtlCol="0" anchor="ctr"/>
+          <a:lstStyle/>
+          <a:p>
+            <a:pPr marL="0" indent="0" algn="ctr">
               <a:buNone/>
             </a:pPr>
             <a:r>
@@ -3682,9 +3557,9 @@
                 <a:solidFill>
                   <a:srgbClr val="22D3EE"/>
                 </a:solidFill>
-                <a:latin typeface="Microsoft YaHei" pitchFamily="34" charset="0"/>
-                <a:ea typeface="Microsoft YaHei" pitchFamily="34" charset="-122"/>
-                <a:cs typeface="Microsoft YaHei" pitchFamily="34" charset="-120"/>
+                <a:latin typeface="微软雅黑" panose="020B0503020204020204" pitchFamily="34" charset="-122"/>
+                <a:ea typeface="微软雅黑" panose="020B0503020204020204" pitchFamily="34" charset="-122"/>
+                <a:cs typeface="微软雅黑" panose="020B0503020204020204" pitchFamily="34" charset="-120"/>
               </a:rPr>
               <a:t>2</a:t>
             </a:r>
@@ -3707,13 +3582,12 @@
             <a:avLst/>
           </a:prstGeom>
           <a:noFill/>
-          <a:ln/>
-        </p:spPr>
-        <p:txBody>
-          <a:bodyPr wrap="square" rtlCol="0" anchor="ctr"/>
-          <a:lstStyle/>
-          <a:p>
-            <a:pPr indent="0" marL="0">
+        </p:spPr>
+        <p:txBody>
+          <a:bodyPr wrap="square" rtlCol="0" anchor="ctr"/>
+          <a:lstStyle/>
+          <a:p>
+            <a:pPr marL="0" indent="0">
               <a:buNone/>
             </a:pPr>
             <a:r>
@@ -3721,9 +3595,9 @@
                 <a:solidFill>
                   <a:srgbClr val="F8FAFC"/>
                 </a:solidFill>
-                <a:latin typeface="Microsoft YaHei" pitchFamily="34" charset="0"/>
-                <a:ea typeface="Microsoft YaHei" pitchFamily="34" charset="-122"/>
-                <a:cs typeface="Microsoft YaHei" pitchFamily="34" charset="-120"/>
+                <a:latin typeface="微软雅黑" panose="020B0503020204020204" pitchFamily="34" charset="-122"/>
+                <a:ea typeface="微软雅黑" panose="020B0503020204020204" pitchFamily="34" charset="-122"/>
+                <a:cs typeface="微软雅黑" panose="020B0503020204020204" pitchFamily="34" charset="-120"/>
               </a:rPr>
               <a:t>AI 讲评易幻觉改分</a:t>
             </a:r>
@@ -3746,13 +3620,12 @@
             <a:avLst/>
           </a:prstGeom>
           <a:noFill/>
-          <a:ln/>
-        </p:spPr>
-        <p:txBody>
-          <a:bodyPr wrap="square" rtlCol="0" anchor="ctr"/>
-          <a:lstStyle/>
-          <a:p>
-            <a:pPr indent="0" marL="0">
+        </p:spPr>
+        <p:txBody>
+          <a:bodyPr wrap="square" rtlCol="0" anchor="ctr"/>
+          <a:lstStyle/>
+          <a:p>
+            <a:pPr marL="0" indent="0">
               <a:buNone/>
             </a:pPr>
             <a:r>
@@ -3760,9 +3633,9 @@
                 <a:solidFill>
                   <a:srgbClr val="94A3B8"/>
                 </a:solidFill>
-                <a:latin typeface="Microsoft YaHei" pitchFamily="34" charset="0"/>
-                <a:ea typeface="Microsoft YaHei" pitchFamily="34" charset="-122"/>
-                <a:cs typeface="Microsoft YaHei" pitchFamily="34" charset="-120"/>
+                <a:latin typeface="微软雅黑" panose="020B0503020204020204" pitchFamily="34" charset="-122"/>
+                <a:ea typeface="微软雅黑" panose="020B0503020204020204" pitchFamily="34" charset="-122"/>
+                <a:cs typeface="微软雅黑" panose="020B0503020204020204" pitchFamily="34" charset="-120"/>
               </a:rPr>
               <a:t>模型直接给分与讲解时，容易捏造证据、越权改分。</a:t>
             </a:r>
@@ -3839,13 +3712,12 @@
             <a:avLst/>
           </a:prstGeom>
           <a:noFill/>
-          <a:ln/>
-        </p:spPr>
-        <p:txBody>
-          <a:bodyPr wrap="square" rtlCol="0" anchor="ctr"/>
-          <a:lstStyle/>
-          <a:p>
-            <a:pPr algn="ctr" indent="0" marL="0">
+        </p:spPr>
+        <p:txBody>
+          <a:bodyPr wrap="square" rtlCol="0" anchor="ctr"/>
+          <a:lstStyle/>
+          <a:p>
+            <a:pPr marL="0" indent="0" algn="ctr">
               <a:buNone/>
             </a:pPr>
             <a:r>
@@ -3853,9 +3725,9 @@
                 <a:solidFill>
                   <a:srgbClr val="22D3EE"/>
                 </a:solidFill>
-                <a:latin typeface="Microsoft YaHei" pitchFamily="34" charset="0"/>
-                <a:ea typeface="Microsoft YaHei" pitchFamily="34" charset="-122"/>
-                <a:cs typeface="Microsoft YaHei" pitchFamily="34" charset="-120"/>
+                <a:latin typeface="微软雅黑" panose="020B0503020204020204" pitchFamily="34" charset="-122"/>
+                <a:ea typeface="微软雅黑" panose="020B0503020204020204" pitchFamily="34" charset="-122"/>
+                <a:cs typeface="微软雅黑" panose="020B0503020204020204" pitchFamily="34" charset="-120"/>
               </a:rPr>
               <a:t>3</a:t>
             </a:r>
@@ -3878,13 +3750,12 @@
             <a:avLst/>
           </a:prstGeom>
           <a:noFill/>
-          <a:ln/>
-        </p:spPr>
-        <p:txBody>
-          <a:bodyPr wrap="square" rtlCol="0" anchor="ctr"/>
-          <a:lstStyle/>
-          <a:p>
-            <a:pPr indent="0" marL="0">
+        </p:spPr>
+        <p:txBody>
+          <a:bodyPr wrap="square" rtlCol="0" anchor="ctr"/>
+          <a:lstStyle/>
+          <a:p>
+            <a:pPr marL="0" indent="0">
               <a:buNone/>
             </a:pPr>
             <a:r>
@@ -3892,9 +3763,9 @@
                 <a:solidFill>
                   <a:srgbClr val="F8FAFC"/>
                 </a:solidFill>
-                <a:latin typeface="Microsoft YaHei" pitchFamily="34" charset="0"/>
-                <a:ea typeface="Microsoft YaHei" pitchFamily="34" charset="-122"/>
-                <a:cs typeface="Microsoft YaHei" pitchFamily="34" charset="-120"/>
+                <a:latin typeface="微软雅黑" panose="020B0503020204020204" pitchFamily="34" charset="-122"/>
+                <a:ea typeface="微软雅黑" panose="020B0503020204020204" pitchFamily="34" charset="-122"/>
+                <a:cs typeface="微软雅黑" panose="020B0503020204020204" pitchFamily="34" charset="-120"/>
               </a:rPr>
               <a:t>教师缺行动队列</a:t>
             </a:r>
@@ -3917,13 +3788,12 @@
             <a:avLst/>
           </a:prstGeom>
           <a:noFill/>
-          <a:ln/>
-        </p:spPr>
-        <p:txBody>
-          <a:bodyPr wrap="square" rtlCol="0" anchor="ctr"/>
-          <a:lstStyle/>
-          <a:p>
-            <a:pPr indent="0" marL="0">
+        </p:spPr>
+        <p:txBody>
+          <a:bodyPr wrap="square" rtlCol="0" anchor="ctr"/>
+          <a:lstStyle/>
+          <a:p>
+            <a:pPr marL="0" indent="0">
               <a:buNone/>
             </a:pPr>
             <a:r>
@@ -3931,9 +3801,9 @@
                 <a:solidFill>
                   <a:srgbClr val="94A3B8"/>
                 </a:solidFill>
-                <a:latin typeface="Microsoft YaHei" pitchFamily="34" charset="0"/>
-                <a:ea typeface="Microsoft YaHei" pitchFamily="34" charset="-122"/>
-                <a:cs typeface="Microsoft YaHei" pitchFamily="34" charset="-120"/>
+                <a:latin typeface="微软雅黑" panose="020B0503020204020204" pitchFamily="34" charset="-122"/>
+                <a:ea typeface="微软雅黑" panose="020B0503020204020204" pitchFamily="34" charset="-122"/>
+                <a:cs typeface="微软雅黑" panose="020B0503020204020204" pitchFamily="34" charset="-120"/>
               </a:rPr>
               <a:t>班级层面看不到可干预的薄弱点与证据队列。</a:t>
             </a:r>
@@ -4010,13 +3880,12 @@
             <a:avLst/>
           </a:prstGeom>
           <a:noFill/>
-          <a:ln/>
-        </p:spPr>
-        <p:txBody>
-          <a:bodyPr wrap="square" rtlCol="0" anchor="ctr"/>
-          <a:lstStyle/>
-          <a:p>
-            <a:pPr algn="ctr" indent="0" marL="0">
+        </p:spPr>
+        <p:txBody>
+          <a:bodyPr wrap="square" rtlCol="0" anchor="ctr"/>
+          <a:lstStyle/>
+          <a:p>
+            <a:pPr marL="0" indent="0" algn="ctr">
               <a:buNone/>
             </a:pPr>
             <a:r>
@@ -4024,9 +3893,9 @@
                 <a:solidFill>
                   <a:srgbClr val="22D3EE"/>
                 </a:solidFill>
-                <a:latin typeface="Microsoft YaHei" pitchFamily="34" charset="0"/>
-                <a:ea typeface="Microsoft YaHei" pitchFamily="34" charset="-122"/>
-                <a:cs typeface="Microsoft YaHei" pitchFamily="34" charset="-120"/>
+                <a:latin typeface="微软雅黑" panose="020B0503020204020204" pitchFamily="34" charset="-122"/>
+                <a:ea typeface="微软雅黑" panose="020B0503020204020204" pitchFamily="34" charset="-122"/>
+                <a:cs typeface="微软雅黑" panose="020B0503020204020204" pitchFamily="34" charset="-120"/>
               </a:rPr>
               <a:t>4</a:t>
             </a:r>
@@ -4049,13 +3918,12 @@
             <a:avLst/>
           </a:prstGeom>
           <a:noFill/>
-          <a:ln/>
-        </p:spPr>
-        <p:txBody>
-          <a:bodyPr wrap="square" rtlCol="0" anchor="ctr"/>
-          <a:lstStyle/>
-          <a:p>
-            <a:pPr indent="0" marL="0">
+        </p:spPr>
+        <p:txBody>
+          <a:bodyPr wrap="square" rtlCol="0" anchor="ctr"/>
+          <a:lstStyle/>
+          <a:p>
+            <a:pPr marL="0" indent="0">
               <a:buNone/>
             </a:pPr>
             <a:r>
@@ -4063,9 +3931,9 @@
                 <a:solidFill>
                   <a:srgbClr val="F8FAFC"/>
                 </a:solidFill>
-                <a:latin typeface="Microsoft YaHei" pitchFamily="34" charset="0"/>
-                <a:ea typeface="Microsoft YaHei" pitchFamily="34" charset="-122"/>
-                <a:cs typeface="Microsoft YaHei" pitchFamily="34" charset="-120"/>
+                <a:latin typeface="微软雅黑" panose="020B0503020204020204" pitchFamily="34" charset="-122"/>
+                <a:ea typeface="微软雅黑" panose="020B0503020204020204" pitchFamily="34" charset="-122"/>
+                <a:cs typeface="微软雅黑" panose="020B0503020204020204" pitchFamily="34" charset="-120"/>
               </a:rPr>
               <a:t>OJ 有测但无诊断</a:t>
             </a:r>
@@ -4088,13 +3956,12 @@
             <a:avLst/>
           </a:prstGeom>
           <a:noFill/>
-          <a:ln/>
-        </p:spPr>
-        <p:txBody>
-          <a:bodyPr wrap="square" rtlCol="0" anchor="ctr"/>
-          <a:lstStyle/>
-          <a:p>
-            <a:pPr indent="0" marL="0">
+        </p:spPr>
+        <p:txBody>
+          <a:bodyPr wrap="square" rtlCol="0" anchor="ctr"/>
+          <a:lstStyle/>
+          <a:p>
+            <a:pPr marL="0" indent="0">
               <a:buNone/>
             </a:pPr>
             <a:r>
@@ -4102,9 +3969,9 @@
                 <a:solidFill>
                   <a:srgbClr val="94A3B8"/>
                 </a:solidFill>
-                <a:latin typeface="Microsoft YaHei" pitchFamily="34" charset="0"/>
-                <a:ea typeface="Microsoft YaHei" pitchFamily="34" charset="-122"/>
-                <a:cs typeface="Microsoft YaHei" pitchFamily="34" charset="-120"/>
+                <a:latin typeface="微软雅黑" panose="020B0503020204020204" pitchFamily="34" charset="-122"/>
+                <a:ea typeface="微软雅黑" panose="020B0503020204020204" pitchFamily="34" charset="-122"/>
+                <a:cs typeface="微软雅黑" panose="020B0503020204020204" pitchFamily="34" charset="-120"/>
               </a:rPr>
               <a:t>传统在线评测客观，但缺少 Agent 式任务编排。</a:t>
             </a:r>
@@ -4127,13 +3994,12 @@
             <a:avLst/>
           </a:prstGeom>
           <a:noFill/>
-          <a:ln/>
-        </p:spPr>
-        <p:txBody>
-          <a:bodyPr wrap="square" rtlCol="0" anchor="ctr"/>
-          <a:lstStyle/>
-          <a:p>
-            <a:pPr indent="0" marL="0">
+        </p:spPr>
+        <p:txBody>
+          <a:bodyPr wrap="square" rtlCol="0" anchor="ctr"/>
+          <a:lstStyle/>
+          <a:p>
+            <a:pPr marL="0" indent="0">
               <a:buNone/>
             </a:pPr>
             <a:r>
@@ -4141,9 +4007,9 @@
                 <a:solidFill>
                   <a:srgbClr val="94A3B8"/>
                 </a:solidFill>
-                <a:latin typeface="Microsoft YaHei" pitchFamily="34" charset="0"/>
-                <a:ea typeface="Microsoft YaHei" pitchFamily="34" charset="-122"/>
-                <a:cs typeface="Microsoft YaHei" pitchFamily="34" charset="-120"/>
+                <a:latin typeface="微软雅黑" panose="020B0503020204020204" pitchFamily="34" charset="-122"/>
+                <a:ea typeface="微软雅黑" panose="020B0503020204020204" pitchFamily="34" charset="-122"/>
+                <a:cs typeface="微软雅黑" panose="020B0503020204020204" pitchFamily="34" charset="-120"/>
               </a:rPr>
               <a:t>EvidenceLoop · GOAI Boundless Agents · AI+教育</a:t>
             </a:r>
@@ -4166,13 +4032,12 @@
             <a:avLst/>
           </a:prstGeom>
           <a:noFill/>
-          <a:ln/>
-        </p:spPr>
-        <p:txBody>
-          <a:bodyPr wrap="square" rtlCol="0" anchor="ctr"/>
-          <a:lstStyle/>
-          <a:p>
-            <a:pPr algn="r" indent="0" marL="0">
+        </p:spPr>
+        <p:txBody>
+          <a:bodyPr wrap="square" rtlCol="0" anchor="ctr"/>
+          <a:lstStyle/>
+          <a:p>
+            <a:pPr marL="0" indent="0" algn="r">
               <a:buNone/>
             </a:pPr>
             <a:r>
@@ -4180,9 +4045,9 @@
                 <a:solidFill>
                   <a:srgbClr val="94A3B8"/>
                 </a:solidFill>
-                <a:latin typeface="Microsoft YaHei" pitchFamily="34" charset="0"/>
-                <a:ea typeface="Microsoft YaHei" pitchFamily="34" charset="-122"/>
-                <a:cs typeface="Microsoft YaHei" pitchFamily="34" charset="-120"/>
+                <a:latin typeface="微软雅黑" panose="020B0503020204020204" pitchFamily="34" charset="-122"/>
+                <a:ea typeface="微软雅黑" panose="020B0503020204020204" pitchFamily="34" charset="-122"/>
+                <a:cs typeface="微软雅黑" panose="020B0503020204020204" pitchFamily="34" charset="-120"/>
               </a:rPr>
               <a:t>2 / 10</a:t>
             </a:r>
@@ -4200,7 +4065,7 @@
 
 <file path=ppt/slides/slide3.xml><?xml version="1.0" encoding="utf-8"?>
 <p:sld xmlns:a="http://schemas.openxmlformats.org/drawingml/2006/main" xmlns:r="http://schemas.openxmlformats.org/officeDocument/2006/relationships" xmlns:p="http://schemas.openxmlformats.org/presentationml/2006/main">
-  <p:cSld name="Slide 3">
+  <p:cSld>
     <p:spTree>
       <p:nvGrpSpPr>
         <p:cNvPr id="1" name=""/>
@@ -4280,13 +4145,12 @@
             <a:avLst/>
           </a:prstGeom>
           <a:noFill/>
-          <a:ln/>
-        </p:spPr>
-        <p:txBody>
-          <a:bodyPr wrap="square" rtlCol="0" anchor="ctr"/>
-          <a:lstStyle/>
-          <a:p>
-            <a:pPr indent="0" marL="0">
+        </p:spPr>
+        <p:txBody>
+          <a:bodyPr wrap="square" rtlCol="0" anchor="ctr"/>
+          <a:lstStyle/>
+          <a:p>
+            <a:pPr marL="0" indent="0">
               <a:buNone/>
             </a:pPr>
             <a:r>
@@ -4294,9 +4158,9 @@
                 <a:solidFill>
                   <a:srgbClr val="F8FAFC"/>
                 </a:solidFill>
-                <a:latin typeface="Microsoft YaHei" pitchFamily="34" charset="0"/>
-                <a:ea typeface="Microsoft YaHei" pitchFamily="34" charset="-122"/>
-                <a:cs typeface="Microsoft YaHei" pitchFamily="34" charset="-120"/>
+                <a:latin typeface="微软雅黑" panose="020B0503020204020204" pitchFamily="34" charset="-122"/>
+                <a:ea typeface="微软雅黑" panose="020B0503020204020204" pitchFamily="34" charset="-122"/>
+                <a:cs typeface="微软雅黑" panose="020B0503020204020204" pitchFamily="34" charset="-120"/>
               </a:rPr>
               <a:t>方案：证据优先，模型只解释不改分</a:t>
             </a:r>
@@ -4319,13 +4183,12 @@
             <a:avLst/>
           </a:prstGeom>
           <a:noFill/>
-          <a:ln/>
-        </p:spPr>
-        <p:txBody>
-          <a:bodyPr wrap="square" rtlCol="0" anchor="ctr"/>
-          <a:lstStyle/>
-          <a:p>
-            <a:pPr indent="0" marL="0">
+        </p:spPr>
+        <p:txBody>
+          <a:bodyPr wrap="square" rtlCol="0" anchor="ctr"/>
+          <a:lstStyle/>
+          <a:p>
+            <a:pPr marL="0" indent="0">
               <a:buNone/>
             </a:pPr>
             <a:r>
@@ -4333,9 +4196,9 @@
                 <a:solidFill>
                   <a:srgbClr val="94A3B8"/>
                 </a:solidFill>
-                <a:latin typeface="Microsoft YaHei" pitchFamily="34" charset="0"/>
-                <a:ea typeface="Microsoft YaHei" pitchFamily="34" charset="-122"/>
-                <a:cs typeface="Microsoft YaHei" pitchFamily="34" charset="-120"/>
+                <a:latin typeface="微软雅黑" panose="020B0503020204020204" pitchFamily="34" charset="-122"/>
+                <a:ea typeface="微软雅黑" panose="020B0503020204020204" pitchFamily="34" charset="-122"/>
+                <a:cs typeface="微软雅黑" panose="020B0503020204020204" pitchFamily="34" charset="-120"/>
               </a:rPr>
               <a:t>把评分权留给测试与量规，把解释权留给受证据约束的反馈</a:t>
             </a:r>
@@ -4410,13 +4273,12 @@
             <a:avLst/>
           </a:prstGeom>
           <a:noFill/>
-          <a:ln/>
-        </p:spPr>
-        <p:txBody>
-          <a:bodyPr wrap="square" rtlCol="0" anchor="ctr"/>
-          <a:lstStyle/>
-          <a:p>
-            <a:pPr indent="0" marL="0">
+        </p:spPr>
+        <p:txBody>
+          <a:bodyPr wrap="square" rtlCol="0" anchor="ctr"/>
+          <a:lstStyle/>
+          <a:p>
+            <a:pPr marL="0" indent="0">
               <a:buNone/>
             </a:pPr>
             <a:r>
@@ -4424,9 +4286,9 @@
                 <a:solidFill>
                   <a:srgbClr val="F8FAFC"/>
                 </a:solidFill>
-                <a:latin typeface="Microsoft YaHei" pitchFamily="34" charset="0"/>
-                <a:ea typeface="Microsoft YaHei" pitchFamily="34" charset="-122"/>
-                <a:cs typeface="Microsoft YaHei" pitchFamily="34" charset="-120"/>
+                <a:latin typeface="微软雅黑" panose="020B0503020204020204" pitchFamily="34" charset="-122"/>
+                <a:ea typeface="微软雅黑" panose="020B0503020204020204" pitchFamily="34" charset="-122"/>
+                <a:cs typeface="微软雅黑" panose="020B0503020204020204" pitchFamily="34" charset="-120"/>
               </a:rPr>
               <a:t>证据驱动评分</a:t>
             </a:r>
@@ -4449,13 +4311,12 @@
             <a:avLst/>
           </a:prstGeom>
           <a:noFill/>
-          <a:ln/>
-        </p:spPr>
-        <p:txBody>
-          <a:bodyPr wrap="square" rtlCol="0" anchor="ctr"/>
-          <a:lstStyle/>
-          <a:p>
-            <a:pPr indent="0" marL="0">
+        </p:spPr>
+        <p:txBody>
+          <a:bodyPr wrap="square" rtlCol="0" anchor="ctr"/>
+          <a:lstStyle/>
+          <a:p>
+            <a:pPr marL="0" indent="0">
               <a:buNone/>
             </a:pPr>
             <a:r>
@@ -4463,16 +4324,16 @@
                 <a:solidFill>
                   <a:srgbClr val="94A3B8"/>
                 </a:solidFill>
-                <a:latin typeface="Microsoft YaHei" pitchFamily="34" charset="0"/>
-                <a:ea typeface="Microsoft YaHei" pitchFamily="34" charset="-122"/>
-                <a:cs typeface="Microsoft YaHei" pitchFamily="34" charset="-120"/>
+                <a:latin typeface="微软雅黑" panose="020B0503020204020204" pitchFamily="34" charset="-122"/>
+                <a:ea typeface="微软雅黑" panose="020B0503020204020204" pitchFamily="34" charset="-122"/>
+                <a:cs typeface="微软雅黑" panose="020B0503020204020204" pitchFamily="34" charset="-120"/>
               </a:rPr>
               <a:t>公开/隐藏测试 + 静态检查</a:t>
             </a:r>
             <a:endParaRPr lang="en-US" sz="1500" dirty="0"/>
           </a:p>
           <a:p>
-            <a:pPr indent="0" marL="0">
+            <a:pPr marL="0" indent="0">
               <a:buNone/>
             </a:pPr>
             <a:r>
@@ -4480,9 +4341,9 @@
                 <a:solidFill>
                   <a:srgbClr val="94A3B8"/>
                 </a:solidFill>
-                <a:latin typeface="Microsoft YaHei" pitchFamily="34" charset="0"/>
-                <a:ea typeface="Microsoft YaHei" pitchFamily="34" charset="-122"/>
-                <a:cs typeface="Microsoft YaHei" pitchFamily="34" charset="-120"/>
+                <a:latin typeface="微软雅黑" panose="020B0503020204020204" pitchFamily="34" charset="-122"/>
+                <a:ea typeface="微软雅黑" panose="020B0503020204020204" pitchFamily="34" charset="-122"/>
+                <a:cs typeface="微软雅黑" panose="020B0503020204020204" pitchFamily="34" charset="-120"/>
               </a:rPr>
               <a:t>分数 = 通过证据权重求和</a:t>
             </a:r>
@@ -4557,13 +4418,12 @@
             <a:avLst/>
           </a:prstGeom>
           <a:noFill/>
-          <a:ln/>
-        </p:spPr>
-        <p:txBody>
-          <a:bodyPr wrap="square" rtlCol="0" anchor="ctr"/>
-          <a:lstStyle/>
-          <a:p>
-            <a:pPr indent="0" marL="0">
+        </p:spPr>
+        <p:txBody>
+          <a:bodyPr wrap="square" rtlCol="0" anchor="ctr"/>
+          <a:lstStyle/>
+          <a:p>
+            <a:pPr marL="0" indent="0">
               <a:buNone/>
             </a:pPr>
             <a:r>
@@ -4571,9 +4431,9 @@
                 <a:solidFill>
                   <a:srgbClr val="F8FAFC"/>
                 </a:solidFill>
-                <a:latin typeface="Microsoft YaHei" pitchFamily="34" charset="0"/>
-                <a:ea typeface="Microsoft YaHei" pitchFamily="34" charset="-122"/>
-                <a:cs typeface="Microsoft YaHei" pitchFamily="34" charset="-120"/>
+                <a:latin typeface="微软雅黑" panose="020B0503020204020204" pitchFamily="34" charset="-122"/>
+                <a:ea typeface="微软雅黑" panose="020B0503020204020204" pitchFamily="34" charset="-122"/>
+                <a:cs typeface="微软雅黑" panose="020B0503020204020204" pitchFamily="34" charset="-120"/>
               </a:rPr>
               <a:t>模型只组织反馈</a:t>
             </a:r>
@@ -4596,13 +4456,12 @@
             <a:avLst/>
           </a:prstGeom>
           <a:noFill/>
-          <a:ln/>
-        </p:spPr>
-        <p:txBody>
-          <a:bodyPr wrap="square" rtlCol="0" anchor="ctr"/>
-          <a:lstStyle/>
-          <a:p>
-            <a:pPr indent="0" marL="0">
+        </p:spPr>
+        <p:txBody>
+          <a:bodyPr wrap="square" rtlCol="0" anchor="ctr"/>
+          <a:lstStyle/>
+          <a:p>
+            <a:pPr marL="0" indent="0">
               <a:buNone/>
             </a:pPr>
             <a:r>
@@ -4610,16 +4469,16 @@
                 <a:solidFill>
                   <a:srgbClr val="94A3B8"/>
                 </a:solidFill>
-                <a:latin typeface="Microsoft YaHei" pitchFamily="34" charset="0"/>
-                <a:ea typeface="Microsoft YaHei" pitchFamily="34" charset="-122"/>
-                <a:cs typeface="Microsoft YaHei" pitchFamily="34" charset="-120"/>
+                <a:latin typeface="微软雅黑" panose="020B0503020204020204" pitchFamily="34" charset="-122"/>
+                <a:ea typeface="微软雅黑" panose="020B0503020204020204" pitchFamily="34" charset="-122"/>
+                <a:cs typeface="微软雅黑" panose="020B0503020204020204" pitchFamily="34" charset="-120"/>
               </a:rPr>
               <a:t>LLM 仅生成 summary</a:t>
             </a:r>
             <a:endParaRPr lang="en-US" sz="1500" dirty="0"/>
           </a:p>
           <a:p>
-            <a:pPr indent="0" marL="0">
+            <a:pPr marL="0" indent="0">
               <a:buNone/>
             </a:pPr>
             <a:r>
@@ -4627,9 +4486,9 @@
                 <a:solidFill>
                   <a:srgbClr val="94A3B8"/>
                 </a:solidFill>
-                <a:latin typeface="Microsoft YaHei" pitchFamily="34" charset="0"/>
-                <a:ea typeface="Microsoft YaHei" pitchFamily="34" charset="-122"/>
-                <a:cs typeface="Microsoft YaHei" pitchFamily="34" charset="-120"/>
+                <a:latin typeface="微软雅黑" panose="020B0503020204020204" pitchFamily="34" charset="-122"/>
+                <a:ea typeface="微软雅黑" panose="020B0503020204020204" pitchFamily="34" charset="-122"/>
+                <a:cs typeface="微软雅黑" panose="020B0503020204020204" pitchFamily="34" charset="-120"/>
               </a:rPr>
               <a:t>失败回退本地策略，永不改分</a:t>
             </a:r>
@@ -4704,13 +4563,12 @@
             <a:avLst/>
           </a:prstGeom>
           <a:noFill/>
-          <a:ln/>
-        </p:spPr>
-        <p:txBody>
-          <a:bodyPr wrap="square" rtlCol="0" anchor="ctr"/>
-          <a:lstStyle/>
-          <a:p>
-            <a:pPr indent="0" marL="0">
+        </p:spPr>
+        <p:txBody>
+          <a:bodyPr wrap="square" rtlCol="0" anchor="ctr"/>
+          <a:lstStyle/>
+          <a:p>
+            <a:pPr marL="0" indent="0">
               <a:buNone/>
             </a:pPr>
             <a:r>
@@ -4718,9 +4576,9 @@
                 <a:solidFill>
                   <a:srgbClr val="F8FAFC"/>
                 </a:solidFill>
-                <a:latin typeface="Microsoft YaHei" pitchFamily="34" charset="0"/>
-                <a:ea typeface="Microsoft YaHei" pitchFamily="34" charset="-122"/>
-                <a:cs typeface="Microsoft YaHei" pitchFamily="34" charset="-120"/>
+                <a:latin typeface="微软雅黑" panose="020B0503020204020204" pitchFamily="34" charset="-122"/>
+                <a:ea typeface="微软雅黑" panose="020B0503020204020204" pitchFamily="34" charset="-122"/>
+                <a:cs typeface="微软雅黑" panose="020B0503020204020204" pitchFamily="34" charset="-120"/>
               </a:rPr>
               <a:t>教师只获建议</a:t>
             </a:r>
@@ -4743,13 +4601,12 @@
             <a:avLst/>
           </a:prstGeom>
           <a:noFill/>
-          <a:ln/>
-        </p:spPr>
-        <p:txBody>
-          <a:bodyPr wrap="square" rtlCol="0" anchor="ctr"/>
-          <a:lstStyle/>
-          <a:p>
-            <a:pPr indent="0" marL="0">
+        </p:spPr>
+        <p:txBody>
+          <a:bodyPr wrap="square" rtlCol="0" anchor="ctr"/>
+          <a:lstStyle/>
+          <a:p>
+            <a:pPr marL="0" indent="0">
               <a:buNone/>
             </a:pPr>
             <a:r>
@@ -4757,16 +4614,16 @@
                 <a:solidFill>
                   <a:srgbClr val="94A3B8"/>
                 </a:solidFill>
-                <a:latin typeface="Microsoft YaHei" pitchFamily="34" charset="0"/>
-                <a:ea typeface="Microsoft YaHei" pitchFamily="34" charset="-122"/>
-                <a:cs typeface="Microsoft YaHei" pitchFamily="34" charset="-120"/>
+                <a:latin typeface="微软雅黑" panose="020B0503020204020204" pitchFamily="34" charset="-122"/>
+                <a:ea typeface="微软雅黑" panose="020B0503020204020204" pitchFamily="34" charset="-122"/>
+                <a:cs typeface="微软雅黑" panose="020B0503020204020204" pitchFamily="34" charset="-120"/>
               </a:rPr>
               <a:t>班级学情与干预队列</a:t>
             </a:r>
             <a:endParaRPr lang="en-US" sz="1500" dirty="0"/>
           </a:p>
           <a:p>
-            <a:pPr indent="0" marL="0">
+            <a:pPr marL="0" indent="0">
               <a:buNone/>
             </a:pPr>
             <a:r>
@@ -4774,9 +4631,9 @@
                 <a:solidFill>
                   <a:srgbClr val="94A3B8"/>
                 </a:solidFill>
-                <a:latin typeface="Microsoft YaHei" pitchFamily="34" charset="0"/>
-                <a:ea typeface="Microsoft YaHei" pitchFamily="34" charset="-122"/>
-                <a:cs typeface="Microsoft YaHei" pitchFamily="34" charset="-120"/>
+                <a:latin typeface="微软雅黑" panose="020B0503020204020204" pitchFamily="34" charset="-122"/>
+                <a:ea typeface="微软雅黑" panose="020B0503020204020204" pitchFamily="34" charset="-122"/>
+                <a:cs typeface="微软雅黑" panose="020B0503020204020204" pitchFamily="34" charset="-120"/>
               </a:rPr>
               <a:t>不自动写正式成绩</a:t>
             </a:r>
@@ -4799,13 +4656,12 @@
             <a:avLst/>
           </a:prstGeom>
           <a:noFill/>
-          <a:ln/>
-        </p:spPr>
-        <p:txBody>
-          <a:bodyPr wrap="square" rtlCol="0" anchor="ctr"/>
-          <a:lstStyle/>
-          <a:p>
-            <a:pPr indent="0" marL="0">
+        </p:spPr>
+        <p:txBody>
+          <a:bodyPr wrap="square" rtlCol="0" anchor="ctr"/>
+          <a:lstStyle/>
+          <a:p>
+            <a:pPr marL="0" indent="0">
               <a:buNone/>
             </a:pPr>
             <a:r>
@@ -4813,9 +4669,9 @@
                 <a:solidFill>
                   <a:srgbClr val="22D3EE"/>
                 </a:solidFill>
-                <a:latin typeface="Microsoft YaHei" pitchFamily="34" charset="0"/>
-                <a:ea typeface="Microsoft YaHei" pitchFamily="34" charset="-122"/>
-                <a:cs typeface="Microsoft YaHei" pitchFamily="34" charset="-120"/>
+                <a:latin typeface="微软雅黑" panose="020B0503020204020204" pitchFamily="34" charset="-122"/>
+                <a:ea typeface="微软雅黑" panose="020B0503020204020204" pitchFamily="34" charset="-122"/>
+                <a:cs typeface="微软雅黑" panose="020B0503020204020204" pitchFamily="34" charset="-120"/>
               </a:rPr>
               <a:t>硬约束：评分可复现 · 解释可溯源 · 写分需人工确认</a:t>
             </a:r>
@@ -4838,13 +4694,12 @@
             <a:avLst/>
           </a:prstGeom>
           <a:noFill/>
-          <a:ln/>
-        </p:spPr>
-        <p:txBody>
-          <a:bodyPr wrap="square" rtlCol="0" anchor="ctr"/>
-          <a:lstStyle/>
-          <a:p>
-            <a:pPr indent="0" marL="0">
+        </p:spPr>
+        <p:txBody>
+          <a:bodyPr wrap="square" rtlCol="0" anchor="ctr"/>
+          <a:lstStyle/>
+          <a:p>
+            <a:pPr marL="0" indent="0">
               <a:buNone/>
             </a:pPr>
             <a:r>
@@ -4852,9 +4707,9 @@
                 <a:solidFill>
                   <a:srgbClr val="94A3B8"/>
                 </a:solidFill>
-                <a:latin typeface="Microsoft YaHei" pitchFamily="34" charset="0"/>
-                <a:ea typeface="Microsoft YaHei" pitchFamily="34" charset="-122"/>
-                <a:cs typeface="Microsoft YaHei" pitchFamily="34" charset="-120"/>
+                <a:latin typeface="微软雅黑" panose="020B0503020204020204" pitchFamily="34" charset="-122"/>
+                <a:ea typeface="微软雅黑" panose="020B0503020204020204" pitchFamily="34" charset="-122"/>
+                <a:cs typeface="微软雅黑" panose="020B0503020204020204" pitchFamily="34" charset="-120"/>
               </a:rPr>
               <a:t>EvidenceLoop · GOAI Boundless Agents · AI+教育</a:t>
             </a:r>
@@ -4877,13 +4732,12 @@
             <a:avLst/>
           </a:prstGeom>
           <a:noFill/>
-          <a:ln/>
-        </p:spPr>
-        <p:txBody>
-          <a:bodyPr wrap="square" rtlCol="0" anchor="ctr"/>
-          <a:lstStyle/>
-          <a:p>
-            <a:pPr algn="r" indent="0" marL="0">
+        </p:spPr>
+        <p:txBody>
+          <a:bodyPr wrap="square" rtlCol="0" anchor="ctr"/>
+          <a:lstStyle/>
+          <a:p>
+            <a:pPr marL="0" indent="0" algn="r">
               <a:buNone/>
             </a:pPr>
             <a:r>
@@ -4891,9 +4745,9 @@
                 <a:solidFill>
                   <a:srgbClr val="94A3B8"/>
                 </a:solidFill>
-                <a:latin typeface="Microsoft YaHei" pitchFamily="34" charset="0"/>
-                <a:ea typeface="Microsoft YaHei" pitchFamily="34" charset="-122"/>
-                <a:cs typeface="Microsoft YaHei" pitchFamily="34" charset="-120"/>
+                <a:latin typeface="微软雅黑" panose="020B0503020204020204" pitchFamily="34" charset="-122"/>
+                <a:ea typeface="微软雅黑" panose="020B0503020204020204" pitchFamily="34" charset="-122"/>
+                <a:cs typeface="微软雅黑" panose="020B0503020204020204" pitchFamily="34" charset="-120"/>
               </a:rPr>
               <a:t>3 / 10</a:t>
             </a:r>
@@ -4911,7 +4765,7 @@
 
 <file path=ppt/slides/slide4.xml><?xml version="1.0" encoding="utf-8"?>
 <p:sld xmlns:a="http://schemas.openxmlformats.org/drawingml/2006/main" xmlns:r="http://schemas.openxmlformats.org/officeDocument/2006/relationships" xmlns:p="http://schemas.openxmlformats.org/presentationml/2006/main">
-  <p:cSld name="Slide 4">
+  <p:cSld>
     <p:spTree>
       <p:nvGrpSpPr>
         <p:cNvPr id="1" name=""/>
@@ -4991,13 +4845,12 @@
             <a:avLst/>
           </a:prstGeom>
           <a:noFill/>
-          <a:ln/>
-        </p:spPr>
-        <p:txBody>
-          <a:bodyPr wrap="square" rtlCol="0" anchor="ctr"/>
-          <a:lstStyle/>
-          <a:p>
-            <a:pPr indent="0" marL="0">
+        </p:spPr>
+        <p:txBody>
+          <a:bodyPr wrap="square" rtlCol="0" anchor="ctr"/>
+          <a:lstStyle/>
+          <a:p>
+            <a:pPr marL="0" indent="0">
               <a:buNone/>
             </a:pPr>
             <a:r>
@@ -5005,9 +4858,9 @@
                 <a:solidFill>
                   <a:srgbClr val="F8FAFC"/>
                 </a:solidFill>
-                <a:latin typeface="Microsoft YaHei" pitchFamily="34" charset="0"/>
-                <a:ea typeface="Microsoft YaHei" pitchFamily="34" charset="-122"/>
-                <a:cs typeface="Microsoft YaHei" pitchFamily="34" charset="-120"/>
+                <a:latin typeface="微软雅黑" panose="020B0503020204020204" pitchFamily="34" charset="-122"/>
+                <a:ea typeface="微软雅黑" panose="020B0503020204020204" pitchFamily="34" charset="-122"/>
+                <a:cs typeface="微软雅黑" panose="020B0503020204020204" pitchFamily="34" charset="-120"/>
               </a:rPr>
               <a:t>目标用户与价值</a:t>
             </a:r>
@@ -5030,13 +4883,12 @@
             <a:avLst/>
           </a:prstGeom>
           <a:noFill/>
-          <a:ln/>
-        </p:spPr>
-        <p:txBody>
-          <a:bodyPr wrap="square" rtlCol="0" anchor="ctr"/>
-          <a:lstStyle/>
-          <a:p>
-            <a:pPr indent="0" marL="0">
+        </p:spPr>
+        <p:txBody>
+          <a:bodyPr wrap="square" rtlCol="0" anchor="ctr"/>
+          <a:lstStyle/>
+          <a:p>
+            <a:pPr marL="0" indent="0">
               <a:buNone/>
             </a:pPr>
             <a:r>
@@ -5044,9 +4896,9 @@
                 <a:solidFill>
                   <a:srgbClr val="94A3B8"/>
                 </a:solidFill>
-                <a:latin typeface="Microsoft YaHei" pitchFamily="34" charset="0"/>
-                <a:ea typeface="Microsoft YaHei" pitchFamily="34" charset="-122"/>
-                <a:cs typeface="Microsoft YaHei" pitchFamily="34" charset="-120"/>
+                <a:latin typeface="微软雅黑" panose="020B0503020204020204" pitchFamily="34" charset="-122"/>
+                <a:ea typeface="微软雅黑" panose="020B0503020204020204" pitchFamily="34" charset="-122"/>
+                <a:cs typeface="微软雅黑" panose="020B0503020204020204" pitchFamily="34" charset="-120"/>
               </a:rPr>
               <a:t>三类角色共享同一套证据闭环</a:t>
             </a:r>
@@ -5123,13 +4975,12 @@
             <a:avLst/>
           </a:prstGeom>
           <a:noFill/>
-          <a:ln/>
-        </p:spPr>
-        <p:txBody>
-          <a:bodyPr wrap="square" rtlCol="0" anchor="ctr"/>
-          <a:lstStyle/>
-          <a:p>
-            <a:pPr algn="ctr" indent="0" marL="0">
+        </p:spPr>
+        <p:txBody>
+          <a:bodyPr wrap="square" rtlCol="0" anchor="ctr"/>
+          <a:lstStyle/>
+          <a:p>
+            <a:pPr marL="0" indent="0" algn="ctr">
               <a:buNone/>
             </a:pPr>
             <a:r>
@@ -5137,9 +4988,9 @@
                 <a:solidFill>
                   <a:srgbClr val="22D3EE"/>
                 </a:solidFill>
-                <a:latin typeface="Microsoft YaHei" pitchFamily="34" charset="0"/>
-                <a:ea typeface="Microsoft YaHei" pitchFamily="34" charset="-122"/>
-                <a:cs typeface="Microsoft YaHei" pitchFamily="34" charset="-120"/>
+                <a:latin typeface="微软雅黑" panose="020B0503020204020204" pitchFamily="34" charset="-122"/>
+                <a:ea typeface="微软雅黑" panose="020B0503020204020204" pitchFamily="34" charset="-122"/>
+                <a:cs typeface="微软雅黑" panose="020B0503020204020204" pitchFamily="34" charset="-120"/>
               </a:rPr>
               <a:t>编程初学者</a:t>
             </a:r>
@@ -5162,13 +5013,12 @@
             <a:avLst/>
           </a:prstGeom>
           <a:noFill/>
-          <a:ln/>
-        </p:spPr>
-        <p:txBody>
-          <a:bodyPr wrap="square" rtlCol="0" anchor="ctr"/>
-          <a:lstStyle/>
-          <a:p>
-            <a:pPr indent="0" marL="0">
+        </p:spPr>
+        <p:txBody>
+          <a:bodyPr wrap="square" rtlCol="0" anchor="ctr"/>
+          <a:lstStyle/>
+          <a:p>
+            <a:pPr marL="0" indent="0">
               <a:buNone/>
             </a:pPr>
             <a:r>
@@ -5176,9 +5026,9 @@
                 <a:solidFill>
                   <a:srgbClr val="F8FAFC"/>
                 </a:solidFill>
-                <a:latin typeface="Microsoft YaHei" pitchFamily="34" charset="0"/>
-                <a:ea typeface="Microsoft YaHei" pitchFamily="34" charset="-122"/>
-                <a:cs typeface="Microsoft YaHei" pitchFamily="34" charset="-120"/>
+                <a:latin typeface="微软雅黑" panose="020B0503020204020204" pitchFamily="34" charset="-122"/>
+                <a:ea typeface="微软雅黑" panose="020B0503020204020204" pitchFamily="34" charset="-122"/>
+                <a:cs typeface="微软雅黑" panose="020B0503020204020204" pitchFamily="34" charset="-120"/>
               </a:rPr>
               <a:t>即时、可解释、可复现的作业反馈</a:t>
             </a:r>
@@ -5201,13 +5051,12 @@
             <a:avLst/>
           </a:prstGeom>
           <a:noFill/>
-          <a:ln/>
-        </p:spPr>
-        <p:txBody>
-          <a:bodyPr wrap="square" rtlCol="0" anchor="ctr"/>
-          <a:lstStyle/>
-          <a:p>
-            <a:pPr indent="0" marL="0">
+        </p:spPr>
+        <p:txBody>
+          <a:bodyPr wrap="square" rtlCol="0" anchor="ctr"/>
+          <a:lstStyle/>
+          <a:p>
+            <a:pPr marL="0" indent="0">
               <a:buNone/>
             </a:pPr>
             <a:r>
@@ -5215,9 +5064,9 @@
                 <a:solidFill>
                   <a:srgbClr val="94A3B8"/>
                 </a:solidFill>
-                <a:latin typeface="Microsoft YaHei" pitchFamily="34" charset="0"/>
-                <a:ea typeface="Microsoft YaHei" pitchFamily="34" charset="-122"/>
-                <a:cs typeface="Microsoft YaHei" pitchFamily="34" charset="-120"/>
+                <a:latin typeface="微软雅黑" panose="020B0503020204020204" pitchFamily="34" charset="-122"/>
+                <a:ea typeface="微软雅黑" panose="020B0503020204020204" pitchFamily="34" charset="-122"/>
+                <a:cs typeface="微软雅黑" panose="020B0503020204020204" pitchFamily="34" charset="-120"/>
               </a:rPr>
               <a:t>知道错在哪 · 下一题修什么</a:t>
             </a:r>
@@ -5294,13 +5143,12 @@
             <a:avLst/>
           </a:prstGeom>
           <a:noFill/>
-          <a:ln/>
-        </p:spPr>
-        <p:txBody>
-          <a:bodyPr wrap="square" rtlCol="0" anchor="ctr"/>
-          <a:lstStyle/>
-          <a:p>
-            <a:pPr algn="ctr" indent="0" marL="0">
+        </p:spPr>
+        <p:txBody>
+          <a:bodyPr wrap="square" rtlCol="0" anchor="ctr"/>
+          <a:lstStyle/>
+          <a:p>
+            <a:pPr marL="0" indent="0" algn="ctr">
               <a:buNone/>
             </a:pPr>
             <a:r>
@@ -5308,9 +5156,9 @@
                 <a:solidFill>
                   <a:srgbClr val="22D3EE"/>
                 </a:solidFill>
-                <a:latin typeface="Microsoft YaHei" pitchFamily="34" charset="0"/>
-                <a:ea typeface="Microsoft YaHei" pitchFamily="34" charset="-122"/>
-                <a:cs typeface="Microsoft YaHei" pitchFamily="34" charset="-120"/>
+                <a:latin typeface="微软雅黑" panose="020B0503020204020204" pitchFamily="34" charset="-122"/>
+                <a:ea typeface="微软雅黑" panose="020B0503020204020204" pitchFamily="34" charset="-122"/>
+                <a:cs typeface="微软雅黑" panose="020B0503020204020204" pitchFamily="34" charset="-120"/>
               </a:rPr>
               <a:t>实训教师 / 助教</a:t>
             </a:r>
@@ -5333,13 +5181,12 @@
             <a:avLst/>
           </a:prstGeom>
           <a:noFill/>
-          <a:ln/>
-        </p:spPr>
-        <p:txBody>
-          <a:bodyPr wrap="square" rtlCol="0" anchor="ctr"/>
-          <a:lstStyle/>
-          <a:p>
-            <a:pPr indent="0" marL="0">
+        </p:spPr>
+        <p:txBody>
+          <a:bodyPr wrap="square" rtlCol="0" anchor="ctr"/>
+          <a:lstStyle/>
+          <a:p>
+            <a:pPr marL="0" indent="0">
               <a:buNone/>
             </a:pPr>
             <a:r>
@@ -5347,9 +5194,9 @@
                 <a:solidFill>
                   <a:srgbClr val="F8FAFC"/>
                 </a:solidFill>
-                <a:latin typeface="Microsoft YaHei" pitchFamily="34" charset="0"/>
-                <a:ea typeface="Microsoft YaHei" pitchFamily="34" charset="-122"/>
-                <a:cs typeface="Microsoft YaHei" pitchFamily="34" charset="-120"/>
+                <a:latin typeface="微软雅黑" panose="020B0503020204020204" pitchFamily="34" charset="-122"/>
+                <a:ea typeface="微软雅黑" panose="020B0503020204020204" pitchFamily="34" charset="-122"/>
+                <a:cs typeface="微软雅黑" panose="020B0503020204020204" pitchFamily="34" charset="-120"/>
               </a:rPr>
               <a:t>班级学情 + 薄弱点关注队列</a:t>
             </a:r>
@@ -5372,13 +5219,12 @@
             <a:avLst/>
           </a:prstGeom>
           <a:noFill/>
-          <a:ln/>
-        </p:spPr>
-        <p:txBody>
-          <a:bodyPr wrap="square" rtlCol="0" anchor="ctr"/>
-          <a:lstStyle/>
-          <a:p>
-            <a:pPr indent="0" marL="0">
+        </p:spPr>
+        <p:txBody>
+          <a:bodyPr wrap="square" rtlCol="0" anchor="ctr"/>
+          <a:lstStyle/>
+          <a:p>
+            <a:pPr marL="0" indent="0">
               <a:buNone/>
             </a:pPr>
             <a:r>
@@ -5386,9 +5232,9 @@
                 <a:solidFill>
                   <a:srgbClr val="94A3B8"/>
                 </a:solidFill>
-                <a:latin typeface="Microsoft YaHei" pitchFamily="34" charset="0"/>
-                <a:ea typeface="Microsoft YaHei" pitchFamily="34" charset="-122"/>
-                <a:cs typeface="Microsoft YaHei" pitchFamily="34" charset="-120"/>
+                <a:latin typeface="微软雅黑" panose="020B0503020204020204" pitchFamily="34" charset="-122"/>
+                <a:ea typeface="微软雅黑" panose="020B0503020204020204" pitchFamily="34" charset="-122"/>
+                <a:cs typeface="微软雅黑" panose="020B0503020204020204" pitchFamily="34" charset="-120"/>
               </a:rPr>
               <a:t>按证据干预，而不是泛聊天</a:t>
             </a:r>
@@ -5465,13 +5311,12 @@
             <a:avLst/>
           </a:prstGeom>
           <a:noFill/>
-          <a:ln/>
-        </p:spPr>
-        <p:txBody>
-          <a:bodyPr wrap="square" rtlCol="0" anchor="ctr"/>
-          <a:lstStyle/>
-          <a:p>
-            <a:pPr algn="ctr" indent="0" marL="0">
+        </p:spPr>
+        <p:txBody>
+          <a:bodyPr wrap="square" rtlCol="0" anchor="ctr"/>
+          <a:lstStyle/>
+          <a:p>
+            <a:pPr marL="0" indent="0" algn="ctr">
               <a:buNone/>
             </a:pPr>
             <a:r>
@@ -5479,9 +5324,9 @@
                 <a:solidFill>
                   <a:srgbClr val="22D3EE"/>
                 </a:solidFill>
-                <a:latin typeface="Microsoft YaHei" pitchFamily="34" charset="0"/>
-                <a:ea typeface="Microsoft YaHei" pitchFamily="34" charset="-122"/>
-                <a:cs typeface="Microsoft YaHei" pitchFamily="34" charset="-120"/>
+                <a:latin typeface="微软雅黑" panose="020B0503020204020204" pitchFamily="34" charset="-122"/>
+                <a:ea typeface="微软雅黑" panose="020B0503020204020204" pitchFamily="34" charset="-122"/>
+                <a:cs typeface="微软雅黑" panose="020B0503020204020204" pitchFamily="34" charset="-120"/>
               </a:rPr>
               <a:t>课程产品团队</a:t>
             </a:r>
@@ -5504,13 +5349,12 @@
             <a:avLst/>
           </a:prstGeom>
           <a:noFill/>
-          <a:ln/>
-        </p:spPr>
-        <p:txBody>
-          <a:bodyPr wrap="square" rtlCol="0" anchor="ctr"/>
-          <a:lstStyle/>
-          <a:p>
-            <a:pPr indent="0" marL="0">
+        </p:spPr>
+        <p:txBody>
+          <a:bodyPr wrap="square" rtlCol="0" anchor="ctr"/>
+          <a:lstStyle/>
+          <a:p>
+            <a:pPr marL="0" indent="0">
               <a:buNone/>
             </a:pPr>
             <a:r>
@@ -5518,9 +5362,9 @@
                 <a:solidFill>
                   <a:srgbClr val="F8FAFC"/>
                 </a:solidFill>
-                <a:latin typeface="Microsoft YaHei" pitchFamily="34" charset="0"/>
-                <a:ea typeface="Microsoft YaHei" pitchFamily="34" charset="-122"/>
-                <a:cs typeface="Microsoft YaHei" pitchFamily="34" charset="-120"/>
+                <a:latin typeface="微软雅黑" panose="020B0503020204020204" pitchFamily="34" charset="-122"/>
+                <a:ea typeface="微软雅黑" panose="020B0503020204020204" pitchFamily="34" charset="-122"/>
+                <a:cs typeface="微软雅黑" panose="020B0503020204020204" pitchFamily="34" charset="-120"/>
               </a:rPr>
               <a:t>可复用 Agent 模板与量规</a:t>
             </a:r>
@@ -5543,13 +5387,12 @@
             <a:avLst/>
           </a:prstGeom>
           <a:noFill/>
-          <a:ln/>
-        </p:spPr>
-        <p:txBody>
-          <a:bodyPr wrap="square" rtlCol="0" anchor="ctr"/>
-          <a:lstStyle/>
-          <a:p>
-            <a:pPr indent="0" marL="0">
+        </p:spPr>
+        <p:txBody>
+          <a:bodyPr wrap="square" rtlCol="0" anchor="ctr"/>
+          <a:lstStyle/>
+          <a:p>
+            <a:pPr marL="0" indent="0">
               <a:buNone/>
             </a:pPr>
             <a:r>
@@ -5557,9 +5400,9 @@
                 <a:solidFill>
                   <a:srgbClr val="94A3B8"/>
                 </a:solidFill>
-                <a:latin typeface="Microsoft YaHei" pitchFamily="34" charset="0"/>
-                <a:ea typeface="Microsoft YaHei" pitchFamily="34" charset="-122"/>
-                <a:cs typeface="Microsoft YaHei" pitchFamily="34" charset="-120"/>
+                <a:latin typeface="微软雅黑" panose="020B0503020204020204" pitchFamily="34" charset="-122"/>
+                <a:ea typeface="微软雅黑" panose="020B0503020204020204" pitchFamily="34" charset="-122"/>
+                <a:cs typeface="微软雅黑" panose="020B0503020204020204" pitchFamily="34" charset="-120"/>
               </a:rPr>
               <a:t>不是一次性演示脚本</a:t>
             </a:r>
@@ -5582,13 +5425,12 @@
             <a:avLst/>
           </a:prstGeom>
           <a:noFill/>
-          <a:ln/>
-        </p:spPr>
-        <p:txBody>
-          <a:bodyPr wrap="square" rtlCol="0" anchor="ctr"/>
-          <a:lstStyle/>
-          <a:p>
-            <a:pPr indent="0" marL="0">
+        </p:spPr>
+        <p:txBody>
+          <a:bodyPr wrap="square" rtlCol="0" anchor="ctr"/>
+          <a:lstStyle/>
+          <a:p>
+            <a:pPr marL="0" indent="0">
               <a:buNone/>
             </a:pPr>
             <a:r>
@@ -5596,9 +5438,9 @@
                 <a:solidFill>
                   <a:srgbClr val="94A3B8"/>
                 </a:solidFill>
-                <a:latin typeface="Microsoft YaHei" pitchFamily="34" charset="0"/>
-                <a:ea typeface="Microsoft YaHei" pitchFamily="34" charset="-122"/>
-                <a:cs typeface="Microsoft YaHei" pitchFamily="34" charset="-120"/>
+                <a:latin typeface="微软雅黑" panose="020B0503020204020204" pitchFamily="34" charset="-122"/>
+                <a:ea typeface="微软雅黑" panose="020B0503020204020204" pitchFamily="34" charset="-122"/>
+                <a:cs typeface="微软雅黑" panose="020B0503020204020204" pitchFamily="34" charset="-120"/>
               </a:rPr>
               <a:t>EvidenceLoop · GOAI Boundless Agents · AI+教育</a:t>
             </a:r>
@@ -5621,13 +5463,12 @@
             <a:avLst/>
           </a:prstGeom>
           <a:noFill/>
-          <a:ln/>
-        </p:spPr>
-        <p:txBody>
-          <a:bodyPr wrap="square" rtlCol="0" anchor="ctr"/>
-          <a:lstStyle/>
-          <a:p>
-            <a:pPr algn="r" indent="0" marL="0">
+        </p:spPr>
+        <p:txBody>
+          <a:bodyPr wrap="square" rtlCol="0" anchor="ctr"/>
+          <a:lstStyle/>
+          <a:p>
+            <a:pPr marL="0" indent="0" algn="r">
               <a:buNone/>
             </a:pPr>
             <a:r>
@@ -5635,9 +5476,9 @@
                 <a:solidFill>
                   <a:srgbClr val="94A3B8"/>
                 </a:solidFill>
-                <a:latin typeface="Microsoft YaHei" pitchFamily="34" charset="0"/>
-                <a:ea typeface="Microsoft YaHei" pitchFamily="34" charset="-122"/>
-                <a:cs typeface="Microsoft YaHei" pitchFamily="34" charset="-120"/>
+                <a:latin typeface="微软雅黑" panose="020B0503020204020204" pitchFamily="34" charset="-122"/>
+                <a:ea typeface="微软雅黑" panose="020B0503020204020204" pitchFamily="34" charset="-122"/>
+                <a:cs typeface="微软雅黑" panose="020B0503020204020204" pitchFamily="34" charset="-120"/>
               </a:rPr>
               <a:t>4 / 10</a:t>
             </a:r>
@@ -5655,7 +5496,7 @@
 
 <file path=ppt/slides/slide5.xml><?xml version="1.0" encoding="utf-8"?>
 <p:sld xmlns:a="http://schemas.openxmlformats.org/drawingml/2006/main" xmlns:r="http://schemas.openxmlformats.org/officeDocument/2006/relationships" xmlns:p="http://schemas.openxmlformats.org/presentationml/2006/main">
-  <p:cSld name="Slide 5">
+  <p:cSld>
     <p:spTree>
       <p:nvGrpSpPr>
         <p:cNvPr id="1" name=""/>
@@ -5735,13 +5576,12 @@
             <a:avLst/>
           </a:prstGeom>
           <a:noFill/>
-          <a:ln/>
-        </p:spPr>
-        <p:txBody>
-          <a:bodyPr wrap="square" rtlCol="0" anchor="ctr"/>
-          <a:lstStyle/>
-          <a:p>
-            <a:pPr indent="0" marL="0">
+        </p:spPr>
+        <p:txBody>
+          <a:bodyPr wrap="square" rtlCol="0" anchor="ctr"/>
+          <a:lstStyle/>
+          <a:p>
+            <a:pPr marL="0" indent="0">
               <a:buNone/>
             </a:pPr>
             <a:r>
@@ -5749,9 +5589,9 @@
                 <a:solidFill>
                   <a:srgbClr val="F8FAFC"/>
                 </a:solidFill>
-                <a:latin typeface="Microsoft YaHei" pitchFamily="34" charset="0"/>
-                <a:ea typeface="Microsoft YaHei" pitchFamily="34" charset="-122"/>
-                <a:cs typeface="Microsoft YaHei" pitchFamily="34" charset="-120"/>
+                <a:latin typeface="微软雅黑" panose="020B0503020204020204" pitchFamily="34" charset="-122"/>
+                <a:ea typeface="微软雅黑" panose="020B0503020204020204" pitchFamily="34" charset="-122"/>
+                <a:cs typeface="微软雅黑" panose="020B0503020204020204" pitchFamily="34" charset="-120"/>
               </a:rPr>
               <a:t>任务闭环：一次可演示、可验证的 Agent 流程</a:t>
             </a:r>
@@ -5774,13 +5614,12 @@
             <a:avLst/>
           </a:prstGeom>
           <a:noFill/>
-          <a:ln/>
-        </p:spPr>
-        <p:txBody>
-          <a:bodyPr wrap="square" rtlCol="0" anchor="ctr"/>
-          <a:lstStyle/>
-          <a:p>
-            <a:pPr indent="0" marL="0">
+        </p:spPr>
+        <p:txBody>
+          <a:bodyPr wrap="square" rtlCol="0" anchor="ctr"/>
+          <a:lstStyle/>
+          <a:p>
+            <a:pPr marL="0" indent="0">
               <a:buNone/>
             </a:pPr>
             <a:r>
@@ -5788,9 +5627,9 @@
                 <a:solidFill>
                   <a:srgbClr val="94A3B8"/>
                 </a:solidFill>
-                <a:latin typeface="Microsoft YaHei" pitchFamily="34" charset="0"/>
-                <a:ea typeface="Microsoft YaHei" pitchFamily="34" charset="-122"/>
-                <a:cs typeface="Microsoft YaHei" pitchFamily="34" charset="-120"/>
+                <a:latin typeface="微软雅黑" panose="020B0503020204020204" pitchFamily="34" charset="-122"/>
+                <a:ea typeface="微软雅黑" panose="020B0503020204020204" pitchFamily="34" charset="-122"/>
+                <a:cs typeface="微软雅黑" panose="020B0503020204020204" pitchFamily="34" charset="-120"/>
               </a:rPr>
               <a:t>满足 Boundless Agents 对“任务理解—工具调用—结果交付”的要求</a:t>
             </a:r>
@@ -5865,13 +5704,12 @@
             <a:avLst/>
           </a:prstGeom>
           <a:noFill/>
-          <a:ln/>
-        </p:spPr>
-        <p:txBody>
-          <a:bodyPr wrap="square" rtlCol="0" anchor="ctr"/>
-          <a:lstStyle/>
-          <a:p>
-            <a:pPr algn="ctr" indent="0" marL="0">
+        </p:spPr>
+        <p:txBody>
+          <a:bodyPr wrap="square" rtlCol="0" anchor="ctr"/>
+          <a:lstStyle/>
+          <a:p>
+            <a:pPr marL="0" indent="0" algn="ctr">
               <a:buNone/>
             </a:pPr>
             <a:r>
@@ -5879,9 +5717,9 @@
                 <a:solidFill>
                   <a:srgbClr val="22D3EE"/>
                 </a:solidFill>
-                <a:latin typeface="Microsoft YaHei" pitchFamily="34" charset="0"/>
-                <a:ea typeface="Microsoft YaHei" pitchFamily="34" charset="-122"/>
-                <a:cs typeface="Microsoft YaHei" pitchFamily="34" charset="-120"/>
+                <a:latin typeface="微软雅黑" panose="020B0503020204020204" pitchFamily="34" charset="-122"/>
+                <a:ea typeface="微软雅黑" panose="020B0503020204020204" pitchFamily="34" charset="-122"/>
+                <a:cs typeface="微软雅黑" panose="020B0503020204020204" pitchFamily="34" charset="-120"/>
               </a:rPr>
               <a:t>1</a:t>
             </a:r>
@@ -5904,13 +5742,12 @@
             <a:avLst/>
           </a:prstGeom>
           <a:noFill/>
-          <a:ln/>
-        </p:spPr>
-        <p:txBody>
-          <a:bodyPr wrap="square" rtlCol="0" anchor="ctr"/>
-          <a:lstStyle/>
-          <a:p>
-            <a:pPr algn="ctr" indent="0" marL="0">
+        </p:spPr>
+        <p:txBody>
+          <a:bodyPr wrap="square" rtlCol="0" anchor="ctr"/>
+          <a:lstStyle/>
+          <a:p>
+            <a:pPr marL="0" indent="0" algn="ctr">
               <a:buNone/>
             </a:pPr>
             <a:r>
@@ -5918,9 +5755,9 @@
                 <a:solidFill>
                   <a:srgbClr val="F8FAFC"/>
                 </a:solidFill>
-                <a:latin typeface="Microsoft YaHei" pitchFamily="34" charset="0"/>
-                <a:ea typeface="Microsoft YaHei" pitchFamily="34" charset="-122"/>
-                <a:cs typeface="Microsoft YaHei" pitchFamily="34" charset="-120"/>
+                <a:latin typeface="微软雅黑" panose="020B0503020204020204" pitchFamily="34" charset="-122"/>
+                <a:ea typeface="微软雅黑" panose="020B0503020204020204" pitchFamily="34" charset="-122"/>
+                <a:cs typeface="微软雅黑" panose="020B0503020204020204" pitchFamily="34" charset="-120"/>
               </a:rPr>
               <a:t>提交代码</a:t>
             </a:r>
@@ -5943,13 +5780,12 @@
             <a:avLst/>
           </a:prstGeom>
           <a:noFill/>
-          <a:ln/>
-        </p:spPr>
-        <p:txBody>
-          <a:bodyPr wrap="square" rtlCol="0" anchor="ctr"/>
-          <a:lstStyle/>
-          <a:p>
-            <a:pPr algn="ctr" indent="0" marL="0">
+        </p:spPr>
+        <p:txBody>
+          <a:bodyPr wrap="square" rtlCol="0" anchor="ctr"/>
+          <a:lstStyle/>
+          <a:p>
+            <a:pPr marL="0" indent="0" algn="ctr">
               <a:buNone/>
             </a:pPr>
             <a:r>
@@ -5957,9 +5793,9 @@
                 <a:solidFill>
                   <a:srgbClr val="94A3B8"/>
                 </a:solidFill>
-                <a:latin typeface="Microsoft YaHei" pitchFamily="34" charset="0"/>
-                <a:ea typeface="Microsoft YaHei" pitchFamily="34" charset="-122"/>
-                <a:cs typeface="Microsoft YaHei" pitchFamily="34" charset="-120"/>
+                <a:latin typeface="微软雅黑" panose="020B0503020204020204" pitchFamily="34" charset="-122"/>
+                <a:ea typeface="微软雅黑" panose="020B0503020204020204" pitchFamily="34" charset="-122"/>
+                <a:cs typeface="微软雅黑" panose="020B0503020204020204" pitchFamily="34" charset="-120"/>
               </a:rPr>
               <a:t>学员提交 Python 函数</a:t>
             </a:r>
@@ -5982,13 +5818,12 @@
             <a:avLst/>
           </a:prstGeom>
           <a:noFill/>
-          <a:ln/>
-        </p:spPr>
-        <p:txBody>
-          <a:bodyPr wrap="square" rtlCol="0" anchor="ctr"/>
-          <a:lstStyle/>
-          <a:p>
-            <a:pPr algn="ctr" indent="0" marL="0">
+        </p:spPr>
+        <p:txBody>
+          <a:bodyPr wrap="square" rtlCol="0" anchor="ctr"/>
+          <a:lstStyle/>
+          <a:p>
+            <a:pPr marL="0" indent="0" algn="ctr">
               <a:buNone/>
             </a:pPr>
             <a:r>
@@ -5996,9 +5831,9 @@
                 <a:solidFill>
                   <a:srgbClr val="22D3EE"/>
                 </a:solidFill>
-                <a:latin typeface="Microsoft YaHei" pitchFamily="34" charset="0"/>
-                <a:ea typeface="Microsoft YaHei" pitchFamily="34" charset="-122"/>
-                <a:cs typeface="Microsoft YaHei" pitchFamily="34" charset="-120"/>
+                <a:latin typeface="微软雅黑" panose="020B0503020204020204" pitchFamily="34" charset="-122"/>
+                <a:ea typeface="微软雅黑" panose="020B0503020204020204" pitchFamily="34" charset="-122"/>
+                <a:cs typeface="微软雅黑" panose="020B0503020204020204" pitchFamily="34" charset="-120"/>
               </a:rPr>
               <a:t>→</a:t>
             </a:r>
@@ -6073,13 +5908,12 @@
             <a:avLst/>
           </a:prstGeom>
           <a:noFill/>
-          <a:ln/>
-        </p:spPr>
-        <p:txBody>
-          <a:bodyPr wrap="square" rtlCol="0" anchor="ctr"/>
-          <a:lstStyle/>
-          <a:p>
-            <a:pPr algn="ctr" indent="0" marL="0">
+        </p:spPr>
+        <p:txBody>
+          <a:bodyPr wrap="square" rtlCol="0" anchor="ctr"/>
+          <a:lstStyle/>
+          <a:p>
+            <a:pPr marL="0" indent="0" algn="ctr">
               <a:buNone/>
             </a:pPr>
             <a:r>
@@ -6087,9 +5921,9 @@
                 <a:solidFill>
                   <a:srgbClr val="22D3EE"/>
                 </a:solidFill>
-                <a:latin typeface="Microsoft YaHei" pitchFamily="34" charset="0"/>
-                <a:ea typeface="Microsoft YaHei" pitchFamily="34" charset="-122"/>
-                <a:cs typeface="Microsoft YaHei" pitchFamily="34" charset="-120"/>
+                <a:latin typeface="微软雅黑" panose="020B0503020204020204" pitchFamily="34" charset="-122"/>
+                <a:ea typeface="微软雅黑" panose="020B0503020204020204" pitchFamily="34" charset="-122"/>
+                <a:cs typeface="微软雅黑" panose="020B0503020204020204" pitchFamily="34" charset="-120"/>
               </a:rPr>
               <a:t>2</a:t>
             </a:r>
@@ -6112,13 +5946,12 @@
             <a:avLst/>
           </a:prstGeom>
           <a:noFill/>
-          <a:ln/>
-        </p:spPr>
-        <p:txBody>
-          <a:bodyPr wrap="square" rtlCol="0" anchor="ctr"/>
-          <a:lstStyle/>
-          <a:p>
-            <a:pPr algn="ctr" indent="0" marL="0">
+        </p:spPr>
+        <p:txBody>
+          <a:bodyPr wrap="square" rtlCol="0" anchor="ctr"/>
+          <a:lstStyle/>
+          <a:p>
+            <a:pPr marL="0" indent="0" algn="ctr">
               <a:buNone/>
             </a:pPr>
             <a:r>
@@ -6126,9 +5959,9 @@
                 <a:solidFill>
                   <a:srgbClr val="F8FAFC"/>
                 </a:solidFill>
-                <a:latin typeface="Microsoft YaHei" pitchFamily="34" charset="0"/>
-                <a:ea typeface="Microsoft YaHei" pitchFamily="34" charset="-122"/>
-                <a:cs typeface="Microsoft YaHei" pitchFamily="34" charset="-120"/>
+                <a:latin typeface="微软雅黑" panose="020B0503020204020204" pitchFamily="34" charset="-122"/>
+                <a:ea typeface="微软雅黑" panose="020B0503020204020204" pitchFamily="34" charset="-122"/>
+                <a:cs typeface="微软雅黑" panose="020B0503020204020204" pitchFamily="34" charset="-120"/>
               </a:rPr>
               <a:t>受限运行</a:t>
             </a:r>
@@ -6151,13 +5984,12 @@
             <a:avLst/>
           </a:prstGeom>
           <a:noFill/>
-          <a:ln/>
-        </p:spPr>
-        <p:txBody>
-          <a:bodyPr wrap="square" rtlCol="0" anchor="ctr"/>
-          <a:lstStyle/>
-          <a:p>
-            <a:pPr algn="ctr" indent="0" marL="0">
+        </p:spPr>
+        <p:txBody>
+          <a:bodyPr wrap="square" rtlCol="0" anchor="ctr"/>
+          <a:lstStyle/>
+          <a:p>
+            <a:pPr marL="0" indent="0" algn="ctr">
               <a:buNone/>
             </a:pPr>
             <a:r>
@@ -6165,9 +5997,9 @@
                 <a:solidFill>
                   <a:srgbClr val="94A3B8"/>
                 </a:solidFill>
-                <a:latin typeface="Microsoft YaHei" pitchFamily="34" charset="0"/>
-                <a:ea typeface="Microsoft YaHei" pitchFamily="34" charset="-122"/>
-                <a:cs typeface="Microsoft YaHei" pitchFamily="34" charset="-120"/>
+                <a:latin typeface="微软雅黑" panose="020B0503020204020204" pitchFamily="34" charset="-122"/>
+                <a:ea typeface="微软雅黑" panose="020B0503020204020204" pitchFamily="34" charset="-122"/>
+                <a:cs typeface="微软雅黑" panose="020B0503020204020204" pitchFamily="34" charset="-120"/>
               </a:rPr>
               <a:t>公开/隐藏测 + 静态检查</a:t>
             </a:r>
@@ -6190,13 +6022,12 @@
             <a:avLst/>
           </a:prstGeom>
           <a:noFill/>
-          <a:ln/>
-        </p:spPr>
-        <p:txBody>
-          <a:bodyPr wrap="square" rtlCol="0" anchor="ctr"/>
-          <a:lstStyle/>
-          <a:p>
-            <a:pPr algn="ctr" indent="0" marL="0">
+        </p:spPr>
+        <p:txBody>
+          <a:bodyPr wrap="square" rtlCol="0" anchor="ctr"/>
+          <a:lstStyle/>
+          <a:p>
+            <a:pPr marL="0" indent="0" algn="ctr">
               <a:buNone/>
             </a:pPr>
             <a:r>
@@ -6204,9 +6035,9 @@
                 <a:solidFill>
                   <a:srgbClr val="22D3EE"/>
                 </a:solidFill>
-                <a:latin typeface="Microsoft YaHei" pitchFamily="34" charset="0"/>
-                <a:ea typeface="Microsoft YaHei" pitchFamily="34" charset="-122"/>
-                <a:cs typeface="Microsoft YaHei" pitchFamily="34" charset="-120"/>
+                <a:latin typeface="微软雅黑" panose="020B0503020204020204" pitchFamily="34" charset="-122"/>
+                <a:ea typeface="微软雅黑" panose="020B0503020204020204" pitchFamily="34" charset="-122"/>
+                <a:cs typeface="微软雅黑" panose="020B0503020204020204" pitchFamily="34" charset="-120"/>
               </a:rPr>
               <a:t>→</a:t>
             </a:r>
@@ -6281,13 +6112,12 @@
             <a:avLst/>
           </a:prstGeom>
           <a:noFill/>
-          <a:ln/>
-        </p:spPr>
-        <p:txBody>
-          <a:bodyPr wrap="square" rtlCol="0" anchor="ctr"/>
-          <a:lstStyle/>
-          <a:p>
-            <a:pPr algn="ctr" indent="0" marL="0">
+        </p:spPr>
+        <p:txBody>
+          <a:bodyPr wrap="square" rtlCol="0" anchor="ctr"/>
+          <a:lstStyle/>
+          <a:p>
+            <a:pPr marL="0" indent="0" algn="ctr">
               <a:buNone/>
             </a:pPr>
             <a:r>
@@ -6295,9 +6125,9 @@
                 <a:solidFill>
                   <a:srgbClr val="22D3EE"/>
                 </a:solidFill>
-                <a:latin typeface="Microsoft YaHei" pitchFamily="34" charset="0"/>
-                <a:ea typeface="Microsoft YaHei" pitchFamily="34" charset="-122"/>
-                <a:cs typeface="Microsoft YaHei" pitchFamily="34" charset="-120"/>
+                <a:latin typeface="微软雅黑" panose="020B0503020204020204" pitchFamily="34" charset="-122"/>
+                <a:ea typeface="微软雅黑" panose="020B0503020204020204" pitchFamily="34" charset="-122"/>
+                <a:cs typeface="微软雅黑" panose="020B0503020204020204" pitchFamily="34" charset="-120"/>
               </a:rPr>
               <a:t>3</a:t>
             </a:r>
@@ -6320,13 +6150,12 @@
             <a:avLst/>
           </a:prstGeom>
           <a:noFill/>
-          <a:ln/>
-        </p:spPr>
-        <p:txBody>
-          <a:bodyPr wrap="square" rtlCol="0" anchor="ctr"/>
-          <a:lstStyle/>
-          <a:p>
-            <a:pPr algn="ctr" indent="0" marL="0">
+        </p:spPr>
+        <p:txBody>
+          <a:bodyPr wrap="square" rtlCol="0" anchor="ctr"/>
+          <a:lstStyle/>
+          <a:p>
+            <a:pPr marL="0" indent="0" algn="ctr">
               <a:buNone/>
             </a:pPr>
             <a:r>
@@ -6334,9 +6163,9 @@
                 <a:solidFill>
                   <a:srgbClr val="F8FAFC"/>
                 </a:solidFill>
-                <a:latin typeface="Microsoft YaHei" pitchFamily="34" charset="0"/>
-                <a:ea typeface="Microsoft YaHei" pitchFamily="34" charset="-122"/>
-                <a:cs typeface="Microsoft YaHei" pitchFamily="34" charset="-120"/>
+                <a:latin typeface="微软雅黑" panose="020B0503020204020204" pitchFamily="34" charset="-122"/>
+                <a:ea typeface="微软雅黑" panose="020B0503020204020204" pitchFamily="34" charset="-122"/>
+                <a:cs typeface="微软雅黑" panose="020B0503020204020204" pitchFamily="34" charset="-120"/>
               </a:rPr>
               <a:t>量规评分</a:t>
             </a:r>
@@ -6359,13 +6188,12 @@
             <a:avLst/>
           </a:prstGeom>
           <a:noFill/>
-          <a:ln/>
-        </p:spPr>
-        <p:txBody>
-          <a:bodyPr wrap="square" rtlCol="0" anchor="ctr"/>
-          <a:lstStyle/>
-          <a:p>
-            <a:pPr algn="ctr" indent="0" marL="0">
+        </p:spPr>
+        <p:txBody>
+          <a:bodyPr wrap="square" rtlCol="0" anchor="ctr"/>
+          <a:lstStyle/>
+          <a:p>
+            <a:pPr marL="0" indent="0" algn="ctr">
               <a:buNone/>
             </a:pPr>
             <a:r>
@@ -6373,9 +6201,9 @@
                 <a:solidFill>
                   <a:srgbClr val="94A3B8"/>
                 </a:solidFill>
-                <a:latin typeface="Microsoft YaHei" pitchFamily="34" charset="0"/>
-                <a:ea typeface="Microsoft YaHei" pitchFamily="34" charset="-122"/>
-                <a:cs typeface="Microsoft YaHei" pitchFamily="34" charset="-120"/>
+                <a:latin typeface="微软雅黑" panose="020B0503020204020204" pitchFamily="34" charset="-122"/>
+                <a:ea typeface="微软雅黑" panose="020B0503020204020204" pitchFamily="34" charset="-122"/>
+                <a:cs typeface="微软雅黑" panose="020B0503020204020204" pitchFamily="34" charset="-120"/>
               </a:rPr>
               <a:t>证据映射维度分与总分</a:t>
             </a:r>
@@ -6398,13 +6226,12 @@
             <a:avLst/>
           </a:prstGeom>
           <a:noFill/>
-          <a:ln/>
-        </p:spPr>
-        <p:txBody>
-          <a:bodyPr wrap="square" rtlCol="0" anchor="ctr"/>
-          <a:lstStyle/>
-          <a:p>
-            <a:pPr algn="ctr" indent="0" marL="0">
+        </p:spPr>
+        <p:txBody>
+          <a:bodyPr wrap="square" rtlCol="0" anchor="ctr"/>
+          <a:lstStyle/>
+          <a:p>
+            <a:pPr marL="0" indent="0" algn="ctr">
               <a:buNone/>
             </a:pPr>
             <a:r>
@@ -6412,9 +6239,9 @@
                 <a:solidFill>
                   <a:srgbClr val="22D3EE"/>
                 </a:solidFill>
-                <a:latin typeface="Microsoft YaHei" pitchFamily="34" charset="0"/>
-                <a:ea typeface="Microsoft YaHei" pitchFamily="34" charset="-122"/>
-                <a:cs typeface="Microsoft YaHei" pitchFamily="34" charset="-120"/>
+                <a:latin typeface="微软雅黑" panose="020B0503020204020204" pitchFamily="34" charset="-122"/>
+                <a:ea typeface="微软雅黑" panose="020B0503020204020204" pitchFamily="34" charset="-122"/>
+                <a:cs typeface="微软雅黑" panose="020B0503020204020204" pitchFamily="34" charset="-120"/>
               </a:rPr>
               <a:t>→</a:t>
             </a:r>
@@ -6489,13 +6316,12 @@
             <a:avLst/>
           </a:prstGeom>
           <a:noFill/>
-          <a:ln/>
-        </p:spPr>
-        <p:txBody>
-          <a:bodyPr wrap="square" rtlCol="0" anchor="ctr"/>
-          <a:lstStyle/>
-          <a:p>
-            <a:pPr algn="ctr" indent="0" marL="0">
+        </p:spPr>
+        <p:txBody>
+          <a:bodyPr wrap="square" rtlCol="0" anchor="ctr"/>
+          <a:lstStyle/>
+          <a:p>
+            <a:pPr marL="0" indent="0" algn="ctr">
               <a:buNone/>
             </a:pPr>
             <a:r>
@@ -6503,9 +6329,9 @@
                 <a:solidFill>
                   <a:srgbClr val="22D3EE"/>
                 </a:solidFill>
-                <a:latin typeface="Microsoft YaHei" pitchFamily="34" charset="0"/>
-                <a:ea typeface="Microsoft YaHei" pitchFamily="34" charset="-122"/>
-                <a:cs typeface="Microsoft YaHei" pitchFamily="34" charset="-120"/>
+                <a:latin typeface="微软雅黑" panose="020B0503020204020204" pitchFamily="34" charset="-122"/>
+                <a:ea typeface="微软雅黑" panose="020B0503020204020204" pitchFamily="34" charset="-122"/>
+                <a:cs typeface="微软雅黑" panose="020B0503020204020204" pitchFamily="34" charset="-120"/>
               </a:rPr>
               <a:t>4</a:t>
             </a:r>
@@ -6528,13 +6354,12 @@
             <a:avLst/>
           </a:prstGeom>
           <a:noFill/>
-          <a:ln/>
-        </p:spPr>
-        <p:txBody>
-          <a:bodyPr wrap="square" rtlCol="0" anchor="ctr"/>
-          <a:lstStyle/>
-          <a:p>
-            <a:pPr algn="ctr" indent="0" marL="0">
+        </p:spPr>
+        <p:txBody>
+          <a:bodyPr wrap="square" rtlCol="0" anchor="ctr"/>
+          <a:lstStyle/>
+          <a:p>
+            <a:pPr marL="0" indent="0" algn="ctr">
               <a:buNone/>
             </a:pPr>
             <a:r>
@@ -6542,9 +6367,9 @@
                 <a:solidFill>
                   <a:srgbClr val="F8FAFC"/>
                 </a:solidFill>
-                <a:latin typeface="Microsoft YaHei" pitchFamily="34" charset="0"/>
-                <a:ea typeface="Microsoft YaHei" pitchFamily="34" charset="-122"/>
-                <a:cs typeface="Microsoft YaHei" pitchFamily="34" charset="-120"/>
+                <a:latin typeface="微软雅黑" panose="020B0503020204020204" pitchFamily="34" charset="-122"/>
+                <a:ea typeface="微软雅黑" panose="020B0503020204020204" pitchFamily="34" charset="-122"/>
+                <a:cs typeface="微软雅黑" panose="020B0503020204020204" pitchFamily="34" charset="-120"/>
               </a:rPr>
               <a:t>知识诊断</a:t>
             </a:r>
@@ -6567,13 +6392,12 @@
             <a:avLst/>
           </a:prstGeom>
           <a:noFill/>
-          <a:ln/>
-        </p:spPr>
-        <p:txBody>
-          <a:bodyPr wrap="square" rtlCol="0" anchor="ctr"/>
-          <a:lstStyle/>
-          <a:p>
-            <a:pPr algn="ctr" indent="0" marL="0">
+        </p:spPr>
+        <p:txBody>
+          <a:bodyPr wrap="square" rtlCol="0" anchor="ctr"/>
+          <a:lstStyle/>
+          <a:p>
+            <a:pPr marL="0" indent="0" algn="ctr">
               <a:buNone/>
             </a:pPr>
             <a:r>
@@ -6581,9 +6405,9 @@
                 <a:solidFill>
                   <a:srgbClr val="94A3B8"/>
                 </a:solidFill>
-                <a:latin typeface="Microsoft YaHei" pitchFamily="34" charset="0"/>
-                <a:ea typeface="Microsoft YaHei" pitchFamily="34" charset="-122"/>
-                <a:cs typeface="Microsoft YaHei" pitchFamily="34" charset="-120"/>
+                <a:latin typeface="微软雅黑" panose="020B0503020204020204" pitchFamily="34" charset="-122"/>
+                <a:ea typeface="微软雅黑" panose="020B0503020204020204" pitchFamily="34" charset="-122"/>
+                <a:cs typeface="微软雅黑" panose="020B0503020204020204" pitchFamily="34" charset="-120"/>
               </a:rPr>
               <a:t>失败证据 → 薄弱概念</a:t>
             </a:r>
@@ -6606,13 +6430,12 @@
             <a:avLst/>
           </a:prstGeom>
           <a:noFill/>
-          <a:ln/>
-        </p:spPr>
-        <p:txBody>
-          <a:bodyPr wrap="square" rtlCol="0" anchor="ctr"/>
-          <a:lstStyle/>
-          <a:p>
-            <a:pPr algn="ctr" indent="0" marL="0">
+        </p:spPr>
+        <p:txBody>
+          <a:bodyPr wrap="square" rtlCol="0" anchor="ctr"/>
+          <a:lstStyle/>
+          <a:p>
+            <a:pPr marL="0" indent="0" algn="ctr">
               <a:buNone/>
             </a:pPr>
             <a:r>
@@ -6620,9 +6443,9 @@
                 <a:solidFill>
                   <a:srgbClr val="22D3EE"/>
                 </a:solidFill>
-                <a:latin typeface="Microsoft YaHei" pitchFamily="34" charset="0"/>
-                <a:ea typeface="Microsoft YaHei" pitchFamily="34" charset="-122"/>
-                <a:cs typeface="Microsoft YaHei" pitchFamily="34" charset="-120"/>
+                <a:latin typeface="微软雅黑" panose="020B0503020204020204" pitchFamily="34" charset="-122"/>
+                <a:ea typeface="微软雅黑" panose="020B0503020204020204" pitchFamily="34" charset="-122"/>
+                <a:cs typeface="微软雅黑" panose="020B0503020204020204" pitchFamily="34" charset="-120"/>
               </a:rPr>
               <a:t>→</a:t>
             </a:r>
@@ -6697,13 +6520,12 @@
             <a:avLst/>
           </a:prstGeom>
           <a:noFill/>
-          <a:ln/>
-        </p:spPr>
-        <p:txBody>
-          <a:bodyPr wrap="square" rtlCol="0" anchor="ctr"/>
-          <a:lstStyle/>
-          <a:p>
-            <a:pPr algn="ctr" indent="0" marL="0">
+        </p:spPr>
+        <p:txBody>
+          <a:bodyPr wrap="square" rtlCol="0" anchor="ctr"/>
+          <a:lstStyle/>
+          <a:p>
+            <a:pPr marL="0" indent="0" algn="ctr">
               <a:buNone/>
             </a:pPr>
             <a:r>
@@ -6711,9 +6533,9 @@
                 <a:solidFill>
                   <a:srgbClr val="22D3EE"/>
                 </a:solidFill>
-                <a:latin typeface="Microsoft YaHei" pitchFamily="34" charset="0"/>
-                <a:ea typeface="Microsoft YaHei" pitchFamily="34" charset="-122"/>
-                <a:cs typeface="Microsoft YaHei" pitchFamily="34" charset="-120"/>
+                <a:latin typeface="微软雅黑" panose="020B0503020204020204" pitchFamily="34" charset="-122"/>
+                <a:ea typeface="微软雅黑" panose="020B0503020204020204" pitchFamily="34" charset="-122"/>
+                <a:cs typeface="微软雅黑" panose="020B0503020204020204" pitchFamily="34" charset="-120"/>
               </a:rPr>
               <a:t>5</a:t>
             </a:r>
@@ -6736,13 +6558,12 @@
             <a:avLst/>
           </a:prstGeom>
           <a:noFill/>
-          <a:ln/>
-        </p:spPr>
-        <p:txBody>
-          <a:bodyPr wrap="square" rtlCol="0" anchor="ctr"/>
-          <a:lstStyle/>
-          <a:p>
-            <a:pPr algn="ctr" indent="0" marL="0">
+        </p:spPr>
+        <p:txBody>
+          <a:bodyPr wrap="square" rtlCol="0" anchor="ctr"/>
+          <a:lstStyle/>
+          <a:p>
+            <a:pPr marL="0" indent="0" algn="ctr">
               <a:buNone/>
             </a:pPr>
             <a:r>
@@ -6750,9 +6571,9 @@
                 <a:solidFill>
                   <a:srgbClr val="F8FAFC"/>
                 </a:solidFill>
-                <a:latin typeface="Microsoft YaHei" pitchFamily="34" charset="0"/>
-                <a:ea typeface="Microsoft YaHei" pitchFamily="34" charset="-122"/>
-                <a:cs typeface="Microsoft YaHei" pitchFamily="34" charset="-120"/>
+                <a:latin typeface="微软雅黑" panose="020B0503020204020204" pitchFamily="34" charset="-122"/>
+                <a:ea typeface="微软雅黑" panose="020B0503020204020204" pitchFamily="34" charset="-122"/>
+                <a:cs typeface="微软雅黑" panose="020B0503020204020204" pitchFamily="34" charset="-120"/>
               </a:rPr>
               <a:t>修复再验证</a:t>
             </a:r>
@@ -6775,13 +6596,12 @@
             <a:avLst/>
           </a:prstGeom>
           <a:noFill/>
-          <a:ln/>
-        </p:spPr>
-        <p:txBody>
-          <a:bodyPr wrap="square" rtlCol="0" anchor="ctr"/>
-          <a:lstStyle/>
-          <a:p>
-            <a:pPr algn="ctr" indent="0" marL="0">
+        </p:spPr>
+        <p:txBody>
+          <a:bodyPr wrap="square" rtlCol="0" anchor="ctr"/>
+          <a:lstStyle/>
+          <a:p>
+            <a:pPr marL="0" indent="0" algn="ctr">
               <a:buNone/>
             </a:pPr>
             <a:r>
@@ -6789,9 +6609,9 @@
                 <a:solidFill>
                   <a:srgbClr val="94A3B8"/>
                 </a:solidFill>
-                <a:latin typeface="Microsoft YaHei" pitchFamily="34" charset="0"/>
-                <a:ea typeface="Microsoft YaHei" pitchFamily="34" charset="-122"/>
-                <a:cs typeface="Microsoft YaHei" pitchFamily="34" charset="-120"/>
+                <a:latin typeface="微软雅黑" panose="020B0503020204020204" pitchFamily="34" charset="-122"/>
+                <a:ea typeface="微软雅黑" panose="020B0503020204020204" pitchFamily="34" charset="-122"/>
+                <a:cs typeface="微软雅黑" panose="020B0503020204020204" pitchFamily="34" charset="-120"/>
               </a:rPr>
               <a:t>干预任务 → 重提 → 学情更新</a:t>
             </a:r>
@@ -6814,13 +6634,12 @@
             <a:avLst/>
           </a:prstGeom>
           <a:noFill/>
-          <a:ln/>
-        </p:spPr>
-        <p:txBody>
-          <a:bodyPr wrap="square" rtlCol="0" anchor="ctr"/>
-          <a:lstStyle/>
-          <a:p>
-            <a:pPr indent="0" marL="0">
+        </p:spPr>
+        <p:txBody>
+          <a:bodyPr wrap="square" rtlCol="0" anchor="ctr"/>
+          <a:lstStyle/>
+          <a:p>
+            <a:pPr marL="0" indent="0">
               <a:buNone/>
             </a:pPr>
             <a:r>
@@ -6828,9 +6647,9 @@
                 <a:solidFill>
                   <a:srgbClr val="94A3B8"/>
                 </a:solidFill>
-                <a:latin typeface="Microsoft YaHei" pitchFamily="34" charset="0"/>
-                <a:ea typeface="Microsoft YaHei" pitchFamily="34" charset="-122"/>
-                <a:cs typeface="Microsoft YaHei" pitchFamily="34" charset="-120"/>
+                <a:latin typeface="微软雅黑" panose="020B0503020204020204" pitchFamily="34" charset="-122"/>
+                <a:ea typeface="微软雅黑" panose="020B0503020204020204" pitchFamily="34" charset="-122"/>
+                <a:cs typeface="微软雅黑" panose="020B0503020204020204" pitchFamily="34" charset="-120"/>
               </a:rPr>
               <a:t>EvidenceLoop · GOAI Boundless Agents · AI+教育</a:t>
             </a:r>
@@ -6853,13 +6672,12 @@
             <a:avLst/>
           </a:prstGeom>
           <a:noFill/>
-          <a:ln/>
-        </p:spPr>
-        <p:txBody>
-          <a:bodyPr wrap="square" rtlCol="0" anchor="ctr"/>
-          <a:lstStyle/>
-          <a:p>
-            <a:pPr algn="r" indent="0" marL="0">
+        </p:spPr>
+        <p:txBody>
+          <a:bodyPr wrap="square" rtlCol="0" anchor="ctr"/>
+          <a:lstStyle/>
+          <a:p>
+            <a:pPr marL="0" indent="0" algn="r">
               <a:buNone/>
             </a:pPr>
             <a:r>
@@ -6867,9 +6685,9 @@
                 <a:solidFill>
                   <a:srgbClr val="94A3B8"/>
                 </a:solidFill>
-                <a:latin typeface="Microsoft YaHei" pitchFamily="34" charset="0"/>
-                <a:ea typeface="Microsoft YaHei" pitchFamily="34" charset="-122"/>
-                <a:cs typeface="Microsoft YaHei" pitchFamily="34" charset="-120"/>
+                <a:latin typeface="微软雅黑" panose="020B0503020204020204" pitchFamily="34" charset="-122"/>
+                <a:ea typeface="微软雅黑" panose="020B0503020204020204" pitchFamily="34" charset="-122"/>
+                <a:cs typeface="微软雅黑" panose="020B0503020204020204" pitchFamily="34" charset="-120"/>
               </a:rPr>
               <a:t>5 / 10</a:t>
             </a:r>
@@ -6887,7 +6705,7 @@
 
 <file path=ppt/slides/slide6.xml><?xml version="1.0" encoding="utf-8"?>
 <p:sld xmlns:a="http://schemas.openxmlformats.org/drawingml/2006/main" xmlns:r="http://schemas.openxmlformats.org/officeDocument/2006/relationships" xmlns:p="http://schemas.openxmlformats.org/presentationml/2006/main">
-  <p:cSld name="Slide 6">
+  <p:cSld>
     <p:spTree>
       <p:nvGrpSpPr>
         <p:cNvPr id="1" name=""/>
@@ -6967,13 +6785,12 @@
             <a:avLst/>
           </a:prstGeom>
           <a:noFill/>
-          <a:ln/>
-        </p:spPr>
-        <p:txBody>
-          <a:bodyPr wrap="square" rtlCol="0" anchor="ctr"/>
-          <a:lstStyle/>
-          <a:p>
-            <a:pPr indent="0" marL="0">
+        </p:spPr>
+        <p:txBody>
+          <a:bodyPr wrap="square" rtlCol="0" anchor="ctr"/>
+          <a:lstStyle/>
+          <a:p>
+            <a:pPr marL="0" indent="0">
               <a:buNone/>
             </a:pPr>
             <a:r>
@@ -6981,9 +6798,9 @@
                 <a:solidFill>
                   <a:srgbClr val="F8FAFC"/>
                 </a:solidFill>
-                <a:latin typeface="Microsoft YaHei" pitchFamily="34" charset="0"/>
-                <a:ea typeface="Microsoft YaHei" pitchFamily="34" charset="-122"/>
-                <a:cs typeface="Microsoft YaHei" pitchFamily="34" charset="-120"/>
+                <a:latin typeface="微软雅黑" panose="020B0503020204020204" pitchFamily="34" charset="-122"/>
+                <a:ea typeface="微软雅黑" panose="020B0503020204020204" pitchFamily="34" charset="-122"/>
+                <a:cs typeface="微软雅黑" panose="020B0503020204020204" pitchFamily="34" charset="-120"/>
               </a:rPr>
               <a:t>Demo：80 分缺陷 → 100 分修复</a:t>
             </a:r>
@@ -7006,13 +6823,12 @@
             <a:avLst/>
           </a:prstGeom>
           <a:noFill/>
-          <a:ln/>
-        </p:spPr>
-        <p:txBody>
-          <a:bodyPr wrap="square" rtlCol="0" anchor="ctr"/>
-          <a:lstStyle/>
-          <a:p>
-            <a:pPr indent="0" marL="0">
+        </p:spPr>
+        <p:txBody>
+          <a:bodyPr wrap="square" rtlCol="0" anchor="ctr"/>
+          <a:lstStyle/>
+          <a:p>
+            <a:pPr marL="0" indent="0">
               <a:buNone/>
             </a:pPr>
             <a:r>
@@ -7020,9 +6836,9 @@
                 <a:solidFill>
                   <a:srgbClr val="94A3B8"/>
                 </a:solidFill>
-                <a:latin typeface="Microsoft YaHei" pitchFamily="34" charset="0"/>
-                <a:ea typeface="Microsoft YaHei" pitchFamily="34" charset="-122"/>
-                <a:cs typeface="Microsoft YaHei" pitchFamily="34" charset="-120"/>
+                <a:latin typeface="微软雅黑" panose="020B0503020204020204" pitchFamily="34" charset="-122"/>
+                <a:ea typeface="微软雅黑" panose="020B0503020204020204" pitchFamily="34" charset="-122"/>
+                <a:cs typeface="微软雅黑" panose="020B0503020204020204" pitchFamily="34" charset="-120"/>
               </a:rPr>
               <a:t>可复现证据路径，约 3 分钟完成闭环演示</a:t>
             </a:r>
@@ -7072,13 +6888,12 @@
             <a:avLst/>
           </a:prstGeom>
           <a:noFill/>
-          <a:ln/>
-        </p:spPr>
-        <p:txBody>
-          <a:bodyPr wrap="square" rtlCol="0" anchor="ctr"/>
-          <a:lstStyle/>
-          <a:p>
-            <a:pPr indent="0" marL="0">
+        </p:spPr>
+        <p:txBody>
+          <a:bodyPr wrap="square" rtlCol="0" anchor="ctr"/>
+          <a:lstStyle/>
+          <a:p>
+            <a:pPr marL="0" indent="0">
               <a:buNone/>
             </a:pPr>
             <a:r>
@@ -7086,9 +6901,9 @@
                 <a:solidFill>
                   <a:srgbClr val="94A3B8"/>
                 </a:solidFill>
-                <a:latin typeface="Microsoft YaHei" pitchFamily="34" charset="0"/>
-                <a:ea typeface="Microsoft YaHei" pitchFamily="34" charset="-122"/>
-                <a:cs typeface="Microsoft YaHei" pitchFamily="34" charset="-120"/>
+                <a:latin typeface="微软雅黑" panose="020B0503020204020204" pitchFamily="34" charset="-122"/>
+                <a:ea typeface="微软雅黑" panose="020B0503020204020204" pitchFamily="34" charset="-122"/>
+                <a:cs typeface="微软雅黑" panose="020B0503020204020204" pitchFamily="34" charset="-120"/>
               </a:rPr>
               <a:t>缺陷提交</a:t>
             </a:r>
@@ -7111,13 +6926,12 @@
             <a:avLst/>
           </a:prstGeom>
           <a:noFill/>
-          <a:ln/>
-        </p:spPr>
-        <p:txBody>
-          <a:bodyPr wrap="square" rtlCol="0" anchor="ctr"/>
-          <a:lstStyle/>
-          <a:p>
-            <a:pPr indent="0" marL="0">
+        </p:spPr>
+        <p:txBody>
+          <a:bodyPr wrap="square" rtlCol="0" anchor="ctr"/>
+          <a:lstStyle/>
+          <a:p>
+            <a:pPr marL="0" indent="0">
               <a:buNone/>
             </a:pPr>
             <a:r>
@@ -7125,9 +6939,9 @@
                 <a:solidFill>
                   <a:srgbClr val="22D3EE"/>
                 </a:solidFill>
-                <a:latin typeface="Microsoft YaHei" pitchFamily="34" charset="0"/>
-                <a:ea typeface="Microsoft YaHei" pitchFamily="34" charset="-122"/>
-                <a:cs typeface="Microsoft YaHei" pitchFamily="34" charset="-120"/>
+                <a:latin typeface="微软雅黑" panose="020B0503020204020204" pitchFamily="34" charset="-122"/>
+                <a:ea typeface="微软雅黑" panose="020B0503020204020204" pitchFamily="34" charset="-122"/>
+                <a:cs typeface="微软雅黑" panose="020B0503020204020204" pitchFamily="34" charset="-120"/>
               </a:rPr>
               <a:t>80 分</a:t>
             </a:r>
@@ -7150,13 +6964,12 @@
             <a:avLst/>
           </a:prstGeom>
           <a:noFill/>
-          <a:ln/>
-        </p:spPr>
-        <p:txBody>
-          <a:bodyPr wrap="square" rtlCol="0" anchor="ctr"/>
-          <a:lstStyle/>
-          <a:p>
-            <a:pPr indent="0" marL="0">
+        </p:spPr>
+        <p:txBody>
+          <a:bodyPr wrap="square" rtlCol="0" anchor="ctr"/>
+          <a:lstStyle/>
+          <a:p>
+            <a:pPr marL="0" indent="0">
               <a:buNone/>
             </a:pPr>
             <a:r>
@@ -7164,9 +6977,9 @@
                 <a:solidFill>
                   <a:srgbClr val="F8FAFC"/>
                 </a:solidFill>
-                <a:latin typeface="Microsoft YaHei" pitchFamily="34" charset="0"/>
-                <a:ea typeface="Microsoft YaHei" pitchFamily="34" charset="-122"/>
-                <a:cs typeface="Microsoft YaHei" pitchFamily="34" charset="-120"/>
+                <a:latin typeface="微软雅黑" panose="020B0503020204020204" pitchFamily="34" charset="-122"/>
+                <a:ea typeface="微软雅黑" panose="020B0503020204020204" pitchFamily="34" charset="-122"/>
+                <a:cs typeface="微软雅黑" panose="020B0503020204020204" pitchFamily="34" charset="-120"/>
               </a:rPr>
               <a:t>7/8 证据 · 空序列诊断</a:t>
             </a:r>
@@ -7216,13 +7029,12 @@
             <a:avLst/>
           </a:prstGeom>
           <a:noFill/>
-          <a:ln/>
-        </p:spPr>
-        <p:txBody>
-          <a:bodyPr wrap="square" rtlCol="0" anchor="ctr"/>
-          <a:lstStyle/>
-          <a:p>
-            <a:pPr indent="0" marL="0">
+        </p:spPr>
+        <p:txBody>
+          <a:bodyPr wrap="square" rtlCol="0" anchor="ctr"/>
+          <a:lstStyle/>
+          <a:p>
+            <a:pPr marL="0" indent="0">
               <a:buNone/>
             </a:pPr>
             <a:r>
@@ -7230,9 +7042,9 @@
                 <a:solidFill>
                   <a:srgbClr val="94A3B8"/>
                 </a:solidFill>
-                <a:latin typeface="Microsoft YaHei" pitchFamily="34" charset="0"/>
-                <a:ea typeface="Microsoft YaHei" pitchFamily="34" charset="-122"/>
-                <a:cs typeface="Microsoft YaHei" pitchFamily="34" charset="-120"/>
+                <a:latin typeface="微软雅黑" panose="020B0503020204020204" pitchFamily="34" charset="-122"/>
+                <a:ea typeface="微软雅黑" panose="020B0503020204020204" pitchFamily="34" charset="-122"/>
+                <a:cs typeface="微软雅黑" panose="020B0503020204020204" pitchFamily="34" charset="-120"/>
               </a:rPr>
               <a:t>应用修复</a:t>
             </a:r>
@@ -7255,13 +7067,12 @@
             <a:avLst/>
           </a:prstGeom>
           <a:noFill/>
-          <a:ln/>
-        </p:spPr>
-        <p:txBody>
-          <a:bodyPr wrap="square" rtlCol="0" anchor="ctr"/>
-          <a:lstStyle/>
-          <a:p>
-            <a:pPr indent="0" marL="0">
+        </p:spPr>
+        <p:txBody>
+          <a:bodyPr wrap="square" rtlCol="0" anchor="ctr"/>
+          <a:lstStyle/>
+          <a:p>
+            <a:pPr marL="0" indent="0">
               <a:buNone/>
             </a:pPr>
             <a:r>
@@ -7269,9 +7080,9 @@
                 <a:solidFill>
                   <a:srgbClr val="34D399"/>
                 </a:solidFill>
-                <a:latin typeface="Microsoft YaHei" pitchFamily="34" charset="0"/>
-                <a:ea typeface="Microsoft YaHei" pitchFamily="34" charset="-122"/>
-                <a:cs typeface="Microsoft YaHei" pitchFamily="34" charset="-120"/>
+                <a:latin typeface="微软雅黑" panose="020B0503020204020204" pitchFamily="34" charset="-122"/>
+                <a:ea typeface="微软雅黑" panose="020B0503020204020204" pitchFamily="34" charset="-122"/>
+                <a:cs typeface="微软雅黑" panose="020B0503020204020204" pitchFamily="34" charset="-120"/>
               </a:rPr>
               <a:t>100 分</a:t>
             </a:r>
@@ -7294,13 +7105,12 @@
             <a:avLst/>
           </a:prstGeom>
           <a:noFill/>
-          <a:ln/>
-        </p:spPr>
-        <p:txBody>
-          <a:bodyPr wrap="square" rtlCol="0" anchor="ctr"/>
-          <a:lstStyle/>
-          <a:p>
-            <a:pPr indent="0" marL="0">
+        </p:spPr>
+        <p:txBody>
+          <a:bodyPr wrap="square" rtlCol="0" anchor="ctr"/>
+          <a:lstStyle/>
+          <a:p>
+            <a:pPr marL="0" indent="0">
               <a:buNone/>
             </a:pPr>
             <a:r>
@@ -7308,9 +7118,9 @@
                 <a:solidFill>
                   <a:srgbClr val="F8FAFC"/>
                 </a:solidFill>
-                <a:latin typeface="Microsoft YaHei" pitchFamily="34" charset="0"/>
-                <a:ea typeface="Microsoft YaHei" pitchFamily="34" charset="-122"/>
-                <a:cs typeface="Microsoft YaHei" pitchFamily="34" charset="-120"/>
+                <a:latin typeface="微软雅黑" panose="020B0503020204020204" pitchFamily="34" charset="-122"/>
+                <a:ea typeface="微软雅黑" panose="020B0503020204020204" pitchFamily="34" charset="-122"/>
+                <a:cs typeface="微软雅黑" panose="020B0503020204020204" pitchFamily="34" charset="-120"/>
               </a:rPr>
               <a:t>8/8 证据 · +20 提升</a:t>
             </a:r>
@@ -7360,13 +7170,12 @@
             <a:avLst/>
           </a:prstGeom>
           <a:noFill/>
-          <a:ln/>
-        </p:spPr>
-        <p:txBody>
-          <a:bodyPr wrap="square" rtlCol="0" anchor="ctr"/>
-          <a:lstStyle/>
-          <a:p>
-            <a:pPr indent="0" marL="0">
+        </p:spPr>
+        <p:txBody>
+          <a:bodyPr wrap="square" rtlCol="0" anchor="ctr"/>
+          <a:lstStyle/>
+          <a:p>
+            <a:pPr marL="0" indent="0">
               <a:buNone/>
             </a:pPr>
             <a:r>
@@ -7374,9 +7183,9 @@
                 <a:solidFill>
                   <a:srgbClr val="94A3B8"/>
                 </a:solidFill>
-                <a:latin typeface="Microsoft YaHei" pitchFamily="34" charset="0"/>
-                <a:ea typeface="Microsoft YaHei" pitchFamily="34" charset="-122"/>
-                <a:cs typeface="Microsoft YaHei" pitchFamily="34" charset="-120"/>
+                <a:latin typeface="微软雅黑" panose="020B0503020204020204" pitchFamily="34" charset="-122"/>
+                <a:ea typeface="微软雅黑" panose="020B0503020204020204" pitchFamily="34" charset="-122"/>
+                <a:cs typeface="微软雅黑" panose="020B0503020204020204" pitchFamily="34" charset="-120"/>
               </a:rPr>
               <a:t>班级同步</a:t>
             </a:r>
@@ -7399,13 +7208,12 @@
             <a:avLst/>
           </a:prstGeom>
           <a:noFill/>
-          <a:ln/>
-        </p:spPr>
-        <p:txBody>
-          <a:bodyPr wrap="square" rtlCol="0" anchor="ctr"/>
-          <a:lstStyle/>
-          <a:p>
-            <a:pPr indent="0" marL="0">
+        </p:spPr>
+        <p:txBody>
+          <a:bodyPr wrap="square" rtlCol="0" anchor="ctr"/>
+          <a:lstStyle/>
+          <a:p>
+            <a:pPr marL="0" indent="0">
               <a:buNone/>
             </a:pPr>
             <a:r>
@@ -7413,9 +7221,9 @@
                 <a:solidFill>
                   <a:srgbClr val="22D3EE"/>
                 </a:solidFill>
-                <a:latin typeface="Microsoft YaHei" pitchFamily="34" charset="0"/>
-                <a:ea typeface="Microsoft YaHei" pitchFamily="34" charset="-122"/>
-                <a:cs typeface="Microsoft YaHei" pitchFamily="34" charset="-120"/>
+                <a:latin typeface="微软雅黑" panose="020B0503020204020204" pitchFamily="34" charset="-122"/>
+                <a:ea typeface="微软雅黑" panose="020B0503020204020204" pitchFamily="34" charset="-122"/>
+                <a:cs typeface="微软雅黑" panose="020B0503020204020204" pitchFamily="34" charset="-120"/>
               </a:rPr>
               <a:t>学情更新</a:t>
             </a:r>
@@ -7438,13 +7246,12 @@
             <a:avLst/>
           </a:prstGeom>
           <a:noFill/>
-          <a:ln/>
-        </p:spPr>
-        <p:txBody>
-          <a:bodyPr wrap="square" rtlCol="0" anchor="ctr"/>
-          <a:lstStyle/>
-          <a:p>
-            <a:pPr indent="0" marL="0">
+        </p:spPr>
+        <p:txBody>
+          <a:bodyPr wrap="square" rtlCol="0" anchor="ctr"/>
+          <a:lstStyle/>
+          <a:p>
+            <a:pPr marL="0" indent="0">
               <a:buNone/>
             </a:pPr>
             <a:r>
@@ -7452,9 +7259,9 @@
                 <a:solidFill>
                   <a:srgbClr val="F8FAFC"/>
                 </a:solidFill>
-                <a:latin typeface="Microsoft YaHei" pitchFamily="34" charset="0"/>
-                <a:ea typeface="Microsoft YaHei" pitchFamily="34" charset="-122"/>
-                <a:cs typeface="Microsoft YaHei" pitchFamily="34" charset="-120"/>
+                <a:latin typeface="微软雅黑" panose="020B0503020204020204" pitchFamily="34" charset="-122"/>
+                <a:ea typeface="微软雅黑" panose="020B0503020204020204" pitchFamily="34" charset="-122"/>
+                <a:cs typeface="微软雅黑" panose="020B0503020204020204" pitchFamily="34" charset="-120"/>
               </a:rPr>
               <a:t>关注队列实时刷新</a:t>
             </a:r>
@@ -7464,7 +7271,7 @@
       </p:sp>
       <p:pic>
         <p:nvPicPr>
-          <p:cNvPr id="18" name="Image 0" descr="D:\code_space\evidence-loop\output\playwright\desktop-closed-loop.png">    </p:cNvPr>
+          <p:cNvPr id="18" name="Image 0" descr="D:\code_space\evidence-loop\output\playwright\desktop-closed-loop.png"/>
           <p:cNvPicPr>
             <a:picLocks noChangeAspect="1"/>
           </p:cNvPicPr>
@@ -7488,7 +7295,7 @@
       </p:pic>
       <p:pic>
         <p:nvPicPr>
-          <p:cNvPr id="19" name="Image 1" descr="D:\code_space\evidence-loop\output\playwright\desktop-cohort.png">    </p:cNvPr>
+          <p:cNvPr id="19" name="Image 1" descr="D:\code_space\evidence-loop\output\playwright\desktop-cohort.png"/>
           <p:cNvPicPr>
             <a:picLocks noChangeAspect="1"/>
           </p:cNvPicPr>
@@ -7525,13 +7332,12 @@
             <a:avLst/>
           </a:prstGeom>
           <a:noFill/>
-          <a:ln/>
-        </p:spPr>
-        <p:txBody>
-          <a:bodyPr wrap="square" rtlCol="0" anchor="ctr"/>
-          <a:lstStyle/>
-          <a:p>
-            <a:pPr indent="0" marL="0">
+        </p:spPr>
+        <p:txBody>
+          <a:bodyPr wrap="square" rtlCol="0" anchor="ctr"/>
+          <a:lstStyle/>
+          <a:p>
+            <a:pPr marL="0" indent="0">
               <a:buNone/>
             </a:pPr>
             <a:r>
@@ -7539,9 +7345,9 @@
                 <a:solidFill>
                   <a:srgbClr val="94A3B8"/>
                 </a:solidFill>
-                <a:latin typeface="Microsoft YaHei" pitchFamily="34" charset="0"/>
-                <a:ea typeface="Microsoft YaHei" pitchFamily="34" charset="-122"/>
-                <a:cs typeface="Microsoft YaHei" pitchFamily="34" charset="-120"/>
+                <a:latin typeface="微软雅黑" panose="020B0503020204020204" pitchFamily="34" charset="-122"/>
+                <a:ea typeface="微软雅黑" panose="020B0503020204020204" pitchFamily="34" charset="-122"/>
+                <a:cs typeface="微软雅黑" panose="020B0503020204020204" pitchFamily="34" charset="-120"/>
               </a:rPr>
               <a:t>EvidenceLoop · GOAI Boundless Agents · AI+教育</a:t>
             </a:r>
@@ -7564,13 +7370,12 @@
             <a:avLst/>
           </a:prstGeom>
           <a:noFill/>
-          <a:ln/>
-        </p:spPr>
-        <p:txBody>
-          <a:bodyPr wrap="square" rtlCol="0" anchor="ctr"/>
-          <a:lstStyle/>
-          <a:p>
-            <a:pPr algn="r" indent="0" marL="0">
+        </p:spPr>
+        <p:txBody>
+          <a:bodyPr wrap="square" rtlCol="0" anchor="ctr"/>
+          <a:lstStyle/>
+          <a:p>
+            <a:pPr marL="0" indent="0" algn="r">
               <a:buNone/>
             </a:pPr>
             <a:r>
@@ -7578,9 +7383,9 @@
                 <a:solidFill>
                   <a:srgbClr val="94A3B8"/>
                 </a:solidFill>
-                <a:latin typeface="Microsoft YaHei" pitchFamily="34" charset="0"/>
-                <a:ea typeface="Microsoft YaHei" pitchFamily="34" charset="-122"/>
-                <a:cs typeface="Microsoft YaHei" pitchFamily="34" charset="-120"/>
+                <a:latin typeface="微软雅黑" panose="020B0503020204020204" pitchFamily="34" charset="-122"/>
+                <a:ea typeface="微软雅黑" panose="020B0503020204020204" pitchFamily="34" charset="-122"/>
+                <a:cs typeface="微软雅黑" panose="020B0503020204020204" pitchFamily="34" charset="-120"/>
               </a:rPr>
               <a:t>6 / 10</a:t>
             </a:r>
@@ -7598,7 +7403,7 @@
 
 <file path=ppt/slides/slide7.xml><?xml version="1.0" encoding="utf-8"?>
 <p:sld xmlns:a="http://schemas.openxmlformats.org/drawingml/2006/main" xmlns:r="http://schemas.openxmlformats.org/officeDocument/2006/relationships" xmlns:p="http://schemas.openxmlformats.org/presentationml/2006/main">
-  <p:cSld name="Slide 7">
+  <p:cSld>
     <p:spTree>
       <p:nvGrpSpPr>
         <p:cNvPr id="1" name=""/>
@@ -7678,13 +7483,12 @@
             <a:avLst/>
           </a:prstGeom>
           <a:noFill/>
-          <a:ln/>
-        </p:spPr>
-        <p:txBody>
-          <a:bodyPr wrap="square" rtlCol="0" anchor="ctr"/>
-          <a:lstStyle/>
-          <a:p>
-            <a:pPr indent="0" marL="0">
+        </p:spPr>
+        <p:txBody>
+          <a:bodyPr wrap="square" rtlCol="0" anchor="ctr"/>
+          <a:lstStyle/>
+          <a:p>
+            <a:pPr marL="0" indent="0">
               <a:buNone/>
             </a:pPr>
             <a:r>
@@ -7692,9 +7496,9 @@
                 <a:solidFill>
                   <a:srgbClr val="F8FAFC"/>
                 </a:solidFill>
-                <a:latin typeface="Microsoft YaHei" pitchFamily="34" charset="0"/>
-                <a:ea typeface="Microsoft YaHei" pitchFamily="34" charset="-122"/>
-                <a:cs typeface="Microsoft YaHei" pitchFamily="34" charset="-120"/>
+                <a:latin typeface="微软雅黑" panose="020B0503020204020204" pitchFamily="34" charset="-122"/>
+                <a:ea typeface="微软雅黑" panose="020B0503020204020204" pitchFamily="34" charset="-122"/>
+                <a:cs typeface="微软雅黑" panose="020B0503020204020204" pitchFamily="34" charset="-120"/>
               </a:rPr>
               <a:t>技术架构：EvaluationAgent 五步</a:t>
             </a:r>
@@ -7717,13 +7521,12 @@
             <a:avLst/>
           </a:prstGeom>
           <a:noFill/>
-          <a:ln/>
-        </p:spPr>
-        <p:txBody>
-          <a:bodyPr wrap="square" rtlCol="0" anchor="ctr"/>
-          <a:lstStyle/>
-          <a:p>
-            <a:pPr indent="0" marL="0">
+        </p:spPr>
+        <p:txBody>
+          <a:bodyPr wrap="square" rtlCol="0" anchor="ctr"/>
+          <a:lstStyle/>
+          <a:p>
+            <a:pPr marL="0" indent="0">
               <a:buNone/>
             </a:pPr>
             <a:r>
@@ -7731,9 +7534,9 @@
                 <a:solidFill>
                   <a:srgbClr val="94A3B8"/>
                 </a:solidFill>
-                <a:latin typeface="Microsoft YaHei" pitchFamily="34" charset="0"/>
-                <a:ea typeface="Microsoft YaHei" pitchFamily="34" charset="-122"/>
-                <a:cs typeface="Microsoft YaHei" pitchFamily="34" charset="-120"/>
+                <a:latin typeface="微软雅黑" panose="020B0503020204020204" pitchFamily="34" charset="-122"/>
+                <a:ea typeface="微软雅黑" panose="020B0503020204020204" pitchFamily="34" charset="-122"/>
+                <a:cs typeface="微软雅黑" panose="020B0503020204020204" pitchFamily="34" charset="-120"/>
               </a:rPr>
               <a:t>React + Node HTTP · Python 子进程 · 量规 / 知识库 · 可选 LLM</a:t>
             </a:r>
@@ -7808,13 +7611,12 @@
             <a:avLst/>
           </a:prstGeom>
           <a:noFill/>
-          <a:ln/>
-        </p:spPr>
-        <p:txBody>
-          <a:bodyPr wrap="square" rtlCol="0" anchor="ctr"/>
-          <a:lstStyle/>
-          <a:p>
-            <a:pPr indent="0" marL="0">
+        </p:spPr>
+        <p:txBody>
+          <a:bodyPr wrap="square" rtlCol="0" anchor="ctr"/>
+          <a:lstStyle/>
+          <a:p>
+            <a:pPr marL="0" indent="0">
               <a:buNone/>
             </a:pPr>
             <a:r>
@@ -7822,9 +7624,9 @@
                 <a:solidFill>
                   <a:srgbClr val="22D3EE"/>
                 </a:solidFill>
-                <a:latin typeface="Microsoft YaHei" pitchFamily="34" charset="0"/>
-                <a:ea typeface="Microsoft YaHei" pitchFamily="34" charset="-122"/>
-                <a:cs typeface="Microsoft YaHei" pitchFamily="34" charset="-120"/>
+                <a:latin typeface="微软雅黑" panose="020B0503020204020204" pitchFamily="34" charset="-122"/>
+                <a:ea typeface="微软雅黑" panose="020B0503020204020204" pitchFamily="34" charset="-122"/>
+                <a:cs typeface="微软雅黑" panose="020B0503020204020204" pitchFamily="34" charset="-120"/>
               </a:rPr>
               <a:t>交互层</a:t>
             </a:r>
@@ -7847,13 +7649,12 @@
             <a:avLst/>
           </a:prstGeom>
           <a:noFill/>
-          <a:ln/>
-        </p:spPr>
-        <p:txBody>
-          <a:bodyPr wrap="square" rtlCol="0" anchor="ctr"/>
-          <a:lstStyle/>
-          <a:p>
-            <a:pPr indent="0" marL="0">
+        </p:spPr>
+        <p:txBody>
+          <a:bodyPr wrap="square" rtlCol="0" anchor="ctr"/>
+          <a:lstStyle/>
+          <a:p>
+            <a:pPr marL="0" indent="0">
               <a:buNone/>
             </a:pPr>
             <a:r>
@@ -7861,16 +7662,16 @@
                 <a:solidFill>
                   <a:srgbClr val="F8FAFC"/>
                 </a:solidFill>
-                <a:latin typeface="Microsoft YaHei" pitchFamily="34" charset="0"/>
-                <a:ea typeface="Microsoft YaHei" pitchFamily="34" charset="-122"/>
-                <a:cs typeface="Microsoft YaHei" pitchFamily="34" charset="-120"/>
+                <a:latin typeface="微软雅黑" panose="020B0503020204020204" pitchFamily="34" charset="-122"/>
+                <a:ea typeface="微软雅黑" panose="020B0503020204020204" pitchFamily="34" charset="-122"/>
+                <a:cs typeface="微软雅黑" panose="020B0503020204020204" pitchFamily="34" charset="-120"/>
               </a:rPr>
               <a:t>学习工作台 · 班级学情 · 项目透明度</a:t>
             </a:r>
             <a:endParaRPr lang="en-US" sz="1500" dirty="0"/>
           </a:p>
           <a:p>
-            <a:pPr indent="0" marL="0">
+            <a:pPr marL="0" indent="0">
               <a:buNone/>
             </a:pPr>
             <a:r>
@@ -7878,9 +7679,9 @@
                 <a:solidFill>
                   <a:srgbClr val="F8FAFC"/>
                 </a:solidFill>
-                <a:latin typeface="Microsoft YaHei" pitchFamily="34" charset="0"/>
-                <a:ea typeface="Microsoft YaHei" pitchFamily="34" charset="-122"/>
-                <a:cs typeface="Microsoft YaHei" pitchFamily="34" charset="-120"/>
+                <a:latin typeface="微软雅黑" panose="020B0503020204020204" pitchFamily="34" charset="-122"/>
+                <a:ea typeface="微软雅黑" panose="020B0503020204020204" pitchFamily="34" charset="-122"/>
+                <a:cs typeface="微软雅黑" panose="020B0503020204020204" pitchFamily="34" charset="-120"/>
               </a:rPr>
               <a:t>Vite + React 19</a:t>
             </a:r>
@@ -7955,13 +7756,12 @@
             <a:avLst/>
           </a:prstGeom>
           <a:noFill/>
-          <a:ln/>
-        </p:spPr>
-        <p:txBody>
-          <a:bodyPr wrap="square" rtlCol="0" anchor="ctr"/>
-          <a:lstStyle/>
-          <a:p>
-            <a:pPr indent="0" marL="0">
+        </p:spPr>
+        <p:txBody>
+          <a:bodyPr wrap="square" rtlCol="0" anchor="ctr"/>
+          <a:lstStyle/>
+          <a:p>
+            <a:pPr marL="0" indent="0">
               <a:buNone/>
             </a:pPr>
             <a:r>
@@ -7969,9 +7769,9 @@
                 <a:solidFill>
                   <a:srgbClr val="22D3EE"/>
                 </a:solidFill>
-                <a:latin typeface="Microsoft YaHei" pitchFamily="34" charset="0"/>
-                <a:ea typeface="Microsoft YaHei" pitchFamily="34" charset="-122"/>
-                <a:cs typeface="Microsoft YaHei" pitchFamily="34" charset="-120"/>
+                <a:latin typeface="微软雅黑" panose="020B0503020204020204" pitchFamily="34" charset="-122"/>
+                <a:ea typeface="微软雅黑" panose="020B0503020204020204" pitchFamily="34" charset="-122"/>
+                <a:cs typeface="微软雅黑" panose="020B0503020204020204" pitchFamily="34" charset="-120"/>
               </a:rPr>
               <a:t>Agent 层</a:t>
             </a:r>
@@ -7994,13 +7794,12 @@
             <a:avLst/>
           </a:prstGeom>
           <a:noFill/>
-          <a:ln/>
-        </p:spPr>
-        <p:txBody>
-          <a:bodyPr wrap="square" rtlCol="0" anchor="ctr"/>
-          <a:lstStyle/>
-          <a:p>
-            <a:pPr indent="0" marL="0">
+        </p:spPr>
+        <p:txBody>
+          <a:bodyPr wrap="square" rtlCol="0" anchor="ctr"/>
+          <a:lstStyle/>
+          <a:p>
+            <a:pPr marL="0" indent="0">
               <a:buNone/>
             </a:pPr>
             <a:r>
@@ -8008,16 +7807,16 @@
                 <a:solidFill>
                   <a:srgbClr val="F8FAFC"/>
                 </a:solidFill>
-                <a:latin typeface="Microsoft YaHei" pitchFamily="34" charset="0"/>
-                <a:ea typeface="Microsoft YaHei" pitchFamily="34" charset="-122"/>
-                <a:cs typeface="Microsoft YaHei" pitchFamily="34" charset="-120"/>
+                <a:latin typeface="微软雅黑" panose="020B0503020204020204" pitchFamily="34" charset="-122"/>
+                <a:ea typeface="微软雅黑" panose="020B0503020204020204" pitchFamily="34" charset="-122"/>
+                <a:cs typeface="微软雅黑" panose="020B0503020204020204" pitchFamily="34" charset="-120"/>
               </a:rPr>
               <a:t>assignment.retrieve → python.safe-runner</a:t>
             </a:r>
             <a:endParaRPr lang="en-US" sz="1500" dirty="0"/>
           </a:p>
           <a:p>
-            <a:pPr indent="0" marL="0">
+            <a:pPr marL="0" indent="0">
               <a:buNone/>
             </a:pPr>
             <a:r>
@@ -8025,9 +7824,9 @@
                 <a:solidFill>
                   <a:srgbClr val="F8FAFC"/>
                 </a:solidFill>
-                <a:latin typeface="Microsoft YaHei" pitchFamily="34" charset="0"/>
-                <a:ea typeface="Microsoft YaHei" pitchFamily="34" charset="-122"/>
-                <a:cs typeface="Microsoft YaHei" pitchFamily="34" charset="-120"/>
+                <a:latin typeface="微软雅黑" panose="020B0503020204020204" pitchFamily="34" charset="-122"/>
+                <a:ea typeface="微软雅黑" panose="020B0503020204020204" pitchFamily="34" charset="-122"/>
+                <a:cs typeface="微软雅黑" panose="020B0503020204020204" pitchFamily="34" charset="-120"/>
               </a:rPr>
               <a:t>rubric.score → knowledge.retrieve → feedback.compose</a:t>
             </a:r>
@@ -8102,13 +7901,12 @@
             <a:avLst/>
           </a:prstGeom>
           <a:noFill/>
-          <a:ln/>
-        </p:spPr>
-        <p:txBody>
-          <a:bodyPr wrap="square" rtlCol="0" anchor="ctr"/>
-          <a:lstStyle/>
-          <a:p>
-            <a:pPr indent="0" marL="0">
+        </p:spPr>
+        <p:txBody>
+          <a:bodyPr wrap="square" rtlCol="0" anchor="ctr"/>
+          <a:lstStyle/>
+          <a:p>
+            <a:pPr marL="0" indent="0">
               <a:buNone/>
             </a:pPr>
             <a:r>
@@ -8116,9 +7914,9 @@
                 <a:solidFill>
                   <a:srgbClr val="22D3EE"/>
                 </a:solidFill>
-                <a:latin typeface="Microsoft YaHei" pitchFamily="34" charset="0"/>
-                <a:ea typeface="Microsoft YaHei" pitchFamily="34" charset="-122"/>
-                <a:cs typeface="Microsoft YaHei" pitchFamily="34" charset="-120"/>
+                <a:latin typeface="微软雅黑" panose="020B0503020204020204" pitchFamily="34" charset="-122"/>
+                <a:ea typeface="微软雅黑" panose="020B0503020204020204" pitchFamily="34" charset="-122"/>
+                <a:cs typeface="微软雅黑" panose="020B0503020204020204" pitchFamily="34" charset="-120"/>
               </a:rPr>
               <a:t>证据层</a:t>
             </a:r>
@@ -8141,13 +7939,12 @@
             <a:avLst/>
           </a:prstGeom>
           <a:noFill/>
-          <a:ln/>
-        </p:spPr>
-        <p:txBody>
-          <a:bodyPr wrap="square" rtlCol="0" anchor="ctr"/>
-          <a:lstStyle/>
-          <a:p>
-            <a:pPr indent="0" marL="0">
+        </p:spPr>
+        <p:txBody>
+          <a:bodyPr wrap="square" rtlCol="0" anchor="ctr"/>
+          <a:lstStyle/>
+          <a:p>
+            <a:pPr marL="0" indent="0">
               <a:buNone/>
             </a:pPr>
             <a:r>
@@ -8155,16 +7952,16 @@
                 <a:solidFill>
                   <a:srgbClr val="F8FAFC"/>
                 </a:solidFill>
-                <a:latin typeface="Microsoft YaHei" pitchFamily="34" charset="0"/>
-                <a:ea typeface="Microsoft YaHei" pitchFamily="34" charset="-122"/>
-                <a:cs typeface="Microsoft YaHei" pitchFamily="34" charset="-120"/>
+                <a:latin typeface="微软雅黑" panose="020B0503020204020204" pitchFamily="34" charset="-122"/>
+                <a:ea typeface="微软雅黑" panose="020B0503020204020204" pitchFamily="34" charset="-122"/>
+                <a:cs typeface="微软雅黑" panose="020B0503020204020204" pitchFamily="34" charset="-120"/>
               </a:rPr>
               <a:t>公开/隐藏测试 · 静态契约检查</a:t>
             </a:r>
             <a:endParaRPr lang="en-US" sz="1500" dirty="0"/>
           </a:p>
           <a:p>
-            <a:pPr indent="0" marL="0">
+            <a:pPr marL="0" indent="0">
               <a:buNone/>
             </a:pPr>
             <a:r>
@@ -8172,9 +7969,9 @@
                 <a:solidFill>
                   <a:srgbClr val="F8FAFC"/>
                 </a:solidFill>
-                <a:latin typeface="Microsoft YaHei" pitchFamily="34" charset="0"/>
-                <a:ea typeface="Microsoft YaHei" pitchFamily="34" charset="-122"/>
-                <a:cs typeface="Microsoft YaHei" pitchFamily="34" charset="-120"/>
+                <a:latin typeface="微软雅黑" panose="020B0503020204020204" pitchFamily="34" charset="-122"/>
+                <a:ea typeface="微软雅黑" panose="020B0503020204020204" pitchFamily="34" charset="-122"/>
+                <a:cs typeface="微软雅黑" panose="020B0503020204020204" pitchFamily="34" charset="-120"/>
               </a:rPr>
               <a:t>分数 = Σ 通过证据权重</a:t>
             </a:r>
@@ -8249,13 +8046,12 @@
             <a:avLst/>
           </a:prstGeom>
           <a:noFill/>
-          <a:ln/>
-        </p:spPr>
-        <p:txBody>
-          <a:bodyPr wrap="square" rtlCol="0" anchor="ctr"/>
-          <a:lstStyle/>
-          <a:p>
-            <a:pPr indent="0" marL="0">
+        </p:spPr>
+        <p:txBody>
+          <a:bodyPr wrap="square" rtlCol="0" anchor="ctr"/>
+          <a:lstStyle/>
+          <a:p>
+            <a:pPr marL="0" indent="0">
               <a:buNone/>
             </a:pPr>
             <a:r>
@@ -8263,9 +8059,9 @@
                 <a:solidFill>
                   <a:srgbClr val="22D3EE"/>
                 </a:solidFill>
-                <a:latin typeface="Microsoft YaHei" pitchFamily="34" charset="0"/>
-                <a:ea typeface="Microsoft YaHei" pitchFamily="34" charset="-122"/>
-                <a:cs typeface="Microsoft YaHei" pitchFamily="34" charset="-120"/>
+                <a:latin typeface="微软雅黑" panose="020B0503020204020204" pitchFamily="34" charset="-122"/>
+                <a:ea typeface="微软雅黑" panose="020B0503020204020204" pitchFamily="34" charset="-122"/>
+                <a:cs typeface="微软雅黑" panose="020B0503020204020204" pitchFamily="34" charset="-120"/>
               </a:rPr>
               <a:t>反馈层</a:t>
             </a:r>
@@ -8288,13 +8084,12 @@
             <a:avLst/>
           </a:prstGeom>
           <a:noFill/>
-          <a:ln/>
-        </p:spPr>
-        <p:txBody>
-          <a:bodyPr wrap="square" rtlCol="0" anchor="ctr"/>
-          <a:lstStyle/>
-          <a:p>
-            <a:pPr indent="0" marL="0">
+        </p:spPr>
+        <p:txBody>
+          <a:bodyPr wrap="square" rtlCol="0" anchor="ctr"/>
+          <a:lstStyle/>
+          <a:p>
+            <a:pPr marL="0" indent="0">
               <a:buNone/>
             </a:pPr>
             <a:r>
@@ -8302,16 +8097,16 @@
                 <a:solidFill>
                   <a:srgbClr val="F8FAFC"/>
                 </a:solidFill>
-                <a:latin typeface="Microsoft YaHei" pitchFamily="34" charset="0"/>
-                <a:ea typeface="Microsoft YaHei" pitchFamily="34" charset="-122"/>
-                <a:cs typeface="Microsoft YaHei" pitchFamily="34" charset="-120"/>
+                <a:latin typeface="微软雅黑" panose="020B0503020204020204" pitchFamily="34" charset="-122"/>
+                <a:ea typeface="微软雅黑" panose="020B0503020204020204" pitchFamily="34" charset="-122"/>
+                <a:cs typeface="微软雅黑" panose="020B0503020204020204" pitchFamily="34" charset="-120"/>
               </a:rPr>
               <a:t>本地规则策略默认</a:t>
             </a:r>
             <a:endParaRPr lang="en-US" sz="1500" dirty="0"/>
           </a:p>
           <a:p>
-            <a:pPr indent="0" marL="0">
+            <a:pPr marL="0" indent="0">
               <a:buNone/>
             </a:pPr>
             <a:r>
@@ -8319,9 +8114,9 @@
                 <a:solidFill>
                   <a:srgbClr val="F8FAFC"/>
                 </a:solidFill>
-                <a:latin typeface="Microsoft YaHei" pitchFamily="34" charset="0"/>
-                <a:ea typeface="Microsoft YaHei" pitchFamily="34" charset="-122"/>
-                <a:cs typeface="Microsoft YaHei" pitchFamily="34" charset="-120"/>
+                <a:latin typeface="微软雅黑" panose="020B0503020204020204" pitchFamily="34" charset="-122"/>
+                <a:ea typeface="微软雅黑" panose="020B0503020204020204" pitchFamily="34" charset="-122"/>
+                <a:cs typeface="微软雅黑" panose="020B0503020204020204" pitchFamily="34" charset="-120"/>
               </a:rPr>
               <a:t>LLM 可选，仅输出 summary</a:t>
             </a:r>
@@ -8344,13 +8139,12 @@
             <a:avLst/>
           </a:prstGeom>
           <a:noFill/>
-          <a:ln/>
-        </p:spPr>
-        <p:txBody>
-          <a:bodyPr wrap="square" rtlCol="0" anchor="ctr"/>
-          <a:lstStyle/>
-          <a:p>
-            <a:pPr indent="0" marL="0">
+        </p:spPr>
+        <p:txBody>
+          <a:bodyPr wrap="square" rtlCol="0" anchor="ctr"/>
+          <a:lstStyle/>
+          <a:p>
+            <a:pPr marL="0" indent="0">
               <a:buNone/>
             </a:pPr>
             <a:r>
@@ -8358,9 +8152,9 @@
                 <a:solidFill>
                   <a:srgbClr val="94A3B8"/>
                 </a:solidFill>
-                <a:latin typeface="Microsoft YaHei" pitchFamily="34" charset="0"/>
-                <a:ea typeface="Microsoft YaHei" pitchFamily="34" charset="-122"/>
-                <a:cs typeface="Microsoft YaHei" pitchFamily="34" charset="-120"/>
+                <a:latin typeface="微软雅黑" panose="020B0503020204020204" pitchFamily="34" charset="-122"/>
+                <a:ea typeface="微软雅黑" panose="020B0503020204020204" pitchFamily="34" charset="-122"/>
+                <a:cs typeface="微软雅黑" panose="020B0503020204020204" pitchFamily="34" charset="-120"/>
               </a:rPr>
               <a:t>EvidenceLoop · GOAI Boundless Agents · AI+教育</a:t>
             </a:r>
@@ -8383,13 +8177,12 @@
             <a:avLst/>
           </a:prstGeom>
           <a:noFill/>
-          <a:ln/>
-        </p:spPr>
-        <p:txBody>
-          <a:bodyPr wrap="square" rtlCol="0" anchor="ctr"/>
-          <a:lstStyle/>
-          <a:p>
-            <a:pPr algn="r" indent="0" marL="0">
+        </p:spPr>
+        <p:txBody>
+          <a:bodyPr wrap="square" rtlCol="0" anchor="ctr"/>
+          <a:lstStyle/>
+          <a:p>
+            <a:pPr marL="0" indent="0" algn="r">
               <a:buNone/>
             </a:pPr>
             <a:r>
@@ -8397,9 +8190,9 @@
                 <a:solidFill>
                   <a:srgbClr val="94A3B8"/>
                 </a:solidFill>
-                <a:latin typeface="Microsoft YaHei" pitchFamily="34" charset="0"/>
-                <a:ea typeface="Microsoft YaHei" pitchFamily="34" charset="-122"/>
-                <a:cs typeface="Microsoft YaHei" pitchFamily="34" charset="-120"/>
+                <a:latin typeface="微软雅黑" panose="020B0503020204020204" pitchFamily="34" charset="-122"/>
+                <a:ea typeface="微软雅黑" panose="020B0503020204020204" pitchFamily="34" charset="-122"/>
+                <a:cs typeface="微软雅黑" panose="020B0503020204020204" pitchFamily="34" charset="-120"/>
               </a:rPr>
               <a:t>7 / 10</a:t>
             </a:r>
@@ -8417,7 +8210,7 @@
 
 <file path=ppt/slides/slide8.xml><?xml version="1.0" encoding="utf-8"?>
 <p:sld xmlns:a="http://schemas.openxmlformats.org/drawingml/2006/main" xmlns:r="http://schemas.openxmlformats.org/officeDocument/2006/relationships" xmlns:p="http://schemas.openxmlformats.org/presentationml/2006/main">
-  <p:cSld name="Slide 8">
+  <p:cSld>
     <p:spTree>
       <p:nvGrpSpPr>
         <p:cNvPr id="1" name=""/>
@@ -8497,13 +8290,12 @@
             <a:avLst/>
           </a:prstGeom>
           <a:noFill/>
-          <a:ln/>
-        </p:spPr>
-        <p:txBody>
-          <a:bodyPr wrap="square" rtlCol="0" anchor="ctr"/>
-          <a:lstStyle/>
-          <a:p>
-            <a:pPr indent="0" marL="0">
+        </p:spPr>
+        <p:txBody>
+          <a:bodyPr wrap="square" rtlCol="0" anchor="ctr"/>
+          <a:lstStyle/>
+          <a:p>
+            <a:pPr marL="0" indent="0">
               <a:buNone/>
             </a:pPr>
             <a:r>
@@ -8511,9 +8303,9 @@
                 <a:solidFill>
                   <a:srgbClr val="F8FAFC"/>
                 </a:solidFill>
-                <a:latin typeface="Microsoft YaHei" pitchFamily="34" charset="0"/>
-                <a:ea typeface="Microsoft YaHei" pitchFamily="34" charset="-122"/>
-                <a:cs typeface="Microsoft YaHei" pitchFamily="34" charset="-120"/>
+                <a:latin typeface="微软雅黑" panose="020B0503020204020204" pitchFamily="34" charset="-122"/>
+                <a:ea typeface="微软雅黑" panose="020B0503020204020204" pitchFamily="34" charset="-122"/>
+                <a:cs typeface="微软雅黑" panose="020B0503020204020204" pitchFamily="34" charset="-120"/>
               </a:rPr>
               <a:t>安全与合规边界</a:t>
             </a:r>
@@ -8536,13 +8328,12 @@
             <a:avLst/>
           </a:prstGeom>
           <a:noFill/>
-          <a:ln/>
-        </p:spPr>
-        <p:txBody>
-          <a:bodyPr wrap="square" rtlCol="0" anchor="ctr"/>
-          <a:lstStyle/>
-          <a:p>
-            <a:pPr indent="0" marL="0">
+        </p:spPr>
+        <p:txBody>
+          <a:bodyPr wrap="square" rtlCol="0" anchor="ctr"/>
+          <a:lstStyle/>
+          <a:p>
+            <a:pPr marL="0" indent="0">
               <a:buNone/>
             </a:pPr>
             <a:r>
@@ -8550,9 +8341,9 @@
                 <a:solidFill>
                   <a:srgbClr val="94A3B8"/>
                 </a:solidFill>
-                <a:latin typeface="Microsoft YaHei" pitchFamily="34" charset="0"/>
-                <a:ea typeface="Microsoft YaHei" pitchFamily="34" charset="-122"/>
-                <a:cs typeface="Microsoft YaHei" pitchFamily="34" charset="-120"/>
+                <a:latin typeface="微软雅黑" panose="020B0503020204020204" pitchFamily="34" charset="-122"/>
+                <a:ea typeface="微软雅黑" panose="020B0503020204020204" pitchFamily="34" charset="-122"/>
+                <a:cs typeface="微软雅黑" panose="020B0503020204020204" pitchFamily="34" charset="-120"/>
               </a:rPr>
               <a:t>演示可用、边界清晰，生产前替换隔离与存储</a:t>
             </a:r>
@@ -8602,13 +8393,12 @@
             <a:avLst/>
           </a:prstGeom>
           <a:noFill/>
-          <a:ln/>
-        </p:spPr>
-        <p:txBody>
-          <a:bodyPr wrap="square" rtlCol="0" anchor="ctr"/>
-          <a:lstStyle/>
-          <a:p>
-            <a:pPr indent="0" marL="0">
+        </p:spPr>
+        <p:txBody>
+          <a:bodyPr wrap="square" rtlCol="0" anchor="ctr"/>
+          <a:lstStyle/>
+          <a:p>
+            <a:pPr marL="0" indent="0">
               <a:buNone/>
             </a:pPr>
             <a:r>
@@ -8616,9 +8406,9 @@
                 <a:solidFill>
                   <a:srgbClr val="F8FAFC"/>
                 </a:solidFill>
-                <a:latin typeface="Microsoft YaHei" pitchFamily="34" charset="0"/>
-                <a:ea typeface="Microsoft YaHei" pitchFamily="34" charset="-122"/>
-                <a:cs typeface="Microsoft YaHei" pitchFamily="34" charset="-120"/>
+                <a:latin typeface="微软雅黑" panose="020B0503020204020204" pitchFamily="34" charset="-122"/>
+                <a:ea typeface="微软雅黑" panose="020B0503020204020204" pitchFamily="34" charset="-122"/>
+                <a:cs typeface="微软雅黑" panose="020B0503020204020204" pitchFamily="34" charset="-120"/>
               </a:rPr>
               <a:t>匿名样例数据</a:t>
             </a:r>
@@ -8641,13 +8431,12 @@
             <a:avLst/>
           </a:prstGeom>
           <a:noFill/>
-          <a:ln/>
-        </p:spPr>
-        <p:txBody>
-          <a:bodyPr wrap="square" rtlCol="0" anchor="ctr"/>
-          <a:lstStyle/>
-          <a:p>
-            <a:pPr indent="0" marL="0">
+        </p:spPr>
+        <p:txBody>
+          <a:bodyPr wrap="square" rtlCol="0" anchor="ctr"/>
+          <a:lstStyle/>
+          <a:p>
+            <a:pPr marL="0" indent="0">
               <a:buNone/>
             </a:pPr>
             <a:r>
@@ -8655,9 +8444,9 @@
                 <a:solidFill>
                   <a:srgbClr val="94A3B8"/>
                 </a:solidFill>
-                <a:latin typeface="Microsoft YaHei" pitchFamily="34" charset="0"/>
-                <a:ea typeface="Microsoft YaHei" pitchFamily="34" charset="-122"/>
-                <a:cs typeface="Microsoft YaHei" pitchFamily="34" charset="-120"/>
+                <a:latin typeface="微软雅黑" panose="020B0503020204020204" pitchFamily="34" charset="-122"/>
+                <a:ea typeface="微软雅黑" panose="020B0503020204020204" pitchFamily="34" charset="-122"/>
+                <a:cs typeface="微软雅黑" panose="020B0503020204020204" pitchFamily="34" charset="-120"/>
               </a:rPr>
               <a:t>不连接真实学籍 / LMS，避免隐私与授权风险。</a:t>
             </a:r>
@@ -8707,13 +8496,12 @@
             <a:avLst/>
           </a:prstGeom>
           <a:noFill/>
-          <a:ln/>
-        </p:spPr>
-        <p:txBody>
-          <a:bodyPr wrap="square" rtlCol="0" anchor="ctr"/>
-          <a:lstStyle/>
-          <a:p>
-            <a:pPr indent="0" marL="0">
+        </p:spPr>
+        <p:txBody>
+          <a:bodyPr wrap="square" rtlCol="0" anchor="ctr"/>
+          <a:lstStyle/>
+          <a:p>
+            <a:pPr marL="0" indent="0">
               <a:buNone/>
             </a:pPr>
             <a:r>
@@ -8721,9 +8509,9 @@
                 <a:solidFill>
                   <a:srgbClr val="F8FAFC"/>
                 </a:solidFill>
-                <a:latin typeface="Microsoft YaHei" pitchFamily="34" charset="0"/>
-                <a:ea typeface="Microsoft YaHei" pitchFamily="34" charset="-122"/>
-                <a:cs typeface="Microsoft YaHei" pitchFamily="34" charset="-120"/>
+                <a:latin typeface="微软雅黑" panose="020B0503020204020204" pitchFamily="34" charset="-122"/>
+                <a:ea typeface="微软雅黑" panose="020B0503020204020204" pitchFamily="34" charset="-122"/>
+                <a:cs typeface="微软雅黑" panose="020B0503020204020204" pitchFamily="34" charset="-120"/>
               </a:rPr>
               <a:t>模型永不改分</a:t>
             </a:r>
@@ -8746,13 +8534,12 @@
             <a:avLst/>
           </a:prstGeom>
           <a:noFill/>
-          <a:ln/>
-        </p:spPr>
-        <p:txBody>
-          <a:bodyPr wrap="square" rtlCol="0" anchor="ctr"/>
-          <a:lstStyle/>
-          <a:p>
-            <a:pPr indent="0" marL="0">
+        </p:spPr>
+        <p:txBody>
+          <a:bodyPr wrap="square" rtlCol="0" anchor="ctr"/>
+          <a:lstStyle/>
+          <a:p>
+            <a:pPr marL="0" indent="0">
               <a:buNone/>
             </a:pPr>
             <a:r>
@@ -8760,9 +8547,9 @@
                 <a:solidFill>
                   <a:srgbClr val="94A3B8"/>
                 </a:solidFill>
-                <a:latin typeface="Microsoft YaHei" pitchFamily="34" charset="0"/>
-                <a:ea typeface="Microsoft YaHei" pitchFamily="34" charset="-122"/>
-                <a:cs typeface="Microsoft YaHei" pitchFamily="34" charset="-120"/>
+                <a:latin typeface="微软雅黑" panose="020B0503020204020204" pitchFamily="34" charset="-122"/>
+                <a:ea typeface="微软雅黑" panose="020B0503020204020204" pitchFamily="34" charset="-122"/>
+                <a:cs typeface="微软雅黑" panose="020B0503020204020204" pitchFamily="34" charset="-120"/>
               </a:rPr>
               <a:t>评分权固定在测试证据与量规；反馈失败自动回退。</a:t>
             </a:r>
@@ -8812,13 +8599,12 @@
             <a:avLst/>
           </a:prstGeom>
           <a:noFill/>
-          <a:ln/>
-        </p:spPr>
-        <p:txBody>
-          <a:bodyPr wrap="square" rtlCol="0" anchor="ctr"/>
-          <a:lstStyle/>
-          <a:p>
-            <a:pPr indent="0" marL="0">
+        </p:spPr>
+        <p:txBody>
+          <a:bodyPr wrap="square" rtlCol="0" anchor="ctr"/>
+          <a:lstStyle/>
+          <a:p>
+            <a:pPr marL="0" indent="0">
               <a:buNone/>
             </a:pPr>
             <a:r>
@@ -8826,9 +8612,9 @@
                 <a:solidFill>
                   <a:srgbClr val="F8FAFC"/>
                 </a:solidFill>
-                <a:latin typeface="Microsoft YaHei" pitchFamily="34" charset="0"/>
-                <a:ea typeface="Microsoft YaHei" pitchFamily="34" charset="-122"/>
-                <a:cs typeface="Microsoft YaHei" pitchFamily="34" charset="-120"/>
+                <a:latin typeface="微软雅黑" panose="020B0503020204020204" pitchFamily="34" charset="-122"/>
+                <a:ea typeface="微软雅黑" panose="020B0503020204020204" pitchFamily="34" charset="-122"/>
+                <a:cs typeface="微软雅黑" panose="020B0503020204020204" pitchFamily="34" charset="-120"/>
               </a:rPr>
               <a:t>子进程仅 Demo</a:t>
             </a:r>
@@ -8851,13 +8637,12 @@
             <a:avLst/>
           </a:prstGeom>
           <a:noFill/>
-          <a:ln/>
-        </p:spPr>
-        <p:txBody>
-          <a:bodyPr wrap="square" rtlCol="0" anchor="ctr"/>
-          <a:lstStyle/>
-          <a:p>
-            <a:pPr indent="0" marL="0">
+        </p:spPr>
+        <p:txBody>
+          <a:bodyPr wrap="square" rtlCol="0" anchor="ctr"/>
+          <a:lstStyle/>
+          <a:p>
+            <a:pPr marL="0" indent="0">
               <a:buNone/>
             </a:pPr>
             <a:r>
@@ -8865,9 +8650,9 @@
                 <a:solidFill>
                   <a:srgbClr val="94A3B8"/>
                 </a:solidFill>
-                <a:latin typeface="Microsoft YaHei" pitchFamily="34" charset="0"/>
-                <a:ea typeface="Microsoft YaHei" pitchFamily="34" charset="-122"/>
-                <a:cs typeface="Microsoft YaHei" pitchFamily="34" charset="-120"/>
+                <a:latin typeface="微软雅黑" panose="020B0503020204020204" pitchFamily="34" charset="-122"/>
+                <a:ea typeface="微软雅黑" panose="020B0503020204020204" pitchFamily="34" charset="-122"/>
+                <a:cs typeface="微软雅黑" panose="020B0503020204020204" pitchFamily="34" charset="-120"/>
               </a:rPr>
               <a:t>本地 Python runner 适合受控演示，非生产沙箱。</a:t>
             </a:r>
@@ -8917,13 +8702,12 @@
             <a:avLst/>
           </a:prstGeom>
           <a:noFill/>
-          <a:ln/>
-        </p:spPr>
-        <p:txBody>
-          <a:bodyPr wrap="square" rtlCol="0" anchor="ctr"/>
-          <a:lstStyle/>
-          <a:p>
-            <a:pPr indent="0" marL="0">
+        </p:spPr>
+        <p:txBody>
+          <a:bodyPr wrap="square" rtlCol="0" anchor="ctr"/>
+          <a:lstStyle/>
+          <a:p>
+            <a:pPr marL="0" indent="0">
               <a:buNone/>
             </a:pPr>
             <a:r>
@@ -8931,9 +8715,9 @@
                 <a:solidFill>
                   <a:srgbClr val="F8FAFC"/>
                 </a:solidFill>
-                <a:latin typeface="Microsoft YaHei" pitchFamily="34" charset="0"/>
-                <a:ea typeface="Microsoft YaHei" pitchFamily="34" charset="-122"/>
-                <a:cs typeface="Microsoft YaHei" pitchFamily="34" charset="-120"/>
+                <a:latin typeface="微软雅黑" panose="020B0503020204020204" pitchFamily="34" charset="-122"/>
+                <a:ea typeface="微软雅黑" panose="020B0503020204020204" pitchFamily="34" charset="-122"/>
+                <a:cs typeface="微软雅黑" panose="020B0503020204020204" pitchFamily="34" charset="-120"/>
               </a:rPr>
               <a:t>生产替换路径</a:t>
             </a:r>
@@ -8956,13 +8740,12 @@
             <a:avLst/>
           </a:prstGeom>
           <a:noFill/>
-          <a:ln/>
-        </p:spPr>
-        <p:txBody>
-          <a:bodyPr wrap="square" rtlCol="0" anchor="ctr"/>
-          <a:lstStyle/>
-          <a:p>
-            <a:pPr indent="0" marL="0">
+        </p:spPr>
+        <p:txBody>
+          <a:bodyPr wrap="square" rtlCol="0" anchor="ctr"/>
+          <a:lstStyle/>
+          <a:p>
+            <a:pPr marL="0" indent="0">
               <a:buNone/>
             </a:pPr>
             <a:r>
@@ -8970,9 +8753,9 @@
                 <a:solidFill>
                   <a:srgbClr val="94A3B8"/>
                 </a:solidFill>
-                <a:latin typeface="Microsoft YaHei" pitchFamily="34" charset="0"/>
-                <a:ea typeface="Microsoft YaHei" pitchFamily="34" charset="-122"/>
-                <a:cs typeface="Microsoft YaHei" pitchFamily="34" charset="-120"/>
+                <a:latin typeface="微软雅黑" panose="020B0503020204020204" pitchFamily="34" charset="-122"/>
+                <a:ea typeface="微软雅黑" panose="020B0503020204020204" pitchFamily="34" charset="-122"/>
+                <a:cs typeface="微软雅黑" panose="020B0503020204020204" pitchFamily="34" charset="-120"/>
               </a:rPr>
               <a:t>容器/微虚拟机隔离 + 数据库持久化 + 人工确认写分。</a:t>
             </a:r>
@@ -8995,13 +8778,12 @@
             <a:avLst/>
           </a:prstGeom>
           <a:noFill/>
-          <a:ln/>
-        </p:spPr>
-        <p:txBody>
-          <a:bodyPr wrap="square" rtlCol="0" anchor="ctr"/>
-          <a:lstStyle/>
-          <a:p>
-            <a:pPr indent="0" marL="0">
+        </p:spPr>
+        <p:txBody>
+          <a:bodyPr wrap="square" rtlCol="0" anchor="ctr"/>
+          <a:lstStyle/>
+          <a:p>
+            <a:pPr marL="0" indent="0">
               <a:buNone/>
             </a:pPr>
             <a:r>
@@ -9009,9 +8791,9 @@
                 <a:solidFill>
                   <a:srgbClr val="94A3B8"/>
                 </a:solidFill>
-                <a:latin typeface="Microsoft YaHei" pitchFamily="34" charset="0"/>
-                <a:ea typeface="Microsoft YaHei" pitchFamily="34" charset="-122"/>
-                <a:cs typeface="Microsoft YaHei" pitchFamily="34" charset="-120"/>
+                <a:latin typeface="微软雅黑" panose="020B0503020204020204" pitchFamily="34" charset="-122"/>
+                <a:ea typeface="微软雅黑" panose="020B0503020204020204" pitchFamily="34" charset="-122"/>
+                <a:cs typeface="微软雅黑" panose="020B0503020204020204" pitchFamily="34" charset="-120"/>
               </a:rPr>
               <a:t>EvidenceLoop · GOAI Boundless Agents · AI+教育</a:t>
             </a:r>
@@ -9034,13 +8816,12 @@
             <a:avLst/>
           </a:prstGeom>
           <a:noFill/>
-          <a:ln/>
-        </p:spPr>
-        <p:txBody>
-          <a:bodyPr wrap="square" rtlCol="0" anchor="ctr"/>
-          <a:lstStyle/>
-          <a:p>
-            <a:pPr algn="r" indent="0" marL="0">
+        </p:spPr>
+        <p:txBody>
+          <a:bodyPr wrap="square" rtlCol="0" anchor="ctr"/>
+          <a:lstStyle/>
+          <a:p>
+            <a:pPr marL="0" indent="0" algn="r">
               <a:buNone/>
             </a:pPr>
             <a:r>
@@ -9048,9 +8829,9 @@
                 <a:solidFill>
                   <a:srgbClr val="94A3B8"/>
                 </a:solidFill>
-                <a:latin typeface="Microsoft YaHei" pitchFamily="34" charset="0"/>
-                <a:ea typeface="Microsoft YaHei" pitchFamily="34" charset="-122"/>
-                <a:cs typeface="Microsoft YaHei" pitchFamily="34" charset="-120"/>
+                <a:latin typeface="微软雅黑" panose="020B0503020204020204" pitchFamily="34" charset="-122"/>
+                <a:ea typeface="微软雅黑" panose="020B0503020204020204" pitchFamily="34" charset="-122"/>
+                <a:cs typeface="微软雅黑" panose="020B0503020204020204" pitchFamily="34" charset="-120"/>
               </a:rPr>
               <a:t>8 / 10</a:t>
             </a:r>
@@ -9068,7 +8849,7 @@
 
 <file path=ppt/slides/slide9.xml><?xml version="1.0" encoding="utf-8"?>
 <p:sld xmlns:a="http://schemas.openxmlformats.org/drawingml/2006/main" xmlns:r="http://schemas.openxmlformats.org/officeDocument/2006/relationships" xmlns:p="http://schemas.openxmlformats.org/presentationml/2006/main">
-  <p:cSld name="Slide 9">
+  <p:cSld>
     <p:spTree>
       <p:nvGrpSpPr>
         <p:cNvPr id="1" name=""/>
@@ -9148,13 +8929,12 @@
             <a:avLst/>
           </a:prstGeom>
           <a:noFill/>
-          <a:ln/>
-        </p:spPr>
-        <p:txBody>
-          <a:bodyPr wrap="square" rtlCol="0" anchor="ctr"/>
-          <a:lstStyle/>
-          <a:p>
-            <a:pPr indent="0" marL="0">
+        </p:spPr>
+        <p:txBody>
+          <a:bodyPr wrap="square" rtlCol="0" anchor="ctr"/>
+          <a:lstStyle/>
+          <a:p>
+            <a:pPr marL="0" indent="0">
               <a:buNone/>
             </a:pPr>
             <a:r>
@@ -9162,9 +8942,9 @@
                 <a:solidFill>
                   <a:srgbClr val="F8FAFC"/>
                 </a:solidFill>
-                <a:latin typeface="Microsoft YaHei" pitchFamily="34" charset="0"/>
-                <a:ea typeface="Microsoft YaHei" pitchFamily="34" charset="-122"/>
-                <a:cs typeface="Microsoft YaHei" pitchFamily="34" charset="-120"/>
+                <a:latin typeface="微软雅黑" panose="020B0503020204020204" pitchFamily="34" charset="-122"/>
+                <a:ea typeface="微软雅黑" panose="020B0503020204020204" pitchFamily="34" charset="-122"/>
+                <a:cs typeface="微软雅黑" panose="020B0503020204020204" pitchFamily="34" charset="-120"/>
               </a:rPr>
               <a:t>开放复用与差异化</a:t>
             </a:r>
@@ -9187,13 +8967,12 @@
             <a:avLst/>
           </a:prstGeom>
           <a:noFill/>
-          <a:ln/>
-        </p:spPr>
-        <p:txBody>
-          <a:bodyPr wrap="square" rtlCol="0" anchor="ctr"/>
-          <a:lstStyle/>
-          <a:p>
-            <a:pPr indent="0" marL="0">
+        </p:spPr>
+        <p:txBody>
+          <a:bodyPr wrap="square" rtlCol="0" anchor="ctr"/>
+          <a:lstStyle/>
+          <a:p>
+            <a:pPr marL="0" indent="0">
               <a:buNone/>
             </a:pPr>
             <a:r>
@@ -9201,9 +8980,9 @@
                 <a:solidFill>
                   <a:srgbClr val="94A3B8"/>
                 </a:solidFill>
-                <a:latin typeface="Microsoft YaHei" pitchFamily="34" charset="0"/>
-                <a:ea typeface="Microsoft YaHei" pitchFamily="34" charset="-122"/>
-                <a:cs typeface="Microsoft YaHei" pitchFamily="34" charset="-120"/>
+                <a:latin typeface="微软雅黑" panose="020B0503020204020204" pitchFamily="34" charset="-122"/>
+                <a:ea typeface="微软雅黑" panose="020B0503020204020204" pitchFamily="34" charset="-122"/>
+                <a:cs typeface="微软雅黑" panose="020B0503020204020204" pitchFamily="34" charset="-120"/>
               </a:rPr>
               <a:t>Apache-2.0 · 完整文档 · 可复制模板</a:t>
             </a:r>
@@ -9251,13 +9030,12 @@
             <a:avLst/>
           </a:prstGeom>
           <a:noFill/>
-          <a:ln/>
-        </p:spPr>
-        <p:txBody>
-          <a:bodyPr wrap="square" rtlCol="0" anchor="ctr"/>
-          <a:lstStyle/>
-          <a:p>
-            <a:pPr algn="ctr" indent="0" marL="0">
+        </p:spPr>
+        <p:txBody>
+          <a:bodyPr wrap="square" rtlCol="0" anchor="ctr"/>
+          <a:lstStyle/>
+          <a:p>
+            <a:pPr marL="0" indent="0" algn="ctr">
               <a:buNone/>
             </a:pPr>
             <a:r>
@@ -9265,9 +9043,9 @@
                 <a:solidFill>
                   <a:srgbClr val="22D3EE"/>
                 </a:solidFill>
-                <a:latin typeface="Microsoft YaHei" pitchFamily="34" charset="0"/>
-                <a:ea typeface="Microsoft YaHei" pitchFamily="34" charset="-122"/>
-                <a:cs typeface="Microsoft YaHei" pitchFamily="34" charset="-120"/>
+                <a:latin typeface="微软雅黑" panose="020B0503020204020204" pitchFamily="34" charset="-122"/>
+                <a:ea typeface="微软雅黑" panose="020B0503020204020204" pitchFamily="34" charset="-122"/>
+                <a:cs typeface="微软雅黑" panose="020B0503020204020204" pitchFamily="34" charset="-120"/>
               </a:rPr>
               <a:t>维度</a:t>
             </a:r>
@@ -9315,13 +9093,12 @@
             <a:avLst/>
           </a:prstGeom>
           <a:noFill/>
-          <a:ln/>
-        </p:spPr>
-        <p:txBody>
-          <a:bodyPr wrap="square" rtlCol="0" anchor="ctr"/>
-          <a:lstStyle/>
-          <a:p>
-            <a:pPr algn="ctr" indent="0" marL="0">
+        </p:spPr>
+        <p:txBody>
+          <a:bodyPr wrap="square" rtlCol="0" anchor="ctr"/>
+          <a:lstStyle/>
+          <a:p>
+            <a:pPr marL="0" indent="0" algn="ctr">
               <a:buNone/>
             </a:pPr>
             <a:r>
@@ -9329,9 +9106,9 @@
                 <a:solidFill>
                   <a:srgbClr val="22D3EE"/>
                 </a:solidFill>
-                <a:latin typeface="Microsoft YaHei" pitchFamily="34" charset="0"/>
-                <a:ea typeface="Microsoft YaHei" pitchFamily="34" charset="-122"/>
-                <a:cs typeface="Microsoft YaHei" pitchFamily="34" charset="-120"/>
+                <a:latin typeface="微软雅黑" panose="020B0503020204020204" pitchFamily="34" charset="-122"/>
+                <a:ea typeface="微软雅黑" panose="020B0503020204020204" pitchFamily="34" charset="-122"/>
+                <a:cs typeface="微软雅黑" panose="020B0503020204020204" pitchFamily="34" charset="-120"/>
               </a:rPr>
               <a:t>常见 AI 助教</a:t>
             </a:r>
@@ -9379,13 +9156,12 @@
             <a:avLst/>
           </a:prstGeom>
           <a:noFill/>
-          <a:ln/>
-        </p:spPr>
-        <p:txBody>
-          <a:bodyPr wrap="square" rtlCol="0" anchor="ctr"/>
-          <a:lstStyle/>
-          <a:p>
-            <a:pPr algn="ctr" indent="0" marL="0">
+        </p:spPr>
+        <p:txBody>
+          <a:bodyPr wrap="square" rtlCol="0" anchor="ctr"/>
+          <a:lstStyle/>
+          <a:p>
+            <a:pPr marL="0" indent="0" algn="ctr">
               <a:buNone/>
             </a:pPr>
             <a:r>
@@ -9393,9 +9169,9 @@
                 <a:solidFill>
                   <a:srgbClr val="22D3EE"/>
                 </a:solidFill>
-                <a:latin typeface="Microsoft YaHei" pitchFamily="34" charset="0"/>
-                <a:ea typeface="Microsoft YaHei" pitchFamily="34" charset="-122"/>
-                <a:cs typeface="Microsoft YaHei" pitchFamily="34" charset="-120"/>
+                <a:latin typeface="微软雅黑" panose="020B0503020204020204" pitchFamily="34" charset="-122"/>
+                <a:ea typeface="微软雅黑" panose="020B0503020204020204" pitchFamily="34" charset="-122"/>
+                <a:cs typeface="微软雅黑" panose="020B0503020204020204" pitchFamily="34" charset="-120"/>
               </a:rPr>
               <a:t>传统 OJ</a:t>
             </a:r>
@@ -9443,13 +9219,12 @@
             <a:avLst/>
           </a:prstGeom>
           <a:noFill/>
-          <a:ln/>
-        </p:spPr>
-        <p:txBody>
-          <a:bodyPr wrap="square" rtlCol="0" anchor="ctr"/>
-          <a:lstStyle/>
-          <a:p>
-            <a:pPr algn="ctr" indent="0" marL="0">
+        </p:spPr>
+        <p:txBody>
+          <a:bodyPr wrap="square" rtlCol="0" anchor="ctr"/>
+          <a:lstStyle/>
+          <a:p>
+            <a:pPr marL="0" indent="0" algn="ctr">
               <a:buNone/>
             </a:pPr>
             <a:r>
@@ -9457,9 +9232,9 @@
                 <a:solidFill>
                   <a:srgbClr val="22D3EE"/>
                 </a:solidFill>
-                <a:latin typeface="Microsoft YaHei" pitchFamily="34" charset="0"/>
-                <a:ea typeface="Microsoft YaHei" pitchFamily="34" charset="-122"/>
-                <a:cs typeface="Microsoft YaHei" pitchFamily="34" charset="-120"/>
+                <a:latin typeface="微软雅黑" panose="020B0503020204020204" pitchFamily="34" charset="-122"/>
+                <a:ea typeface="微软雅黑" panose="020B0503020204020204" pitchFamily="34" charset="-122"/>
+                <a:cs typeface="微软雅黑" panose="020B0503020204020204" pitchFamily="34" charset="-120"/>
               </a:rPr>
               <a:t>EvidenceLoop</a:t>
             </a:r>
@@ -9507,13 +9282,12 @@
             <a:avLst/>
           </a:prstGeom>
           <a:noFill/>
-          <a:ln/>
-        </p:spPr>
-        <p:txBody>
-          <a:bodyPr wrap="square" rtlCol="0" anchor="ctr"/>
-          <a:lstStyle/>
-          <a:p>
-            <a:pPr algn="ctr" indent="0" marL="0">
+        </p:spPr>
+        <p:txBody>
+          <a:bodyPr wrap="square" rtlCol="0" anchor="ctr"/>
+          <a:lstStyle/>
+          <a:p>
+            <a:pPr marL="0" indent="0" algn="ctr">
               <a:buNone/>
             </a:pPr>
             <a:r>
@@ -9521,9 +9295,9 @@
                 <a:solidFill>
                   <a:srgbClr val="F8FAFC"/>
                 </a:solidFill>
-                <a:latin typeface="Microsoft YaHei" pitchFamily="34" charset="0"/>
-                <a:ea typeface="Microsoft YaHei" pitchFamily="34" charset="-122"/>
-                <a:cs typeface="Microsoft YaHei" pitchFamily="34" charset="-120"/>
+                <a:latin typeface="微软雅黑" panose="020B0503020204020204" pitchFamily="34" charset="-122"/>
+                <a:ea typeface="微软雅黑" panose="020B0503020204020204" pitchFamily="34" charset="-122"/>
+                <a:cs typeface="微软雅黑" panose="020B0503020204020204" pitchFamily="34" charset="-120"/>
               </a:rPr>
               <a:t>评分</a:t>
             </a:r>
@@ -9571,13 +9345,12 @@
             <a:avLst/>
           </a:prstGeom>
           <a:noFill/>
-          <a:ln/>
-        </p:spPr>
-        <p:txBody>
-          <a:bodyPr wrap="square" rtlCol="0" anchor="ctr"/>
-          <a:lstStyle/>
-          <a:p>
-            <a:pPr algn="ctr" indent="0" marL="0">
+        </p:spPr>
+        <p:txBody>
+          <a:bodyPr wrap="square" rtlCol="0" anchor="ctr"/>
+          <a:lstStyle/>
+          <a:p>
+            <a:pPr marL="0" indent="0" algn="ctr">
               <a:buNone/>
             </a:pPr>
             <a:r>
@@ -9585,9 +9358,9 @@
                 <a:solidFill>
                   <a:srgbClr val="F8FAFC"/>
                 </a:solidFill>
-                <a:latin typeface="Microsoft YaHei" pitchFamily="34" charset="0"/>
-                <a:ea typeface="Microsoft YaHei" pitchFamily="34" charset="-122"/>
-                <a:cs typeface="Microsoft YaHei" pitchFamily="34" charset="-120"/>
+                <a:latin typeface="微软雅黑" panose="020B0503020204020204" pitchFamily="34" charset="-122"/>
+                <a:ea typeface="微软雅黑" panose="020B0503020204020204" pitchFamily="34" charset="-122"/>
+                <a:cs typeface="微软雅黑" panose="020B0503020204020204" pitchFamily="34" charset="-120"/>
               </a:rPr>
               <a:t>模型主观</a:t>
             </a:r>
@@ -9635,13 +9408,12 @@
             <a:avLst/>
           </a:prstGeom>
           <a:noFill/>
-          <a:ln/>
-        </p:spPr>
-        <p:txBody>
-          <a:bodyPr wrap="square" rtlCol="0" anchor="ctr"/>
-          <a:lstStyle/>
-          <a:p>
-            <a:pPr algn="ctr" indent="0" marL="0">
+        </p:spPr>
+        <p:txBody>
+          <a:bodyPr wrap="square" rtlCol="0" anchor="ctr"/>
+          <a:lstStyle/>
+          <a:p>
+            <a:pPr marL="0" indent="0" algn="ctr">
               <a:buNone/>
             </a:pPr>
             <a:r>
@@ -9649,9 +9421,9 @@
                 <a:solidFill>
                   <a:srgbClr val="F8FAFC"/>
                 </a:solidFill>
-                <a:latin typeface="Microsoft YaHei" pitchFamily="34" charset="0"/>
-                <a:ea typeface="Microsoft YaHei" pitchFamily="34" charset="-122"/>
-                <a:cs typeface="Microsoft YaHei" pitchFamily="34" charset="-120"/>
+                <a:latin typeface="微软雅黑" panose="020B0503020204020204" pitchFamily="34" charset="-122"/>
+                <a:ea typeface="微软雅黑" panose="020B0503020204020204" pitchFamily="34" charset="-122"/>
+                <a:cs typeface="微软雅黑" panose="020B0503020204020204" pitchFamily="34" charset="-120"/>
               </a:rPr>
               <a:t>测试客观</a:t>
             </a:r>
@@ -9699,13 +9471,12 @@
             <a:avLst/>
           </a:prstGeom>
           <a:noFill/>
-          <a:ln/>
-        </p:spPr>
-        <p:txBody>
-          <a:bodyPr wrap="square" rtlCol="0" anchor="ctr"/>
-          <a:lstStyle/>
-          <a:p>
-            <a:pPr algn="ctr" indent="0" marL="0">
+        </p:spPr>
+        <p:txBody>
+          <a:bodyPr wrap="square" rtlCol="0" anchor="ctr"/>
+          <a:lstStyle/>
+          <a:p>
+            <a:pPr marL="0" indent="0" algn="ctr">
               <a:buNone/>
             </a:pPr>
             <a:r>
@@ -9713,9 +9484,9 @@
                 <a:solidFill>
                   <a:srgbClr val="34D399"/>
                 </a:solidFill>
-                <a:latin typeface="Microsoft YaHei" pitchFamily="34" charset="0"/>
-                <a:ea typeface="Microsoft YaHei" pitchFamily="34" charset="-122"/>
-                <a:cs typeface="Microsoft YaHei" pitchFamily="34" charset="-120"/>
+                <a:latin typeface="微软雅黑" panose="020B0503020204020204" pitchFamily="34" charset="-122"/>
+                <a:ea typeface="微软雅黑" panose="020B0503020204020204" pitchFamily="34" charset="-122"/>
+                <a:cs typeface="微软雅黑" panose="020B0503020204020204" pitchFamily="34" charset="-120"/>
               </a:rPr>
               <a:t>测试+量规客观</a:t>
             </a:r>
@@ -9763,13 +9534,12 @@
             <a:avLst/>
           </a:prstGeom>
           <a:noFill/>
-          <a:ln/>
-        </p:spPr>
-        <p:txBody>
-          <a:bodyPr wrap="square" rtlCol="0" anchor="ctr"/>
-          <a:lstStyle/>
-          <a:p>
-            <a:pPr algn="ctr" indent="0" marL="0">
+        </p:spPr>
+        <p:txBody>
+          <a:bodyPr wrap="square" rtlCol="0" anchor="ctr"/>
+          <a:lstStyle/>
+          <a:p>
+            <a:pPr marL="0" indent="0" algn="ctr">
               <a:buNone/>
             </a:pPr>
             <a:r>
@@ -9777,9 +9547,9 @@
                 <a:solidFill>
                   <a:srgbClr val="F8FAFC"/>
                 </a:solidFill>
-                <a:latin typeface="Microsoft YaHei" pitchFamily="34" charset="0"/>
-                <a:ea typeface="Microsoft YaHei" pitchFamily="34" charset="-122"/>
-                <a:cs typeface="Microsoft YaHei" pitchFamily="34" charset="-120"/>
+                <a:latin typeface="微软雅黑" panose="020B0503020204020204" pitchFamily="34" charset="-122"/>
+                <a:ea typeface="微软雅黑" panose="020B0503020204020204" pitchFamily="34" charset="-122"/>
+                <a:cs typeface="微软雅黑" panose="020B0503020204020204" pitchFamily="34" charset="-120"/>
               </a:rPr>
               <a:t>解释</a:t>
             </a:r>
@@ -9827,13 +9597,12 @@
             <a:avLst/>
           </a:prstGeom>
           <a:noFill/>
-          <a:ln/>
-        </p:spPr>
-        <p:txBody>
-          <a:bodyPr wrap="square" rtlCol="0" anchor="ctr"/>
-          <a:lstStyle/>
-          <a:p>
-            <a:pPr algn="ctr" indent="0" marL="0">
+        </p:spPr>
+        <p:txBody>
+          <a:bodyPr wrap="square" rtlCol="0" anchor="ctr"/>
+          <a:lstStyle/>
+          <a:p>
+            <a:pPr marL="0" indent="0" algn="ctr">
               <a:buNone/>
             </a:pPr>
             <a:r>
@@ -9841,9 +9610,9 @@
                 <a:solidFill>
                   <a:srgbClr val="F8FAFC"/>
                 </a:solidFill>
-                <a:latin typeface="Microsoft YaHei" pitchFamily="34" charset="0"/>
-                <a:ea typeface="Microsoft YaHei" pitchFamily="34" charset="-122"/>
-                <a:cs typeface="Microsoft YaHei" pitchFamily="34" charset="-120"/>
+                <a:latin typeface="微软雅黑" panose="020B0503020204020204" pitchFamily="34" charset="-122"/>
+                <a:ea typeface="微软雅黑" panose="020B0503020204020204" pitchFamily="34" charset="-122"/>
+                <a:cs typeface="微软雅黑" panose="020B0503020204020204" pitchFamily="34" charset="-120"/>
               </a:rPr>
               <a:t>易幻觉</a:t>
             </a:r>
@@ -9891,13 +9660,12 @@
             <a:avLst/>
           </a:prstGeom>
           <a:noFill/>
-          <a:ln/>
-        </p:spPr>
-        <p:txBody>
-          <a:bodyPr wrap="square" rtlCol="0" anchor="ctr"/>
-          <a:lstStyle/>
-          <a:p>
-            <a:pPr algn="ctr" indent="0" marL="0">
+        </p:spPr>
+        <p:txBody>
+          <a:bodyPr wrap="square" rtlCol="0" anchor="ctr"/>
+          <a:lstStyle/>
+          <a:p>
+            <a:pPr marL="0" indent="0" algn="ctr">
               <a:buNone/>
             </a:pPr>
             <a:r>
@@ -9905,9 +9673,9 @@
                 <a:solidFill>
                   <a:srgbClr val="F8FAFC"/>
                 </a:solidFill>
-                <a:latin typeface="Microsoft YaHei" pitchFamily="34" charset="0"/>
-                <a:ea typeface="Microsoft YaHei" pitchFamily="34" charset="-122"/>
-                <a:cs typeface="Microsoft YaHei" pitchFamily="34" charset="-120"/>
+                <a:latin typeface="微软雅黑" panose="020B0503020204020204" pitchFamily="34" charset="-122"/>
+                <a:ea typeface="微软雅黑" panose="020B0503020204020204" pitchFamily="34" charset="-122"/>
+                <a:cs typeface="微软雅黑" panose="020B0503020204020204" pitchFamily="34" charset="-120"/>
               </a:rPr>
               <a:t>通常缺失</a:t>
             </a:r>
@@ -9955,13 +9723,12 @@
             <a:avLst/>
           </a:prstGeom>
           <a:noFill/>
-          <a:ln/>
-        </p:spPr>
-        <p:txBody>
-          <a:bodyPr wrap="square" rtlCol="0" anchor="ctr"/>
-          <a:lstStyle/>
-          <a:p>
-            <a:pPr algn="ctr" indent="0" marL="0">
+        </p:spPr>
+        <p:txBody>
+          <a:bodyPr wrap="square" rtlCol="0" anchor="ctr"/>
+          <a:lstStyle/>
+          <a:p>
+            <a:pPr marL="0" indent="0" algn="ctr">
               <a:buNone/>
             </a:pPr>
             <a:r>
@@ -9969,9 +9736,9 @@
                 <a:solidFill>
                   <a:srgbClr val="34D399"/>
                 </a:solidFill>
-                <a:latin typeface="Microsoft YaHei" pitchFamily="34" charset="0"/>
-                <a:ea typeface="Microsoft YaHei" pitchFamily="34" charset="-122"/>
-                <a:cs typeface="Microsoft YaHei" pitchFamily="34" charset="-120"/>
+                <a:latin typeface="微软雅黑" panose="020B0503020204020204" pitchFamily="34" charset="-122"/>
+                <a:ea typeface="微软雅黑" panose="020B0503020204020204" pitchFamily="34" charset="-122"/>
+                <a:cs typeface="微软雅黑" panose="020B0503020204020204" pitchFamily="34" charset="-120"/>
               </a:rPr>
               <a:t>受证据约束</a:t>
             </a:r>
@@ -10019,13 +9786,12 @@
             <a:avLst/>
           </a:prstGeom>
           <a:noFill/>
-          <a:ln/>
-        </p:spPr>
-        <p:txBody>
-          <a:bodyPr wrap="square" rtlCol="0" anchor="ctr"/>
-          <a:lstStyle/>
-          <a:p>
-            <a:pPr algn="ctr" indent="0" marL="0">
+        </p:spPr>
+        <p:txBody>
+          <a:bodyPr wrap="square" rtlCol="0" anchor="ctr"/>
+          <a:lstStyle/>
+          <a:p>
+            <a:pPr marL="0" indent="0" algn="ctr">
               <a:buNone/>
             </a:pPr>
             <a:r>
@@ -10033,9 +9799,9 @@
                 <a:solidFill>
                   <a:srgbClr val="F8FAFC"/>
                 </a:solidFill>
-                <a:latin typeface="Microsoft YaHei" pitchFamily="34" charset="0"/>
-                <a:ea typeface="Microsoft YaHei" pitchFamily="34" charset="-122"/>
-                <a:cs typeface="Microsoft YaHei" pitchFamily="34" charset="-120"/>
+                <a:latin typeface="微软雅黑" panose="020B0503020204020204" pitchFamily="34" charset="-122"/>
+                <a:ea typeface="微软雅黑" panose="020B0503020204020204" pitchFamily="34" charset="-122"/>
+                <a:cs typeface="微软雅黑" panose="020B0503020204020204" pitchFamily="34" charset="-120"/>
               </a:rPr>
               <a:t>下一动作</a:t>
             </a:r>
@@ -10083,13 +9849,12 @@
             <a:avLst/>
           </a:prstGeom>
           <a:noFill/>
-          <a:ln/>
-        </p:spPr>
-        <p:txBody>
-          <a:bodyPr wrap="square" rtlCol="0" anchor="ctr"/>
-          <a:lstStyle/>
-          <a:p>
-            <a:pPr algn="ctr" indent="0" marL="0">
+        </p:spPr>
+        <p:txBody>
+          <a:bodyPr wrap="square" rtlCol="0" anchor="ctr"/>
+          <a:lstStyle/>
+          <a:p>
+            <a:pPr marL="0" indent="0" algn="ctr">
               <a:buNone/>
             </a:pPr>
             <a:r>
@@ -10097,9 +9862,9 @@
                 <a:solidFill>
                   <a:srgbClr val="F8FAFC"/>
                 </a:solidFill>
-                <a:latin typeface="Microsoft YaHei" pitchFamily="34" charset="0"/>
-                <a:ea typeface="Microsoft YaHei" pitchFamily="34" charset="-122"/>
-                <a:cs typeface="Microsoft YaHei" pitchFamily="34" charset="-120"/>
+                <a:latin typeface="微软雅黑" panose="020B0503020204020204" pitchFamily="34" charset="-122"/>
+                <a:ea typeface="微软雅黑" panose="020B0503020204020204" pitchFamily="34" charset="-122"/>
+                <a:cs typeface="微软雅黑" panose="020B0503020204020204" pitchFamily="34" charset="-120"/>
               </a:rPr>
               <a:t>泛化建议</a:t>
             </a:r>
@@ -10147,13 +9912,12 @@
             <a:avLst/>
           </a:prstGeom>
           <a:noFill/>
-          <a:ln/>
-        </p:spPr>
-        <p:txBody>
-          <a:bodyPr wrap="square" rtlCol="0" anchor="ctr"/>
-          <a:lstStyle/>
-          <a:p>
-            <a:pPr algn="ctr" indent="0" marL="0">
+        </p:spPr>
+        <p:txBody>
+          <a:bodyPr wrap="square" rtlCol="0" anchor="ctr"/>
+          <a:lstStyle/>
+          <a:p>
+            <a:pPr marL="0" indent="0" algn="ctr">
               <a:buNone/>
             </a:pPr>
             <a:r>
@@ -10161,9 +9925,9 @@
                 <a:solidFill>
                   <a:srgbClr val="F8FAFC"/>
                 </a:solidFill>
-                <a:latin typeface="Microsoft YaHei" pitchFamily="34" charset="0"/>
-                <a:ea typeface="Microsoft YaHei" pitchFamily="34" charset="-122"/>
-                <a:cs typeface="Microsoft YaHei" pitchFamily="34" charset="-120"/>
+                <a:latin typeface="微软雅黑" panose="020B0503020204020204" pitchFamily="34" charset="-122"/>
+                <a:ea typeface="微软雅黑" panose="020B0503020204020204" pitchFamily="34" charset="-122"/>
+                <a:cs typeface="微软雅黑" panose="020B0503020204020204" pitchFamily="34" charset="-120"/>
               </a:rPr>
               <a:t>无</a:t>
             </a:r>
@@ -10211,13 +9975,12 @@
             <a:avLst/>
           </a:prstGeom>
           <a:noFill/>
-          <a:ln/>
-        </p:spPr>
-        <p:txBody>
-          <a:bodyPr wrap="square" rtlCol="0" anchor="ctr"/>
-          <a:lstStyle/>
-          <a:p>
-            <a:pPr algn="ctr" indent="0" marL="0">
+        </p:spPr>
+        <p:txBody>
+          <a:bodyPr wrap="square" rtlCol="0" anchor="ctr"/>
+          <a:lstStyle/>
+          <a:p>
+            <a:pPr marL="0" indent="0" algn="ctr">
               <a:buNone/>
             </a:pPr>
             <a:r>
@@ -10225,9 +9988,9 @@
                 <a:solidFill>
                   <a:srgbClr val="34D399"/>
                 </a:solidFill>
-                <a:latin typeface="Microsoft YaHei" pitchFamily="34" charset="0"/>
-                <a:ea typeface="Microsoft YaHei" pitchFamily="34" charset="-122"/>
-                <a:cs typeface="Microsoft YaHei" pitchFamily="34" charset="-120"/>
+                <a:latin typeface="微软雅黑" panose="020B0503020204020204" pitchFamily="34" charset="-122"/>
+                <a:ea typeface="微软雅黑" panose="020B0503020204020204" pitchFamily="34" charset="-122"/>
+                <a:cs typeface="微软雅黑" panose="020B0503020204020204" pitchFamily="34" charset="-120"/>
               </a:rPr>
               <a:t>可验证干预任务</a:t>
             </a:r>
@@ -10275,13 +10038,12 @@
             <a:avLst/>
           </a:prstGeom>
           <a:noFill/>
-          <a:ln/>
-        </p:spPr>
-        <p:txBody>
-          <a:bodyPr wrap="square" rtlCol="0" anchor="ctr"/>
-          <a:lstStyle/>
-          <a:p>
-            <a:pPr algn="ctr" indent="0" marL="0">
+        </p:spPr>
+        <p:txBody>
+          <a:bodyPr wrap="square" rtlCol="0" anchor="ctr"/>
+          <a:lstStyle/>
+          <a:p>
+            <a:pPr marL="0" indent="0" algn="ctr">
               <a:buNone/>
             </a:pPr>
             <a:r>
@@ -10289,9 +10051,9 @@
                 <a:solidFill>
                   <a:srgbClr val="F8FAFC"/>
                 </a:solidFill>
-                <a:latin typeface="Microsoft YaHei" pitchFamily="34" charset="0"/>
-                <a:ea typeface="Microsoft YaHei" pitchFamily="34" charset="-122"/>
-                <a:cs typeface="Microsoft YaHei" pitchFamily="34" charset="-120"/>
+                <a:latin typeface="微软雅黑" panose="020B0503020204020204" pitchFamily="34" charset="-122"/>
+                <a:ea typeface="微软雅黑" panose="020B0503020204020204" pitchFamily="34" charset="-122"/>
+                <a:cs typeface="微软雅黑" panose="020B0503020204020204" pitchFamily="34" charset="-120"/>
               </a:rPr>
               <a:t>教师角色</a:t>
             </a:r>
@@ -10339,13 +10101,12 @@
             <a:avLst/>
           </a:prstGeom>
           <a:noFill/>
-          <a:ln/>
-        </p:spPr>
-        <p:txBody>
-          <a:bodyPr wrap="square" rtlCol="0" anchor="ctr"/>
-          <a:lstStyle/>
-          <a:p>
-            <a:pPr algn="ctr" indent="0" marL="0">
+        </p:spPr>
+        <p:txBody>
+          <a:bodyPr wrap="square" rtlCol="0" anchor="ctr"/>
+          <a:lstStyle/>
+          <a:p>
+            <a:pPr marL="0" indent="0" algn="ctr">
               <a:buNone/>
             </a:pPr>
             <a:r>
@@ -10353,9 +10114,9 @@
                 <a:solidFill>
                   <a:srgbClr val="F8FAFC"/>
                 </a:solidFill>
-                <a:latin typeface="Microsoft YaHei" pitchFamily="34" charset="0"/>
-                <a:ea typeface="Microsoft YaHei" pitchFamily="34" charset="-122"/>
-                <a:cs typeface="Microsoft YaHei" pitchFamily="34" charset="-120"/>
+                <a:latin typeface="微软雅黑" panose="020B0503020204020204" pitchFamily="34" charset="-122"/>
+                <a:ea typeface="微软雅黑" panose="020B0503020204020204" pitchFamily="34" charset="-122"/>
+                <a:cs typeface="微软雅黑" panose="020B0503020204020204" pitchFamily="34" charset="-120"/>
               </a:rPr>
               <a:t>旁观</a:t>
             </a:r>
@@ -10403,13 +10164,12 @@
             <a:avLst/>
           </a:prstGeom>
           <a:noFill/>
-          <a:ln/>
-        </p:spPr>
-        <p:txBody>
-          <a:bodyPr wrap="square" rtlCol="0" anchor="ctr"/>
-          <a:lstStyle/>
-          <a:p>
-            <a:pPr algn="ctr" indent="0" marL="0">
+        </p:spPr>
+        <p:txBody>
+          <a:bodyPr wrap="square" rtlCol="0" anchor="ctr"/>
+          <a:lstStyle/>
+          <a:p>
+            <a:pPr marL="0" indent="0" algn="ctr">
               <a:buNone/>
             </a:pPr>
             <a:r>
@@ -10417,9 +10177,9 @@
                 <a:solidFill>
                   <a:srgbClr val="F8FAFC"/>
                 </a:solidFill>
-                <a:latin typeface="Microsoft YaHei" pitchFamily="34" charset="0"/>
-                <a:ea typeface="Microsoft YaHei" pitchFamily="34" charset="-122"/>
-                <a:cs typeface="Microsoft YaHei" pitchFamily="34" charset="-120"/>
+                <a:latin typeface="微软雅黑" panose="020B0503020204020204" pitchFamily="34" charset="-122"/>
+                <a:ea typeface="微软雅黑" panose="020B0503020204020204" pitchFamily="34" charset="-122"/>
+                <a:cs typeface="微软雅黑" panose="020B0503020204020204" pitchFamily="34" charset="-120"/>
               </a:rPr>
               <a:t>看分</a:t>
             </a:r>
@@ -10467,13 +10227,12 @@
             <a:avLst/>
           </a:prstGeom>
           <a:noFill/>
-          <a:ln/>
-        </p:spPr>
-        <p:txBody>
-          <a:bodyPr wrap="square" rtlCol="0" anchor="ctr"/>
-          <a:lstStyle/>
-          <a:p>
-            <a:pPr algn="ctr" indent="0" marL="0">
+        </p:spPr>
+        <p:txBody>
+          <a:bodyPr wrap="square" rtlCol="0" anchor="ctr"/>
+          <a:lstStyle/>
+          <a:p>
+            <a:pPr marL="0" indent="0" algn="ctr">
               <a:buNone/>
             </a:pPr>
             <a:r>
@@ -10481,9 +10240,9 @@
                 <a:solidFill>
                   <a:srgbClr val="34D399"/>
                 </a:solidFill>
-                <a:latin typeface="Microsoft YaHei" pitchFamily="34" charset="0"/>
-                <a:ea typeface="Microsoft YaHei" pitchFamily="34" charset="-122"/>
-                <a:cs typeface="Microsoft YaHei" pitchFamily="34" charset="-120"/>
+                <a:latin typeface="微软雅黑" panose="020B0503020204020204" pitchFamily="34" charset="-122"/>
+                <a:ea typeface="微软雅黑" panose="020B0503020204020204" pitchFamily="34" charset="-122"/>
+                <a:cs typeface="微软雅黑" panose="020B0503020204020204" pitchFamily="34" charset="-120"/>
               </a:rPr>
               <a:t>看证据与干预队列</a:t>
             </a:r>
@@ -10531,13 +10290,12 @@
             <a:avLst/>
           </a:prstGeom>
           <a:noFill/>
-          <a:ln/>
-        </p:spPr>
-        <p:txBody>
-          <a:bodyPr wrap="square" rtlCol="0" anchor="ctr"/>
-          <a:lstStyle/>
-          <a:p>
-            <a:pPr algn="ctr" indent="0" marL="0">
+        </p:spPr>
+        <p:txBody>
+          <a:bodyPr wrap="square" rtlCol="0" anchor="ctr"/>
+          <a:lstStyle/>
+          <a:p>
+            <a:pPr marL="0" indent="0" algn="ctr">
               <a:buNone/>
             </a:pPr>
             <a:r>
@@ -10545,9 +10303,9 @@
                 <a:solidFill>
                   <a:srgbClr val="F8FAFC"/>
                 </a:solidFill>
-                <a:latin typeface="Microsoft YaHei" pitchFamily="34" charset="0"/>
-                <a:ea typeface="Microsoft YaHei" pitchFamily="34" charset="-122"/>
-                <a:cs typeface="Microsoft YaHei" pitchFamily="34" charset="-120"/>
+                <a:latin typeface="微软雅黑" panose="020B0503020204020204" pitchFamily="34" charset="-122"/>
+                <a:ea typeface="微软雅黑" panose="020B0503020204020204" pitchFamily="34" charset="-122"/>
+                <a:cs typeface="微软雅黑" panose="020B0503020204020204" pitchFamily="34" charset="-120"/>
               </a:rPr>
               <a:t>合规边界</a:t>
             </a:r>
@@ -10595,13 +10353,12 @@
             <a:avLst/>
           </a:prstGeom>
           <a:noFill/>
-          <a:ln/>
-        </p:spPr>
-        <p:txBody>
-          <a:bodyPr wrap="square" rtlCol="0" anchor="ctr"/>
-          <a:lstStyle/>
-          <a:p>
-            <a:pPr algn="ctr" indent="0" marL="0">
+        </p:spPr>
+        <p:txBody>
+          <a:bodyPr wrap="square" rtlCol="0" anchor="ctr"/>
+          <a:lstStyle/>
+          <a:p>
+            <a:pPr marL="0" indent="0" algn="ctr">
               <a:buNone/>
             </a:pPr>
             <a:r>
@@ -10609,9 +10366,9 @@
                 <a:solidFill>
                   <a:srgbClr val="F8FAFC"/>
                 </a:solidFill>
-                <a:latin typeface="Microsoft YaHei" pitchFamily="34" charset="0"/>
-                <a:ea typeface="Microsoft YaHei" pitchFamily="34" charset="-122"/>
-                <a:cs typeface="Microsoft YaHei" pitchFamily="34" charset="-120"/>
+                <a:latin typeface="微软雅黑" panose="020B0503020204020204" pitchFamily="34" charset="-122"/>
+                <a:ea typeface="微软雅黑" panose="020B0503020204020204" pitchFamily="34" charset="-122"/>
+                <a:cs typeface="微软雅黑" panose="020B0503020204020204" pitchFamily="34" charset="-120"/>
               </a:rPr>
               <a:t>模糊</a:t>
             </a:r>
@@ -10659,13 +10416,12 @@
             <a:avLst/>
           </a:prstGeom>
           <a:noFill/>
-          <a:ln/>
-        </p:spPr>
-        <p:txBody>
-          <a:bodyPr wrap="square" rtlCol="0" anchor="ctr"/>
-          <a:lstStyle/>
-          <a:p>
-            <a:pPr algn="ctr" indent="0" marL="0">
+        </p:spPr>
+        <p:txBody>
+          <a:bodyPr wrap="square" rtlCol="0" anchor="ctr"/>
+          <a:lstStyle/>
+          <a:p>
+            <a:pPr marL="0" indent="0" algn="ctr">
               <a:buNone/>
             </a:pPr>
             <a:r>
@@ -10673,9 +10429,9 @@
                 <a:solidFill>
                   <a:srgbClr val="F8FAFC"/>
                 </a:solidFill>
-                <a:latin typeface="Microsoft YaHei" pitchFamily="34" charset="0"/>
-                <a:ea typeface="Microsoft YaHei" pitchFamily="34" charset="-122"/>
-                <a:cs typeface="Microsoft YaHei" pitchFamily="34" charset="-120"/>
+                <a:latin typeface="微软雅黑" panose="020B0503020204020204" pitchFamily="34" charset="-122"/>
+                <a:ea typeface="微软雅黑" panose="020B0503020204020204" pitchFamily="34" charset="-122"/>
+                <a:cs typeface="微软雅黑" panose="020B0503020204020204" pitchFamily="34" charset="-120"/>
               </a:rPr>
               <a:t>明确但窄</a:t>
             </a:r>
@@ -10723,13 +10479,12 @@
             <a:avLst/>
           </a:prstGeom>
           <a:noFill/>
-          <a:ln/>
-        </p:spPr>
-        <p:txBody>
-          <a:bodyPr wrap="square" rtlCol="0" anchor="ctr"/>
-          <a:lstStyle/>
-          <a:p>
-            <a:pPr algn="ctr" indent="0" marL="0">
+        </p:spPr>
+        <p:txBody>
+          <a:bodyPr wrap="square" rtlCol="0" anchor="ctr"/>
+          <a:lstStyle/>
+          <a:p>
+            <a:pPr marL="0" indent="0" algn="ctr">
               <a:buNone/>
             </a:pPr>
             <a:r>
@@ -10737,9 +10492,9 @@
                 <a:solidFill>
                   <a:srgbClr val="34D399"/>
                 </a:solidFill>
-                <a:latin typeface="Microsoft YaHei" pitchFamily="34" charset="0"/>
-                <a:ea typeface="Microsoft YaHei" pitchFamily="34" charset="-122"/>
-                <a:cs typeface="Microsoft YaHei" pitchFamily="34" charset="-120"/>
+                <a:latin typeface="微软雅黑" panose="020B0503020204020204" pitchFamily="34" charset="-122"/>
+                <a:ea typeface="微软雅黑" panose="020B0503020204020204" pitchFamily="34" charset="-122"/>
+                <a:cs typeface="微软雅黑" panose="020B0503020204020204" pitchFamily="34" charset="-120"/>
               </a:rPr>
               <a:t>明确：模型不改分</a:t>
             </a:r>
@@ -10762,13 +10517,12 @@
             <a:avLst/>
           </a:prstGeom>
           <a:noFill/>
-          <a:ln/>
-        </p:spPr>
-        <p:txBody>
-          <a:bodyPr wrap="square" rtlCol="0" anchor="ctr"/>
-          <a:lstStyle/>
-          <a:p>
-            <a:pPr indent="0" marL="0">
+        </p:spPr>
+        <p:txBody>
+          <a:bodyPr wrap="square" rtlCol="0" anchor="ctr"/>
+          <a:lstStyle/>
+          <a:p>
+            <a:pPr marL="0" indent="0">
               <a:buNone/>
             </a:pPr>
             <a:r>
@@ -10776,9 +10530,9 @@
                 <a:solidFill>
                   <a:srgbClr val="94A3B8"/>
                 </a:solidFill>
-                <a:latin typeface="Microsoft YaHei" pitchFamily="34" charset="0"/>
-                <a:ea typeface="Microsoft YaHei" pitchFamily="34" charset="-122"/>
-                <a:cs typeface="Microsoft YaHei" pitchFamily="34" charset="-120"/>
+                <a:latin typeface="微软雅黑" panose="020B0503020204020204" pitchFamily="34" charset="-122"/>
+                <a:ea typeface="微软雅黑" panose="020B0503020204020204" pitchFamily="34" charset="-122"/>
+                <a:cs typeface="微软雅黑" panose="020B0503020204020204" pitchFamily="34" charset="-120"/>
               </a:rPr>
               <a:t>交付物：README · PRD · 架构 · 合规 · ADR · 质量审查 · 可运行代码</a:t>
             </a:r>
@@ -10801,13 +10555,12 @@
             <a:avLst/>
           </a:prstGeom>
           <a:noFill/>
-          <a:ln/>
-        </p:spPr>
-        <p:txBody>
-          <a:bodyPr wrap="square" rtlCol="0" anchor="ctr"/>
-          <a:lstStyle/>
-          <a:p>
-            <a:pPr indent="0" marL="0">
+        </p:spPr>
+        <p:txBody>
+          <a:bodyPr wrap="square" rtlCol="0" anchor="ctr"/>
+          <a:lstStyle/>
+          <a:p>
+            <a:pPr marL="0" indent="0">
               <a:buNone/>
             </a:pPr>
             <a:r>
@@ -10815,9 +10568,9 @@
                 <a:solidFill>
                   <a:srgbClr val="94A3B8"/>
                 </a:solidFill>
-                <a:latin typeface="Microsoft YaHei" pitchFamily="34" charset="0"/>
-                <a:ea typeface="Microsoft YaHei" pitchFamily="34" charset="-122"/>
-                <a:cs typeface="Microsoft YaHei" pitchFamily="34" charset="-120"/>
+                <a:latin typeface="微软雅黑" panose="020B0503020204020204" pitchFamily="34" charset="-122"/>
+                <a:ea typeface="微软雅黑" panose="020B0503020204020204" pitchFamily="34" charset="-122"/>
+                <a:cs typeface="微软雅黑" panose="020B0503020204020204" pitchFamily="34" charset="-120"/>
               </a:rPr>
               <a:t>EvidenceLoop · GOAI Boundless Agents · AI+教育</a:t>
             </a:r>
@@ -10840,13 +10593,12 @@
             <a:avLst/>
           </a:prstGeom>
           <a:noFill/>
-          <a:ln/>
-        </p:spPr>
-        <p:txBody>
-          <a:bodyPr wrap="square" rtlCol="0" anchor="ctr"/>
-          <a:lstStyle/>
-          <a:p>
-            <a:pPr algn="r" indent="0" marL="0">
+        </p:spPr>
+        <p:txBody>
+          <a:bodyPr wrap="square" rtlCol="0" anchor="ctr"/>
+          <a:lstStyle/>
+          <a:p>
+            <a:pPr marL="0" indent="0" algn="r">
               <a:buNone/>
             </a:pPr>
             <a:r>
@@ -10854,9 +10606,9 @@
                 <a:solidFill>
                   <a:srgbClr val="94A3B8"/>
                 </a:solidFill>
-                <a:latin typeface="Microsoft YaHei" pitchFamily="34" charset="0"/>
-                <a:ea typeface="Microsoft YaHei" pitchFamily="34" charset="-122"/>
-                <a:cs typeface="Microsoft YaHei" pitchFamily="34" charset="-120"/>
+                <a:latin typeface="微软雅黑" panose="020B0503020204020204" pitchFamily="34" charset="-122"/>
+                <a:ea typeface="微软雅黑" panose="020B0503020204020204" pitchFamily="34" charset="-122"/>
+                <a:cs typeface="微软雅黑" panose="020B0503020204020204" pitchFamily="34" charset="-120"/>
               </a:rPr>
               <a:t>9 / 10</a:t>
             </a:r>
@@ -10915,7 +10667,7 @@
     </a:clrScheme>
     <a:fontScheme name="Office">
       <a:majorFont>
-        <a:latin typeface="Calibri Light" panose="020F0302020204030204"/>
+        <a:latin typeface="Calibri Light"/>
         <a:ea typeface=""/>
         <a:cs typeface=""/>
         <a:font script="Jpan" typeface="游ゴシック Light"/>
@@ -10948,26 +10700,9 @@
         <a:font script="Viet" typeface="Times New Roman"/>
         <a:font script="Uigh" typeface="Microsoft Uighur"/>
         <a:font script="Geor" typeface="Sylfaen"/>
-        <a:font script="Armn" typeface="Arial"/>
-        <a:font script="Bugi" typeface="Leelawadee UI"/>
-        <a:font script="Bopo" typeface="Microsoft JhengHei"/>
-        <a:font script="Java" typeface="Javanese Text"/>
-        <a:font script="Lisu" typeface="Segoe UI"/>
-        <a:font script="Mymr" typeface="Myanmar Text"/>
-        <a:font script="Nkoo" typeface="Ebrima"/>
-        <a:font script="Olck" typeface="Nirmala UI"/>
-        <a:font script="Osma" typeface="Ebrima"/>
-        <a:font script="Phag" typeface="Phagspa"/>
-        <a:font script="Syrn" typeface="Estrangelo Edessa"/>
-        <a:font script="Syrj" typeface="Estrangelo Edessa"/>
-        <a:font script="Syre" typeface="Estrangelo Edessa"/>
-        <a:font script="Sora" typeface="Nirmala UI"/>
-        <a:font script="Tale" typeface="Microsoft Tai Le"/>
-        <a:font script="Talu" typeface="Microsoft New Tai Lue"/>
-        <a:font script="Tfng" typeface="Ebrima"/>
       </a:majorFont>
       <a:minorFont>
-        <a:latin typeface="Calibri" panose="020F0502020204030204"/>
+        <a:latin typeface="Calibri"/>
         <a:ea typeface=""/>
         <a:cs typeface=""/>
         <a:font script="Jpan" typeface="游ゴシック"/>
@@ -11000,23 +10735,6 @@
         <a:font script="Viet" typeface="Arial"/>
         <a:font script="Uigh" typeface="Microsoft Uighur"/>
         <a:font script="Geor" typeface="Sylfaen"/>
-        <a:font script="Armn" typeface="Arial"/>
-        <a:font script="Bugi" typeface="Leelawadee UI"/>
-        <a:font script="Bopo" typeface="Microsoft JhengHei"/>
-        <a:font script="Java" typeface="Javanese Text"/>
-        <a:font script="Lisu" typeface="Segoe UI"/>
-        <a:font script="Mymr" typeface="Myanmar Text"/>
-        <a:font script="Nkoo" typeface="Ebrima"/>
-        <a:font script="Olck" typeface="Nirmala UI"/>
-        <a:font script="Osma" typeface="Ebrima"/>
-        <a:font script="Phag" typeface="Phagspa"/>
-        <a:font script="Syrn" typeface="Estrangelo Edessa"/>
-        <a:font script="Syrj" typeface="Estrangelo Edessa"/>
-        <a:font script="Syre" typeface="Estrangelo Edessa"/>
-        <a:font script="Sora" typeface="Nirmala UI"/>
-        <a:font script="Tale" typeface="Microsoft Tai Le"/>
-        <a:font script="Talu" typeface="Microsoft New Tai Lue"/>
-        <a:font script="Tfng" typeface="Ebrima"/>
       </a:minorFont>
     </a:fontScheme>
     <a:fmtScheme name="Office">
@@ -11157,8 +10875,265 @@
       </a:bgFillStyleLst>
     </a:fmtScheme>
   </a:themeElements>
-  <a:objectDefaults/>
-  <a:extraClrSchemeLst/>
+  <a:extLst>
+    <a:ext uri="{05A4C25C-085E-4340-85A3-A5531E510DB2}">
+      <thm15:themeFamily xmlns:thm15="http://schemas.microsoft.com/office/thememl/2012/main" name="Office Theme" id="{62F939B6-93AF-4DB8-9C6B-D6C7DFDC589F}" vid="{4A3C46E8-61CC-4603-A589-7422A47A8E4A}"/>
+    </a:ext>
+  </a:extLst>
+</a:theme>
+</file>
+
+<file path=ppt/theme/theme2.xml><?xml version="1.0" encoding="utf-8"?>
+<a:theme xmlns:a="http://schemas.openxmlformats.org/drawingml/2006/main" name="Office Theme">
+  <a:themeElements>
+    <a:clrScheme name="Office">
+      <a:dk1>
+        <a:sysClr val="windowText" lastClr="000000"/>
+      </a:dk1>
+      <a:lt1>
+        <a:sysClr val="window" lastClr="FFFFFF"/>
+      </a:lt1>
+      <a:dk2>
+        <a:srgbClr val="44546A"/>
+      </a:dk2>
+      <a:lt2>
+        <a:srgbClr val="E7E6E6"/>
+      </a:lt2>
+      <a:accent1>
+        <a:srgbClr val="4472C4"/>
+      </a:accent1>
+      <a:accent2>
+        <a:srgbClr val="ED7D31"/>
+      </a:accent2>
+      <a:accent3>
+        <a:srgbClr val="A5A5A5"/>
+      </a:accent3>
+      <a:accent4>
+        <a:srgbClr val="FFC000"/>
+      </a:accent4>
+      <a:accent5>
+        <a:srgbClr val="5B9BD5"/>
+      </a:accent5>
+      <a:accent6>
+        <a:srgbClr val="70AD47"/>
+      </a:accent6>
+      <a:hlink>
+        <a:srgbClr val="0563C1"/>
+      </a:hlink>
+      <a:folHlink>
+        <a:srgbClr val="954F72"/>
+      </a:folHlink>
+    </a:clrScheme>
+    <a:fontScheme name="Office">
+      <a:majorFont>
+        <a:latin typeface="Calibri Light"/>
+        <a:ea typeface=""/>
+        <a:cs typeface=""/>
+        <a:font script="Jpan" typeface="游ゴシック Light"/>
+        <a:font script="Hang" typeface="맑은 고딕"/>
+        <a:font script="Hans" typeface="等线 Light"/>
+        <a:font script="Hant" typeface="新細明體"/>
+        <a:font script="Arab" typeface="Times New Roman"/>
+        <a:font script="Hebr" typeface="Times New Roman"/>
+        <a:font script="Thai" typeface="Angsana New"/>
+        <a:font script="Ethi" typeface="Nyala"/>
+        <a:font script="Beng" typeface="Vrinda"/>
+        <a:font script="Gujr" typeface="Shruti"/>
+        <a:font script="Khmr" typeface="MoolBoran"/>
+        <a:font script="Knda" typeface="Tunga"/>
+        <a:font script="Guru" typeface="Raavi"/>
+        <a:font script="Cans" typeface="Euphemia"/>
+        <a:font script="Cher" typeface="Plantagenet Cherokee"/>
+        <a:font script="Yiii" typeface="Microsoft Yi Baiti"/>
+        <a:font script="Tibt" typeface="Microsoft Himalaya"/>
+        <a:font script="Thaa" typeface="MV Boli"/>
+        <a:font script="Deva" typeface="Mangal"/>
+        <a:font script="Telu" typeface="Gautami"/>
+        <a:font script="Taml" typeface="Latha"/>
+        <a:font script="Syrc" typeface="Estrangelo Edessa"/>
+        <a:font script="Orya" typeface="Kalinga"/>
+        <a:font script="Mlym" typeface="Kartika"/>
+        <a:font script="Laoo" typeface="DokChampa"/>
+        <a:font script="Sinh" typeface="Iskoola Pota"/>
+        <a:font script="Mong" typeface="Mongolian Baiti"/>
+        <a:font script="Viet" typeface="Times New Roman"/>
+        <a:font script="Uigh" typeface="Microsoft Uighur"/>
+        <a:font script="Geor" typeface="Sylfaen"/>
+      </a:majorFont>
+      <a:minorFont>
+        <a:latin typeface="Calibri"/>
+        <a:ea typeface=""/>
+        <a:cs typeface=""/>
+        <a:font script="Jpan" typeface="游ゴシック"/>
+        <a:font script="Hang" typeface="맑은 고딕"/>
+        <a:font script="Hans" typeface="等线"/>
+        <a:font script="Hant" typeface="新細明體"/>
+        <a:font script="Arab" typeface="Arial"/>
+        <a:font script="Hebr" typeface="Arial"/>
+        <a:font script="Thai" typeface="Cordia New"/>
+        <a:font script="Ethi" typeface="Nyala"/>
+        <a:font script="Beng" typeface="Vrinda"/>
+        <a:font script="Gujr" typeface="Shruti"/>
+        <a:font script="Khmr" typeface="DaunPenh"/>
+        <a:font script="Knda" typeface="Tunga"/>
+        <a:font script="Guru" typeface="Raavi"/>
+        <a:font script="Cans" typeface="Euphemia"/>
+        <a:font script="Cher" typeface="Plantagenet Cherokee"/>
+        <a:font script="Yiii" typeface="Microsoft Yi Baiti"/>
+        <a:font script="Tibt" typeface="Microsoft Himalaya"/>
+        <a:font script="Thaa" typeface="MV Boli"/>
+        <a:font script="Deva" typeface="Mangal"/>
+        <a:font script="Telu" typeface="Gautami"/>
+        <a:font script="Taml" typeface="Latha"/>
+        <a:font script="Syrc" typeface="Estrangelo Edessa"/>
+        <a:font script="Orya" typeface="Kalinga"/>
+        <a:font script="Mlym" typeface="Kartika"/>
+        <a:font script="Laoo" typeface="DokChampa"/>
+        <a:font script="Sinh" typeface="Iskoola Pota"/>
+        <a:font script="Mong" typeface="Mongolian Baiti"/>
+        <a:font script="Viet" typeface="Arial"/>
+        <a:font script="Uigh" typeface="Microsoft Uighur"/>
+        <a:font script="Geor" typeface="Sylfaen"/>
+      </a:minorFont>
+    </a:fontScheme>
+    <a:fmtScheme name="Office">
+      <a:fillStyleLst>
+        <a:solidFill>
+          <a:schemeClr val="phClr"/>
+        </a:solidFill>
+        <a:gradFill rotWithShape="1">
+          <a:gsLst>
+            <a:gs pos="0">
+              <a:schemeClr val="phClr">
+                <a:lumMod val="110000"/>
+                <a:satMod val="105000"/>
+                <a:tint val="67000"/>
+              </a:schemeClr>
+            </a:gs>
+            <a:gs pos="50000">
+              <a:schemeClr val="phClr">
+                <a:lumMod val="105000"/>
+                <a:satMod val="103000"/>
+                <a:tint val="73000"/>
+              </a:schemeClr>
+            </a:gs>
+            <a:gs pos="100000">
+              <a:schemeClr val="phClr">
+                <a:lumMod val="105000"/>
+                <a:satMod val="109000"/>
+                <a:tint val="81000"/>
+              </a:schemeClr>
+            </a:gs>
+          </a:gsLst>
+          <a:lin ang="5400000" scaled="0"/>
+        </a:gradFill>
+        <a:gradFill rotWithShape="1">
+          <a:gsLst>
+            <a:gs pos="0">
+              <a:schemeClr val="phClr">
+                <a:satMod val="103000"/>
+                <a:lumMod val="102000"/>
+                <a:tint val="94000"/>
+              </a:schemeClr>
+            </a:gs>
+            <a:gs pos="50000">
+              <a:schemeClr val="phClr">
+                <a:satMod val="110000"/>
+                <a:lumMod val="100000"/>
+                <a:shade val="100000"/>
+              </a:schemeClr>
+            </a:gs>
+            <a:gs pos="100000">
+              <a:schemeClr val="phClr">
+                <a:lumMod val="99000"/>
+                <a:satMod val="120000"/>
+                <a:shade val="78000"/>
+              </a:schemeClr>
+            </a:gs>
+          </a:gsLst>
+          <a:lin ang="5400000" scaled="0"/>
+        </a:gradFill>
+      </a:fillStyleLst>
+      <a:lnStyleLst>
+        <a:ln w="6350" cap="flat" cmpd="sng" algn="ctr">
+          <a:solidFill>
+            <a:schemeClr val="phClr"/>
+          </a:solidFill>
+          <a:prstDash val="solid"/>
+          <a:miter lim="800000"/>
+        </a:ln>
+        <a:ln w="12700" cap="flat" cmpd="sng" algn="ctr">
+          <a:solidFill>
+            <a:schemeClr val="phClr"/>
+          </a:solidFill>
+          <a:prstDash val="solid"/>
+          <a:miter lim="800000"/>
+        </a:ln>
+        <a:ln w="19050" cap="flat" cmpd="sng" algn="ctr">
+          <a:solidFill>
+            <a:schemeClr val="phClr"/>
+          </a:solidFill>
+          <a:prstDash val="solid"/>
+          <a:miter lim="800000"/>
+        </a:ln>
+      </a:lnStyleLst>
+      <a:effectStyleLst>
+        <a:effectStyle>
+          <a:effectLst/>
+        </a:effectStyle>
+        <a:effectStyle>
+          <a:effectLst/>
+        </a:effectStyle>
+        <a:effectStyle>
+          <a:effectLst>
+            <a:outerShdw blurRad="57150" dist="19050" dir="5400000" algn="ctr" rotWithShape="0">
+              <a:srgbClr val="000000">
+                <a:alpha val="63000"/>
+              </a:srgbClr>
+            </a:outerShdw>
+          </a:effectLst>
+        </a:effectStyle>
+      </a:effectStyleLst>
+      <a:bgFillStyleLst>
+        <a:solidFill>
+          <a:schemeClr val="phClr"/>
+        </a:solidFill>
+        <a:solidFill>
+          <a:schemeClr val="phClr">
+            <a:tint val="95000"/>
+            <a:satMod val="170000"/>
+          </a:schemeClr>
+        </a:solidFill>
+        <a:gradFill rotWithShape="1">
+          <a:gsLst>
+            <a:gs pos="0">
+              <a:schemeClr val="phClr">
+                <a:tint val="93000"/>
+                <a:satMod val="150000"/>
+                <a:shade val="98000"/>
+                <a:lumMod val="102000"/>
+              </a:schemeClr>
+            </a:gs>
+            <a:gs pos="50000">
+              <a:schemeClr val="phClr">
+                <a:tint val="98000"/>
+                <a:satMod val="130000"/>
+                <a:shade val="90000"/>
+                <a:lumMod val="103000"/>
+              </a:schemeClr>
+            </a:gs>
+            <a:gs pos="100000">
+              <a:schemeClr val="phClr">
+                <a:shade val="63000"/>
+                <a:satMod val="120000"/>
+              </a:schemeClr>
+            </a:gs>
+          </a:gsLst>
+          <a:lin ang="5400000" scaled="0"/>
+        </a:gradFill>
+      </a:bgFillStyleLst>
+    </a:fmtScheme>
+  </a:themeElements>
   <a:extLst>
     <a:ext uri="{05A4C25C-085E-4340-85A3-A5531E510DB2}">
       <thm15:themeFamily xmlns:thm15="http://schemas.microsoft.com/office/thememl/2012/main" name="Office Theme" id="{62F939B6-93AF-4DB8-9C6B-D6C7DFDC589F}" vid="{4A3C46E8-61CC-4603-A589-7422A47A8E4A}"/>

--- a/docs/EvidenceRing-初赛路演.pptx
+++ b/docs/EvidenceRing-初赛路演.pptx
@@ -18,6 +18,7 @@
     <p:sldId id="263" r:id="rId11"/>
     <p:sldId id="264" r:id="rId12"/>
     <p:sldId id="265" r:id="rId13"/>
+    <p:sldId id="266" r:id="rId17"/>
   </p:sldIdLst>
   <p:sldSz cx="12191365" cy="6858000"/>
   <p:notesSz cx="6858000" cy="12191365"/>
@@ -3074,7 +3075,7 @@
                 <a:ea typeface="Consolas" panose="020B0609020204030204" pitchFamily="34" charset="-122"/>
                 <a:cs typeface="Consolas" panose="020B0609020204030204" pitchFamily="34" charset="-120"/>
               </a:rPr>
-              <a:t>本地演示：cd D:\code_space\evidence-loop  →  npm run dev  →  http://localhost:4173</a:t>
+              <a:t>本地演示：cd D:\code_space\evidence-loop  →  npm run dev  →  http://localhost:5280</a:t>
             </a:r>
             <a:endParaRPr lang="en-US" sz="1300" dirty="0"/>
           </a:p>
@@ -3112,7 +3113,7 @@
                 <a:ea typeface="微软雅黑" panose="020B0503020204020204" pitchFamily="34" charset="-122"/>
                 <a:cs typeface="微软雅黑" panose="020B0503020204020204" pitchFamily="34" charset="-120"/>
               </a:rPr>
-              <a:t>EvidenceLoop · GOAI Boundless Agents · AI+教育</a:t>
+              <a:t>EvidenceRing · GOAI Boundless Agents · AI+教育</a:t>
             </a:r>
             <a:endParaRPr lang="en-US" sz="1100" dirty="0"/>
           </a:p>
@@ -3150,7 +3151,1010 @@
                 <a:ea typeface="微软雅黑" panose="020B0503020204020204" pitchFamily="34" charset="-122"/>
                 <a:cs typeface="微软雅黑" panose="020B0503020204020204" pitchFamily="34" charset="-120"/>
               </a:rPr>
-              <a:t>10 / 10</a:t>
+              <a:t>10 / 11</a:t>
+            </a:r>
+            <a:endParaRPr lang="en-US" sz="1100" dirty="0"/>
+          </a:p>
+        </p:txBody>
+      </p:sp>
+    </p:spTree>
+  </p:cSld>
+  <p:clrMapOvr>
+    <a:masterClrMapping/>
+  </p:clrMapOvr>
+</p:sld>
+</file>
+
+<file path=ppt/slides/slide11.xml><?xml version="1.0" encoding="utf-8"?>
+<p:sld xmlns:a="http://schemas.openxmlformats.org/drawingml/2006/main" xmlns:r="http://schemas.openxmlformats.org/officeDocument/2006/relationships" xmlns:p="http://schemas.openxmlformats.org/presentationml/2006/main">
+  <p:cSld>
+    <p:spTree>
+      <p:nvGrpSpPr>
+        <p:cNvPr id="1" name=""/>
+        <p:cNvGrpSpPr/>
+        <p:nvPr/>
+      </p:nvGrpSpPr>
+      <p:grpSpPr>
+        <a:xfrm>
+          <a:off x="0" y="0"/>
+          <a:ext cx="0" cy="0"/>
+          <a:chOff x="0" y="0"/>
+          <a:chExt cx="0" cy="0"/>
+        </a:xfrm>
+      </p:grpSpPr>
+      <p:sp>
+        <p:nvSpPr>
+          <p:cNvPr id="2" name="Shape 0"/>
+          <p:cNvSpPr/>
+          <p:nvPr/>
+        </p:nvSpPr>
+        <p:spPr>
+          <a:xfrm>
+            <a:off x="0" y="0"/>
+            <a:ext cx="12191695" cy="6858000"/>
+          </a:xfrm>
+          <a:prstGeom prst="rect">
+            <a:avLst/>
+          </a:prstGeom>
+          <a:solidFill>
+            <a:srgbClr val="0B1220"/>
+          </a:solidFill>
+          <a:ln w="12700">
+            <a:solidFill>
+              <a:srgbClr val="0B1220"/>
+            </a:solidFill>
+            <a:prstDash val="solid"/>
+          </a:ln>
+        </p:spPr>
+      </p:sp>
+      <p:sp>
+        <p:nvSpPr>
+          <p:cNvPr id="3" name="Shape 1"/>
+          <p:cNvSpPr/>
+          <p:nvPr/>
+        </p:nvSpPr>
+        <p:spPr>
+          <a:xfrm>
+            <a:off x="0" y="0"/>
+            <a:ext cx="12191695" cy="73152"/>
+          </a:xfrm>
+          <a:prstGeom prst="rect">
+            <a:avLst/>
+          </a:prstGeom>
+          <a:solidFill>
+            <a:srgbClr val="22D3EE"/>
+          </a:solidFill>
+          <a:ln w="12700">
+            <a:solidFill>
+              <a:srgbClr val="22D3EE"/>
+            </a:solidFill>
+            <a:prstDash val="solid"/>
+          </a:ln>
+        </p:spPr>
+      </p:sp>
+      <p:sp>
+        <p:nvSpPr>
+          <p:cNvPr id="4" name="Text 2"/>
+          <p:cNvSpPr/>
+          <p:nvPr/>
+        </p:nvSpPr>
+        <p:spPr>
+          <a:xfrm>
+            <a:off x="502920" y="256032"/>
+            <a:ext cx="11155680" cy="502920"/>
+          </a:xfrm>
+          <a:prstGeom prst="rect">
+            <a:avLst/>
+          </a:prstGeom>
+          <a:noFill/>
+        </p:spPr>
+        <p:txBody>
+          <a:bodyPr wrap="square" rtlCol="0" anchor="ctr"/>
+          <a:lstStyle/>
+          <a:p>
+            <a:pPr marL="0" indent="0">
+              <a:buNone/>
+            </a:pPr>
+            <a:r>
+              <a:rPr lang="en-US" sz="2800" b="1" dirty="0">
+                <a:solidFill>
+                  <a:srgbClr val="F8FAFC"/>
+                </a:solidFill>
+                <a:latin typeface="微软雅黑" panose="020B0503020204020204" pitchFamily="34" charset="-122"/>
+                <a:ea typeface="微软雅黑" panose="020B0503020204020204" pitchFamily="34" charset="-122"/>
+                <a:cs typeface="微软雅黑" panose="020B0503020204020204" pitchFamily="34" charset="-120"/>
+              </a:rPr>
+              <a:t>已交付能力（2026-08-14）</a:t>
+            </a:r>
+            <a:endParaRPr lang="en-US" sz="2800" dirty="0"/>
+          </a:p>
+        </p:txBody>
+      </p:sp>
+      <p:sp>
+        <p:nvSpPr>
+          <p:cNvPr id="5" name="Text 3"/>
+          <p:cNvSpPr/>
+          <p:nvPr/>
+        </p:nvSpPr>
+        <p:spPr>
+          <a:xfrm>
+            <a:off x="502920" y="749808"/>
+            <a:ext cx="11155680" cy="320040"/>
+          </a:xfrm>
+          <a:prstGeom prst="rect">
+            <a:avLst/>
+          </a:prstGeom>
+          <a:noFill/>
+        </p:spPr>
+        <p:txBody>
+          <a:bodyPr wrap="square" rtlCol="0" anchor="ctr"/>
+          <a:lstStyle/>
+          <a:p>
+            <a:pPr marL="0" indent="0">
+              <a:buNone/>
+            </a:pPr>
+            <a:r>
+              <a:rPr lang="en-US" sz="1400" dirty="0">
+                <a:solidFill>
+                  <a:srgbClr val="94A3B8"/>
+                </a:solidFill>
+                <a:latin typeface="微软雅黑" panose="020B0503020204020204" pitchFamily="34" charset="-122"/>
+                <a:ea typeface="微软雅黑" panose="020B0503020204020204" pitchFamily="34" charset="-122"/>
+                <a:cs typeface="微软雅黑" panose="020B0503020204020204" pitchFamily="34" charset="-120"/>
+              </a:rPr>
+              <a:t>初赛方案已齐备；本页为 8/14 交付快照</a:t>
+            </a:r>
+            <a:endParaRPr lang="en-US" sz="1400" dirty="0"/>
+          </a:p>
+        </p:txBody>
+      </p:sp>
+      <p:sp>
+        <p:nvSpPr>
+          <p:cNvPr id="6" name="Shape 4"/>
+          <p:cNvSpPr/>
+          <p:nvPr/>
+        </p:nvSpPr>
+        <p:spPr>
+          <a:xfrm>
+            <a:off x="457200" y="1371600"/>
+            <a:ext cx="2743200" cy="3017520"/>
+          </a:xfrm>
+          <a:prstGeom prst="roundRect">
+            <a:avLst>
+              <a:gd name="adj" fmla="val 3333"/>
+            </a:avLst>
+          </a:prstGeom>
+          <a:solidFill>
+            <a:srgbClr val="1F2937"/>
+          </a:solidFill>
+          <a:ln w="12700">
+            <a:solidFill>
+              <a:srgbClr val="334155"/>
+            </a:solidFill>
+            <a:prstDash val="solid"/>
+          </a:ln>
+        </p:spPr>
+      </p:sp>
+      <p:sp>
+        <p:nvSpPr>
+          <p:cNvPr id="7" name="Text 5"/>
+          <p:cNvSpPr/>
+          <p:nvPr/>
+        </p:nvSpPr>
+        <p:spPr>
+          <a:xfrm>
+            <a:off x="594360" y="1554480"/>
+            <a:ext cx="2468880" cy="411480"/>
+          </a:xfrm>
+          <a:prstGeom prst="rect">
+            <a:avLst/>
+          </a:prstGeom>
+          <a:noFill/>
+        </p:spPr>
+        <p:txBody>
+          <a:bodyPr wrap="square" rtlCol="0" anchor="ctr"/>
+          <a:lstStyle/>
+          <a:p>
+            <a:pPr marL="0" indent="0" algn="ctr">
+              <a:buNone/>
+            </a:pPr>
+            <a:r>
+              <a:rPr lang="en-US" sz="2000" b="1" dirty="0">
+                <a:solidFill>
+                  <a:srgbClr val="22D3EE"/>
+                </a:solidFill>
+                <a:latin typeface="微软雅黑" panose="020B0503020204020204" pitchFamily="34" charset="-122"/>
+                <a:ea typeface="微软雅黑" panose="020B0503020204020204" pitchFamily="34" charset="-122"/>
+                <a:cs typeface="微软雅黑" panose="020B0503020204020204" pitchFamily="34" charset="-120"/>
+              </a:rPr>
+              <a:t>核心闭环</a:t>
+            </a:r>
+            <a:endParaRPr lang="en-US" sz="2000" dirty="0"/>
+          </a:p>
+        </p:txBody>
+      </p:sp>
+      <p:sp>
+        <p:nvSpPr>
+          <p:cNvPr id="8" name="Text 6"/>
+          <p:cNvSpPr/>
+          <p:nvPr/>
+        </p:nvSpPr>
+        <p:spPr>
+          <a:xfrm>
+            <a:off x="594360" y="2011680"/>
+            <a:ext cx="2468880" cy="320040"/>
+          </a:xfrm>
+          <a:prstGeom prst="rect">
+            <a:avLst/>
+          </a:prstGeom>
+          <a:noFill/>
+        </p:spPr>
+        <p:txBody>
+          <a:bodyPr wrap="square" rtlCol="0" anchor="ctr"/>
+          <a:lstStyle/>
+          <a:p>
+            <a:pPr marL="0" indent="0" algn="ctr">
+              <a:buNone/>
+            </a:pPr>
+            <a:r>
+              <a:rPr lang="en-US" sz="1300" dirty="0">
+                <a:solidFill>
+                  <a:srgbClr val="94A3B8"/>
+                </a:solidFill>
+                <a:latin typeface="微软雅黑" panose="020B0503020204020204" pitchFamily="34" charset="-122"/>
+                <a:ea typeface="微软雅黑" panose="020B0503020204020204" pitchFamily="34" charset="-122"/>
+                <a:cs typeface="微软雅黑" panose="020B0503020204020204" pitchFamily="34" charset="-120"/>
+              </a:rPr>
+              <a:t/>
+            </a:r>
+            <a:endParaRPr lang="en-US" sz="1300" dirty="0"/>
+          </a:p>
+        </p:txBody>
+      </p:sp>
+      <p:sp>
+        <p:nvSpPr>
+          <p:cNvPr id="9" name="Text 7"/>
+          <p:cNvSpPr/>
+          <p:nvPr/>
+        </p:nvSpPr>
+        <p:spPr>
+          <a:xfrm>
+            <a:off x="640080" y="2560320"/>
+            <a:ext cx="2377440" cy="1463040"/>
+          </a:xfrm>
+          <a:prstGeom prst="rect">
+            <a:avLst/>
+          </a:prstGeom>
+          <a:noFill/>
+        </p:spPr>
+        <p:txBody>
+          <a:bodyPr wrap="square" rtlCol="0" anchor="ctr"/>
+          <a:lstStyle/>
+          <a:p>
+            <a:pPr marL="0" indent="0" algn="ctr">
+              <a:buNone/>
+            </a:pPr>
+            <a:r>
+              <a:rPr lang="en-US" sz="1400" dirty="0">
+                <a:solidFill>
+                  <a:srgbClr val="F8FAFC"/>
+                </a:solidFill>
+                <a:latin typeface="微软雅黑" panose="020B0503020204020204" pitchFamily="34" charset="-122"/>
+                <a:ea typeface="微软雅黑" panose="020B0503020204020204" pitchFamily="34" charset="-122"/>
+                <a:cs typeface="微软雅黑" panose="020B0503020204020204" pitchFamily="34" charset="-120"/>
+              </a:rPr>
+              <a:t>证据打分 · LLM 不改分</a:t>
+            </a:r>
+            <a:endParaRPr lang="en-US" sz="1400" dirty="0"/>
+          </a:p>
+          <a:p>
+            <a:pPr marL="0" indent="0" algn="ctr">
+              <a:buNone/>
+            </a:pPr>
+            <a:r>
+              <a:rPr lang="en-US" sz="1400" dirty="0">
+                <a:solidFill>
+                  <a:srgbClr val="F8FAFC"/>
+                </a:solidFill>
+                <a:latin typeface="微软雅黑" panose="020B0503020204020204" pitchFamily="34" charset="-122"/>
+                <a:ea typeface="微软雅黑" panose="020B0503020204020204" pitchFamily="34" charset="-122"/>
+                <a:cs typeface="微软雅黑" panose="020B0503020204020204" pitchFamily="34" charset="-120"/>
+              </a:rPr>
+              <a:t>练习/测评分流（D1）</a:t>
+            </a:r>
+            <a:endParaRPr lang="en-US" sz="1400" dirty="0"/>
+          </a:p>
+          <a:p>
+            <a:pPr marL="0" indent="0" algn="ctr">
+              <a:buNone/>
+            </a:pPr>
+            <a:r>
+              <a:rPr lang="en-US" sz="1400" dirty="0">
+                <a:solidFill>
+                  <a:srgbClr val="F8FAFC"/>
+                </a:solidFill>
+                <a:latin typeface="微软雅黑" panose="020B0503020204020204" pitchFamily="34" charset="-122"/>
+                <a:ea typeface="微软雅黑" panose="020B0503020204020204" pitchFamily="34" charset="-122"/>
+                <a:cs typeface="微软雅黑" panose="020B0503020204020204" pitchFamily="34" charset="-120"/>
+              </a:rPr>
+              <a:t>教师终裁 + 站内提示</a:t>
+            </a:r>
+            <a:endParaRPr lang="en-US" sz="1400" dirty="0"/>
+          </a:p>
+        </p:txBody>
+      </p:sp>
+      <p:sp>
+        <p:nvSpPr>
+          <p:cNvPr id="10" name="Shape 8"/>
+          <p:cNvSpPr/>
+          <p:nvPr/>
+        </p:nvSpPr>
+        <p:spPr>
+          <a:xfrm>
+            <a:off x="3383280" y="1371600"/>
+            <a:ext cx="2743200" cy="3017520"/>
+          </a:xfrm>
+          <a:prstGeom prst="roundRect">
+            <a:avLst>
+              <a:gd name="adj" fmla="val 3333"/>
+            </a:avLst>
+          </a:prstGeom>
+          <a:solidFill>
+            <a:srgbClr val="1F2937"/>
+          </a:solidFill>
+          <a:ln w="12700">
+            <a:solidFill>
+              <a:srgbClr val="334155"/>
+            </a:solidFill>
+            <a:prstDash val="solid"/>
+          </a:ln>
+        </p:spPr>
+      </p:sp>
+      <p:sp>
+        <p:nvSpPr>
+          <p:cNvPr id="11" name="Text 9"/>
+          <p:cNvSpPr/>
+          <p:nvPr/>
+        </p:nvSpPr>
+        <p:spPr>
+          <a:xfrm>
+            <a:off x="3520440" y="1554480"/>
+            <a:ext cx="2468880" cy="411480"/>
+          </a:xfrm>
+          <a:prstGeom prst="rect">
+            <a:avLst/>
+          </a:prstGeom>
+          <a:noFill/>
+        </p:spPr>
+        <p:txBody>
+          <a:bodyPr wrap="square" rtlCol="0" anchor="ctr"/>
+          <a:lstStyle/>
+          <a:p>
+            <a:pPr marL="0" indent="0" algn="ctr">
+              <a:buNone/>
+            </a:pPr>
+            <a:r>
+              <a:rPr lang="en-US" sz="2000" b="1" dirty="0">
+                <a:solidFill>
+                  <a:srgbClr val="22D3EE"/>
+                </a:solidFill>
+                <a:latin typeface="微软雅黑" panose="020B0503020204020204" pitchFamily="34" charset="-122"/>
+                <a:ea typeface="微软雅黑" panose="020B0503020204020204" pitchFamily="34" charset="-122"/>
+                <a:cs typeface="微软雅黑" panose="020B0503020204020204" pitchFamily="34" charset="-120"/>
+              </a:rPr>
+              <a:t>工程交付</a:t>
+            </a:r>
+            <a:endParaRPr lang="en-US" sz="2000" dirty="0"/>
+          </a:p>
+        </p:txBody>
+      </p:sp>
+      <p:sp>
+        <p:nvSpPr>
+          <p:cNvPr id="12" name="Text 10"/>
+          <p:cNvSpPr/>
+          <p:nvPr/>
+        </p:nvSpPr>
+        <p:spPr>
+          <a:xfrm>
+            <a:off x="3520440" y="2011680"/>
+            <a:ext cx="2468880" cy="320040"/>
+          </a:xfrm>
+          <a:prstGeom prst="rect">
+            <a:avLst/>
+          </a:prstGeom>
+          <a:noFill/>
+        </p:spPr>
+        <p:txBody>
+          <a:bodyPr wrap="square" rtlCol="0" anchor="ctr"/>
+          <a:lstStyle/>
+          <a:p>
+            <a:pPr marL="0" indent="0" algn="ctr">
+              <a:buNone/>
+            </a:pPr>
+            <a:r>
+              <a:rPr lang="en-US" sz="1300" dirty="0">
+                <a:solidFill>
+                  <a:srgbClr val="94A3B8"/>
+                </a:solidFill>
+                <a:latin typeface="微软雅黑" panose="020B0503020204020204" pitchFamily="34" charset="-122"/>
+                <a:ea typeface="微软雅黑" panose="020B0503020204020204" pitchFamily="34" charset="-122"/>
+                <a:cs typeface="微软雅黑" panose="020B0503020204020204" pitchFamily="34" charset="-120"/>
+              </a:rPr>
+              <a:t/>
+            </a:r>
+            <a:endParaRPr lang="en-US" sz="1300" dirty="0"/>
+          </a:p>
+        </p:txBody>
+      </p:sp>
+      <p:sp>
+        <p:nvSpPr>
+          <p:cNvPr id="13" name="Text 11"/>
+          <p:cNvSpPr/>
+          <p:nvPr/>
+        </p:nvSpPr>
+        <p:spPr>
+          <a:xfrm>
+            <a:off x="3566160" y="2560320"/>
+            <a:ext cx="2377440" cy="1463040"/>
+          </a:xfrm>
+          <a:prstGeom prst="rect">
+            <a:avLst/>
+          </a:prstGeom>
+          <a:noFill/>
+        </p:spPr>
+        <p:txBody>
+          <a:bodyPr wrap="square" rtlCol="0" anchor="ctr"/>
+          <a:lstStyle/>
+          <a:p>
+            <a:pPr marL="0" indent="0" algn="ctr">
+              <a:buNone/>
+            </a:pPr>
+            <a:r>
+              <a:rPr lang="en-US" sz="1400" dirty="0">
+                <a:solidFill>
+                  <a:srgbClr val="F8FAFC"/>
+                </a:solidFill>
+                <a:latin typeface="微软雅黑" panose="020B0503020204020204" pitchFamily="34" charset="-122"/>
+                <a:ea typeface="微软雅黑" panose="020B0503020204020204" pitchFamily="34" charset="-122"/>
+                <a:cs typeface="微软雅黑" panose="020B0503020204020204" pitchFamily="34" charset="-120"/>
+              </a:rPr>
+              <a:t>容器/Docker 沙箱</a:t>
+            </a:r>
+            <a:endParaRPr lang="en-US" sz="1400" dirty="0"/>
+          </a:p>
+          <a:p>
+            <a:pPr marL="0" indent="0" algn="ctr">
+              <a:buNone/>
+            </a:pPr>
+            <a:r>
+              <a:rPr lang="en-US" sz="1400" dirty="0">
+                <a:solidFill>
+                  <a:srgbClr val="F8FAFC"/>
+                </a:solidFill>
+                <a:latin typeface="微软雅黑" panose="020B0503020204020204" pitchFamily="34" charset="-122"/>
+                <a:ea typeface="微软雅黑" panose="020B0503020204020204" pitchFamily="34" charset="-122"/>
+                <a:cs typeface="微软雅黑" panose="020B0503020204020204" pitchFamily="34" charset="-120"/>
+              </a:rPr>
+              <a:t>7 题型 · 9 学科知识点</a:t>
+            </a:r>
+            <a:endParaRPr lang="en-US" sz="1400" dirty="0"/>
+          </a:p>
+          <a:p>
+            <a:pPr marL="0" indent="0" algn="ctr">
+              <a:buNone/>
+            </a:pPr>
+            <a:r>
+              <a:rPr lang="en-US" sz="1400" dirty="0">
+                <a:solidFill>
+                  <a:srgbClr val="F8FAFC"/>
+                </a:solidFill>
+                <a:latin typeface="微软雅黑" panose="020B0503020204020204" pitchFamily="34" charset="-122"/>
+                <a:ea typeface="微软雅黑" panose="020B0503020204020204" pitchFamily="34" charset="-122"/>
+                <a:cs typeface="微软雅黑" panose="020B0503020204020204" pitchFamily="34" charset="-120"/>
+              </a:rPr>
+              <a:t>HMAC 审计链 + PII 扫描</a:t>
+            </a:r>
+            <a:endParaRPr lang="en-US" sz="1400" dirty="0"/>
+          </a:p>
+        </p:txBody>
+      </p:sp>
+      <p:sp>
+        <p:nvSpPr>
+          <p:cNvPr id="14" name="Shape 12"/>
+          <p:cNvSpPr/>
+          <p:nvPr/>
+        </p:nvSpPr>
+        <p:spPr>
+          <a:xfrm>
+            <a:off x="6309360" y="1371600"/>
+            <a:ext cx="2743200" cy="3017520"/>
+          </a:xfrm>
+          <a:prstGeom prst="roundRect">
+            <a:avLst>
+              <a:gd name="adj" fmla="val 3333"/>
+            </a:avLst>
+          </a:prstGeom>
+          <a:solidFill>
+            <a:srgbClr val="1F2937"/>
+          </a:solidFill>
+          <a:ln w="12700">
+            <a:solidFill>
+              <a:srgbClr val="334155"/>
+            </a:solidFill>
+            <a:prstDash val="solid"/>
+          </a:ln>
+        </p:spPr>
+      </p:sp>
+      <p:sp>
+        <p:nvSpPr>
+          <p:cNvPr id="15" name="Text 13"/>
+          <p:cNvSpPr/>
+          <p:nvPr/>
+        </p:nvSpPr>
+        <p:spPr>
+          <a:xfrm>
+            <a:off x="6446520" y="1554480"/>
+            <a:ext cx="2468880" cy="411480"/>
+          </a:xfrm>
+          <a:prstGeom prst="rect">
+            <a:avLst/>
+          </a:prstGeom>
+          <a:noFill/>
+        </p:spPr>
+        <p:txBody>
+          <a:bodyPr wrap="square" rtlCol="0" anchor="ctr"/>
+          <a:lstStyle/>
+          <a:p>
+            <a:pPr marL="0" indent="0" algn="ctr">
+              <a:buNone/>
+            </a:pPr>
+            <a:r>
+              <a:rPr lang="en-US" sz="2000" b="1" dirty="0">
+                <a:solidFill>
+                  <a:srgbClr val="22D3EE"/>
+                </a:solidFill>
+                <a:latin typeface="微软雅黑" panose="020B0503020204020204" pitchFamily="34" charset="-122"/>
+                <a:ea typeface="微软雅黑" panose="020B0503020204020204" pitchFamily="34" charset="-122"/>
+                <a:cs typeface="微软雅黑" panose="020B0503020204020204" pitchFamily="34" charset="-120"/>
+              </a:rPr>
+              <a:t>决赛加码</a:t>
+            </a:r>
+            <a:endParaRPr lang="en-US" sz="2000" dirty="0"/>
+          </a:p>
+        </p:txBody>
+      </p:sp>
+      <p:sp>
+        <p:nvSpPr>
+          <p:cNvPr id="16" name="Text 14"/>
+          <p:cNvSpPr/>
+          <p:nvPr/>
+        </p:nvSpPr>
+        <p:spPr>
+          <a:xfrm>
+            <a:off x="6446520" y="2011680"/>
+            <a:ext cx="2468880" cy="320040"/>
+          </a:xfrm>
+          <a:prstGeom prst="rect">
+            <a:avLst/>
+          </a:prstGeom>
+          <a:noFill/>
+        </p:spPr>
+        <p:txBody>
+          <a:bodyPr wrap="square" rtlCol="0" anchor="ctr"/>
+          <a:lstStyle/>
+          <a:p>
+            <a:pPr marL="0" indent="0" algn="ctr">
+              <a:buNone/>
+            </a:pPr>
+            <a:r>
+              <a:rPr lang="en-US" sz="1300" dirty="0">
+                <a:solidFill>
+                  <a:srgbClr val="94A3B8"/>
+                </a:solidFill>
+                <a:latin typeface="微软雅黑" panose="020B0503020204020204" pitchFamily="34" charset="-122"/>
+                <a:ea typeface="微软雅黑" panose="020B0503020204020204" pitchFamily="34" charset="-122"/>
+                <a:cs typeface="微软雅黑" panose="020B0503020204020204" pitchFamily="34" charset="-120"/>
+              </a:rPr>
+              <a:t/>
+            </a:r>
+            <a:endParaRPr lang="en-US" sz="1300" dirty="0"/>
+          </a:p>
+        </p:txBody>
+      </p:sp>
+      <p:sp>
+        <p:nvSpPr>
+          <p:cNvPr id="17" name="Text 15"/>
+          <p:cNvSpPr/>
+          <p:nvPr/>
+        </p:nvSpPr>
+        <p:spPr>
+          <a:xfrm>
+            <a:off x="6492240" y="2560320"/>
+            <a:ext cx="2377440" cy="1463040"/>
+          </a:xfrm>
+          <a:prstGeom prst="rect">
+            <a:avLst/>
+          </a:prstGeom>
+          <a:noFill/>
+        </p:spPr>
+        <p:txBody>
+          <a:bodyPr wrap="square" rtlCol="0" anchor="ctr"/>
+          <a:lstStyle/>
+          <a:p>
+            <a:pPr marL="0" indent="0" algn="ctr">
+              <a:buNone/>
+            </a:pPr>
+            <a:r>
+              <a:rPr lang="en-US" sz="1400" dirty="0">
+                <a:solidFill>
+                  <a:srgbClr val="F8FAFC"/>
+                </a:solidFill>
+                <a:latin typeface="微软雅黑" panose="020B0503020204020204" pitchFamily="34" charset="-122"/>
+                <a:ea typeface="微软雅黑" panose="020B0503020204020204" pitchFamily="34" charset="-122"/>
+                <a:cs typeface="微软雅黑" panose="020B0503020204020204" pitchFamily="34" charset="-120"/>
+              </a:rPr>
+              <a:t>成套服务端交卷</a:t>
+            </a:r>
+            <a:endParaRPr lang="en-US" sz="1400" dirty="0"/>
+          </a:p>
+          <a:p>
+            <a:pPr marL="0" indent="0" algn="ctr">
+              <a:buNone/>
+            </a:pPr>
+            <a:r>
+              <a:rPr lang="en-US" sz="1400" dirty="0">
+                <a:solidFill>
+                  <a:srgbClr val="F8FAFC"/>
+                </a:solidFill>
+                <a:latin typeface="微软雅黑" panose="020B0503020204020204" pitchFamily="34" charset="-122"/>
+                <a:ea typeface="微软雅黑" panose="020B0503020204020204" pitchFamily="34" charset="-122"/>
+                <a:cs typeface="微软雅黑" panose="020B0503020204020204" pitchFamily="34" charset="-120"/>
+              </a:rPr>
+              <a:t>家长端 + 子女绑定</a:t>
+            </a:r>
+            <a:endParaRPr lang="en-US" sz="1400" dirty="0"/>
+          </a:p>
+          <a:p>
+            <a:pPr marL="0" indent="0" algn="ctr">
+              <a:buNone/>
+            </a:pPr>
+            <a:r>
+              <a:rPr lang="en-US" sz="1400" dirty="0">
+                <a:solidFill>
+                  <a:srgbClr val="F8FAFC"/>
+                </a:solidFill>
+                <a:latin typeface="微软雅黑" panose="020B0503020204020204" pitchFamily="34" charset="-122"/>
+                <a:ea typeface="微软雅黑" panose="020B0503020204020204" pitchFamily="34" charset="-122"/>
+                <a:cs typeface="微软雅黑" panose="020B0503020204020204" pitchFamily="34" charset="-120"/>
+              </a:rPr>
+              <a:t>Excel 兼容 CSV 导出</a:t>
+            </a:r>
+            <a:endParaRPr lang="en-US" sz="1400" dirty="0"/>
+          </a:p>
+        </p:txBody>
+      </p:sp>
+      <p:sp>
+        <p:nvSpPr>
+          <p:cNvPr id="18" name="Shape 16"/>
+          <p:cNvSpPr/>
+          <p:nvPr/>
+        </p:nvSpPr>
+        <p:spPr>
+          <a:xfrm>
+            <a:off x="9235440" y="1371600"/>
+            <a:ext cx="2743200" cy="3017520"/>
+          </a:xfrm>
+          <a:prstGeom prst="roundRect">
+            <a:avLst>
+              <a:gd name="adj" fmla="val 3333"/>
+            </a:avLst>
+          </a:prstGeom>
+          <a:solidFill>
+            <a:srgbClr val="1F2937"/>
+          </a:solidFill>
+          <a:ln w="12700">
+            <a:solidFill>
+              <a:srgbClr val="334155"/>
+            </a:solidFill>
+            <a:prstDash val="solid"/>
+          </a:ln>
+        </p:spPr>
+      </p:sp>
+      <p:sp>
+        <p:nvSpPr>
+          <p:cNvPr id="19" name="Text 17"/>
+          <p:cNvSpPr/>
+          <p:nvPr/>
+        </p:nvSpPr>
+        <p:spPr>
+          <a:xfrm>
+            <a:off x="9372600" y="1554480"/>
+            <a:ext cx="2468880" cy="411480"/>
+          </a:xfrm>
+          <a:prstGeom prst="rect">
+            <a:avLst/>
+          </a:prstGeom>
+          <a:noFill/>
+        </p:spPr>
+        <p:txBody>
+          <a:bodyPr wrap="square" rtlCol="0" anchor="ctr"/>
+          <a:lstStyle/>
+          <a:p>
+            <a:pPr marL="0" indent="0" algn="ctr">
+              <a:buNone/>
+            </a:pPr>
+            <a:r>
+              <a:rPr lang="en-US" sz="2000" b="1" dirty="0">
+                <a:solidFill>
+                  <a:srgbClr val="22D3EE"/>
+                </a:solidFill>
+                <a:latin typeface="微软雅黑" panose="020B0503020204020204" pitchFamily="34" charset="-122"/>
+                <a:ea typeface="微软雅黑" panose="020B0503020204020204" pitchFamily="34" charset="-122"/>
+                <a:cs typeface="微软雅黑" panose="020B0503020204020204" pitchFamily="34" charset="-120"/>
+              </a:rPr>
+              <a:t>诚实边界</a:t>
+            </a:r>
+            <a:endParaRPr lang="en-US" sz="2000" dirty="0"/>
+          </a:p>
+        </p:txBody>
+      </p:sp>
+      <p:sp>
+        <p:nvSpPr>
+          <p:cNvPr id="20" name="Text 18"/>
+          <p:cNvSpPr/>
+          <p:nvPr/>
+        </p:nvSpPr>
+        <p:spPr>
+          <a:xfrm>
+            <a:off x="9372600" y="2011680"/>
+            <a:ext cx="2468880" cy="320040"/>
+          </a:xfrm>
+          <a:prstGeom prst="rect">
+            <a:avLst/>
+          </a:prstGeom>
+          <a:noFill/>
+        </p:spPr>
+        <p:txBody>
+          <a:bodyPr wrap="square" rtlCol="0" anchor="ctr"/>
+          <a:lstStyle/>
+          <a:p>
+            <a:pPr marL="0" indent="0" algn="ctr">
+              <a:buNone/>
+            </a:pPr>
+            <a:r>
+              <a:rPr lang="en-US" sz="1300" dirty="0">
+                <a:solidFill>
+                  <a:srgbClr val="94A3B8"/>
+                </a:solidFill>
+                <a:latin typeface="微软雅黑" panose="020B0503020204020204" pitchFamily="34" charset="-122"/>
+                <a:ea typeface="微软雅黑" panose="020B0503020204020204" pitchFamily="34" charset="-122"/>
+                <a:cs typeface="微软雅黑" panose="020B0503020204020204" pitchFamily="34" charset="-120"/>
+              </a:rPr>
+              <a:t/>
+            </a:r>
+            <a:endParaRPr lang="en-US" sz="1300" dirty="0"/>
+          </a:p>
+        </p:txBody>
+      </p:sp>
+      <p:sp>
+        <p:nvSpPr>
+          <p:cNvPr id="21" name="Text 19"/>
+          <p:cNvSpPr/>
+          <p:nvPr/>
+        </p:nvSpPr>
+        <p:spPr>
+          <a:xfrm>
+            <a:off x="9418320" y="2560320"/>
+            <a:ext cx="2377440" cy="1463040"/>
+          </a:xfrm>
+          <a:prstGeom prst="rect">
+            <a:avLst/>
+          </a:prstGeom>
+          <a:noFill/>
+        </p:spPr>
+        <p:txBody>
+          <a:bodyPr wrap="square" rtlCol="0" anchor="ctr"/>
+          <a:lstStyle/>
+          <a:p>
+            <a:pPr marL="0" indent="0" algn="ctr">
+              <a:buNone/>
+            </a:pPr>
+            <a:r>
+              <a:rPr lang="en-US" sz="1400" dirty="0">
+                <a:solidFill>
+                  <a:srgbClr val="F8FAFC"/>
+                </a:solidFill>
+                <a:latin typeface="微软雅黑" panose="020B0503020204020204" pitchFamily="34" charset="-122"/>
+                <a:ea typeface="微软雅黑" panose="020B0503020204020204" pitchFamily="34" charset="-122"/>
+                <a:cs typeface="微软雅黑" panose="020B0503020204020204" pitchFamily="34" charset="-120"/>
+              </a:rPr>
+              <a:t>Demo 假多租户</a:t>
+            </a:r>
+            <a:endParaRPr lang="en-US" sz="1400" dirty="0"/>
+          </a:p>
+          <a:p>
+            <a:pPr marL="0" indent="0" algn="ctr">
+              <a:buNone/>
+            </a:pPr>
+            <a:r>
+              <a:rPr lang="en-US" sz="1400" dirty="0">
+                <a:solidFill>
+                  <a:srgbClr val="F8FAFC"/>
+                </a:solidFill>
+                <a:latin typeface="微软雅黑" panose="020B0503020204020204" pitchFamily="34" charset="-122"/>
+                <a:ea typeface="微软雅黑" panose="020B0503020204020204" pitchFamily="34" charset="-122"/>
+                <a:cs typeface="微软雅黑" panose="020B0503020204020204" pitchFamily="34" charset="-120"/>
+              </a:rPr>
+              <a:t>短信/推送未做</a:t>
+            </a:r>
+            <a:endParaRPr lang="en-US" sz="1400" dirty="0"/>
+          </a:p>
+          <a:p>
+            <a:pPr marL="0" indent="0" algn="ctr">
+              <a:buNone/>
+            </a:pPr>
+            <a:r>
+              <a:rPr lang="en-US" sz="1400" dirty="0">
+                <a:solidFill>
+                  <a:srgbClr val="F8FAFC"/>
+                </a:solidFill>
+                <a:latin typeface="微软雅黑" panose="020B0503020204020204" pitchFamily="34" charset="-122"/>
+                <a:ea typeface="微软雅黑" panose="020B0503020204020204" pitchFamily="34" charset="-122"/>
+                <a:cs typeface="微软雅黑" panose="020B0503020204020204" pitchFamily="34" charset="-120"/>
+              </a:rPr>
+              <a:t>LMS/SIS 对接待做</a:t>
+            </a:r>
+            <a:endParaRPr lang="en-US" sz="1400" dirty="0"/>
+          </a:p>
+        </p:txBody>
+      </p:sp>
+      <p:sp>
+        <p:nvSpPr>
+          <p:cNvPr id="22" name="Text 20"/>
+          <p:cNvSpPr/>
+          <p:nvPr/>
+        </p:nvSpPr>
+        <p:spPr>
+          <a:xfrm>
+            <a:off x="502920" y="4709160"/>
+            <a:ext cx="11155680" cy="411480"/>
+          </a:xfrm>
+          <a:prstGeom prst="rect">
+            <a:avLst/>
+          </a:prstGeom>
+          <a:noFill/>
+        </p:spPr>
+        <p:txBody>
+          <a:bodyPr wrap="square" rtlCol="0" anchor="ctr"/>
+          <a:lstStyle/>
+          <a:p>
+            <a:pPr marL="0" indent="0">
+              <a:buNone/>
+            </a:pPr>
+            <a:r>
+              <a:rPr lang="en-US" sz="1600" b="1" dirty="0">
+                <a:solidFill>
+                  <a:srgbClr val="F8FAFC"/>
+                </a:solidFill>
+                <a:latin typeface="微软雅黑" panose="020B0503020204020204" pitchFamily="34" charset="-122"/>
+                <a:ea typeface="微软雅黑" panose="020B0503020204020204" pitchFamily="34" charset="-122"/>
+                <a:cs typeface="微软雅黑" panose="020B0503020204020204" pitchFamily="34" charset="-120"/>
+              </a:rPr>
+              <a:t>一句话：用可验证证据驱动编程实训，而不是又一个会聊天的助教。</a:t>
+            </a:r>
+            <a:endParaRPr lang="en-US" sz="1600" dirty="0"/>
+          </a:p>
+        </p:txBody>
+      </p:sp>
+      <p:sp>
+        <p:nvSpPr>
+          <p:cNvPr id="23" name="Text 21"/>
+          <p:cNvSpPr/>
+          <p:nvPr/>
+        </p:nvSpPr>
+        <p:spPr>
+          <a:xfrm>
+            <a:off x="502920" y="5166360"/>
+            <a:ext cx="11155680" cy="320040"/>
+          </a:xfrm>
+          <a:prstGeom prst="rect">
+            <a:avLst/>
+          </a:prstGeom>
+          <a:noFill/>
+        </p:spPr>
+        <p:txBody>
+          <a:bodyPr wrap="square" rtlCol="0" anchor="ctr"/>
+          <a:lstStyle/>
+          <a:p>
+            <a:pPr marL="0" indent="0">
+              <a:buNone/>
+            </a:pPr>
+            <a:r>
+              <a:rPr lang="en-US" sz="1300" dirty="0">
+                <a:solidFill>
+                  <a:srgbClr val="94A3B8"/>
+                </a:solidFill>
+                <a:latin typeface="Consolas" panose="020B0609020204030204" pitchFamily="34" charset="0"/>
+                <a:ea typeface="Consolas" panose="020B0609020204030204" pitchFamily="34" charset="-122"/>
+                <a:cs typeface="Consolas" panose="020B0609020204030204" pitchFamily="34" charset="-120"/>
+              </a:rPr>
+              <a:t>本地演示：cd D:\code_space\evidence-loop  →  npm run dev  →  http://localhost:5280</a:t>
+            </a:r>
+            <a:endParaRPr lang="en-US" sz="1300" dirty="0"/>
+          </a:p>
+        </p:txBody>
+      </p:sp>
+      <p:sp>
+        <p:nvSpPr>
+          <p:cNvPr id="24" name="Text 22"/>
+          <p:cNvSpPr/>
+          <p:nvPr/>
+        </p:nvSpPr>
+        <p:spPr>
+          <a:xfrm>
+            <a:off x="457200" y="6492240"/>
+            <a:ext cx="8686800" cy="256032"/>
+          </a:xfrm>
+          <a:prstGeom prst="rect">
+            <a:avLst/>
+          </a:prstGeom>
+          <a:noFill/>
+        </p:spPr>
+        <p:txBody>
+          <a:bodyPr wrap="square" rtlCol="0" anchor="ctr"/>
+          <a:lstStyle/>
+          <a:p>
+            <a:pPr marL="0" indent="0">
+              <a:buNone/>
+            </a:pPr>
+            <a:r>
+              <a:rPr lang="en-US" sz="1100" dirty="0">
+                <a:solidFill>
+                  <a:srgbClr val="94A3B8"/>
+                </a:solidFill>
+                <a:latin typeface="微软雅黑" panose="020B0503020204020204" pitchFamily="34" charset="-122"/>
+                <a:ea typeface="微软雅黑" panose="020B0503020204020204" pitchFamily="34" charset="-122"/>
+                <a:cs typeface="微软雅黑" panose="020B0503020204020204" pitchFamily="34" charset="-120"/>
+              </a:rPr>
+              <a:t>EvidenceRing · GOAI Boundless Agents · AI+教育</a:t>
+            </a:r>
+            <a:endParaRPr lang="en-US" sz="1100" dirty="0"/>
+          </a:p>
+        </p:txBody>
+      </p:sp>
+      <p:sp>
+        <p:nvSpPr>
+          <p:cNvPr id="25" name="Text 23"/>
+          <p:cNvSpPr/>
+          <p:nvPr/>
+        </p:nvSpPr>
+        <p:spPr>
+          <a:xfrm>
+            <a:off x="10332720" y="6492240"/>
+            <a:ext cx="1371600" cy="256032"/>
+          </a:xfrm>
+          <a:prstGeom prst="rect">
+            <a:avLst/>
+          </a:prstGeom>
+          <a:noFill/>
+        </p:spPr>
+        <p:txBody>
+          <a:bodyPr wrap="square" rtlCol="0" anchor="ctr"/>
+          <a:lstStyle/>
+          <a:p>
+            <a:pPr marL="0" indent="0" algn="r">
+              <a:buNone/>
+            </a:pPr>
+            <a:r>
+              <a:rPr lang="en-US" sz="1100" dirty="0">
+                <a:solidFill>
+                  <a:srgbClr val="94A3B8"/>
+                </a:solidFill>
+                <a:latin typeface="微软雅黑" panose="020B0503020204020204" pitchFamily="34" charset="-122"/>
+                <a:ea typeface="微软雅黑" panose="020B0503020204020204" pitchFamily="34" charset="-122"/>
+                <a:cs typeface="微软雅黑" panose="020B0503020204020204" pitchFamily="34" charset="-120"/>
+              </a:rPr>
+              <a:t>10 / 11</a:t>
             </a:r>
             <a:endParaRPr lang="en-US" sz="1100" dirty="0"/>
           </a:p>
@@ -4011,7 +5015,7 @@
                 <a:ea typeface="微软雅黑" panose="020B0503020204020204" pitchFamily="34" charset="-122"/>
                 <a:cs typeface="微软雅黑" panose="020B0503020204020204" pitchFamily="34" charset="-120"/>
               </a:rPr>
-              <a:t>EvidenceLoop · GOAI Boundless Agents · AI+教育</a:t>
+              <a:t>EvidenceRing · GOAI Boundless Agents · AI+教育</a:t>
             </a:r>
             <a:endParaRPr lang="en-US" sz="1100" dirty="0"/>
           </a:p>
@@ -4049,7 +5053,7 @@
                 <a:ea typeface="微软雅黑" panose="020B0503020204020204" pitchFamily="34" charset="-122"/>
                 <a:cs typeface="微软雅黑" panose="020B0503020204020204" pitchFamily="34" charset="-120"/>
               </a:rPr>
-              <a:t>2 / 10</a:t>
+              <a:t>2 / 11</a:t>
             </a:r>
             <a:endParaRPr lang="en-US" sz="1100" dirty="0"/>
           </a:p>
@@ -4711,7 +5715,7 @@
                 <a:ea typeface="微软雅黑" panose="020B0503020204020204" pitchFamily="34" charset="-122"/>
                 <a:cs typeface="微软雅黑" panose="020B0503020204020204" pitchFamily="34" charset="-120"/>
               </a:rPr>
-              <a:t>EvidenceLoop · GOAI Boundless Agents · AI+教育</a:t>
+              <a:t>EvidenceRing · GOAI Boundless Agents · AI+教育</a:t>
             </a:r>
             <a:endParaRPr lang="en-US" sz="1100" dirty="0"/>
           </a:p>
@@ -4749,7 +5753,7 @@
                 <a:ea typeface="微软雅黑" panose="020B0503020204020204" pitchFamily="34" charset="-122"/>
                 <a:cs typeface="微软雅黑" panose="020B0503020204020204" pitchFamily="34" charset="-120"/>
               </a:rPr>
-              <a:t>3 / 10</a:t>
+              <a:t>3 / 11</a:t>
             </a:r>
             <a:endParaRPr lang="en-US" sz="1100" dirty="0"/>
           </a:p>
@@ -5442,7 +6446,7 @@
                 <a:ea typeface="微软雅黑" panose="020B0503020204020204" pitchFamily="34" charset="-122"/>
                 <a:cs typeface="微软雅黑" panose="020B0503020204020204" pitchFamily="34" charset="-120"/>
               </a:rPr>
-              <a:t>EvidenceLoop · GOAI Boundless Agents · AI+教育</a:t>
+              <a:t>EvidenceRing · GOAI Boundless Agents · AI+教育</a:t>
             </a:r>
             <a:endParaRPr lang="en-US" sz="1100" dirty="0"/>
           </a:p>
@@ -5480,7 +6484,7 @@
                 <a:ea typeface="微软雅黑" panose="020B0503020204020204" pitchFamily="34" charset="-122"/>
                 <a:cs typeface="微软雅黑" panose="020B0503020204020204" pitchFamily="34" charset="-120"/>
               </a:rPr>
-              <a:t>4 / 10</a:t>
+              <a:t>4 / 11</a:t>
             </a:r>
             <a:endParaRPr lang="en-US" sz="1100" dirty="0"/>
           </a:p>
@@ -6651,7 +7655,7 @@
                 <a:ea typeface="微软雅黑" panose="020B0503020204020204" pitchFamily="34" charset="-122"/>
                 <a:cs typeface="微软雅黑" panose="020B0503020204020204" pitchFamily="34" charset="-120"/>
               </a:rPr>
-              <a:t>EvidenceLoop · GOAI Boundless Agents · AI+教育</a:t>
+              <a:t>EvidenceRing · GOAI Boundless Agents · AI+教育</a:t>
             </a:r>
             <a:endParaRPr lang="en-US" sz="1100" dirty="0"/>
           </a:p>
@@ -6689,7 +7693,7 @@
                 <a:ea typeface="微软雅黑" panose="020B0503020204020204" pitchFamily="34" charset="-122"/>
                 <a:cs typeface="微软雅黑" panose="020B0503020204020204" pitchFamily="34" charset="-120"/>
               </a:rPr>
-              <a:t>5 / 10</a:t>
+              <a:t>5 / 11</a:t>
             </a:r>
             <a:endParaRPr lang="en-US" sz="1100" dirty="0"/>
           </a:p>
@@ -7349,7 +8353,7 @@
                 <a:ea typeface="微软雅黑" panose="020B0503020204020204" pitchFamily="34" charset="-122"/>
                 <a:cs typeface="微软雅黑" panose="020B0503020204020204" pitchFamily="34" charset="-120"/>
               </a:rPr>
-              <a:t>EvidenceLoop · GOAI Boundless Agents · AI+教育</a:t>
+              <a:t>EvidenceRing · GOAI Boundless Agents · AI+教育</a:t>
             </a:r>
             <a:endParaRPr lang="en-US" sz="1100" dirty="0"/>
           </a:p>
@@ -7387,7 +8391,7 @@
                 <a:ea typeface="微软雅黑" panose="020B0503020204020204" pitchFamily="34" charset="-122"/>
                 <a:cs typeface="微软雅黑" panose="020B0503020204020204" pitchFamily="34" charset="-120"/>
               </a:rPr>
-              <a:t>6 / 10</a:t>
+              <a:t>6 / 11</a:t>
             </a:r>
             <a:endParaRPr lang="en-US" sz="1100" dirty="0"/>
           </a:p>
@@ -8156,7 +9160,7 @@
                 <a:ea typeface="微软雅黑" panose="020B0503020204020204" pitchFamily="34" charset="-122"/>
                 <a:cs typeface="微软雅黑" panose="020B0503020204020204" pitchFamily="34" charset="-120"/>
               </a:rPr>
-              <a:t>EvidenceLoop · GOAI Boundless Agents · AI+教育</a:t>
+              <a:t>EvidenceRing · GOAI Boundless Agents · AI+教育</a:t>
             </a:r>
             <a:endParaRPr lang="en-US" sz="1100" dirty="0"/>
           </a:p>
@@ -8194,7 +9198,7 @@
                 <a:ea typeface="微软雅黑" panose="020B0503020204020204" pitchFamily="34" charset="-122"/>
                 <a:cs typeface="微软雅黑" panose="020B0503020204020204" pitchFamily="34" charset="-120"/>
               </a:rPr>
-              <a:t>7 / 10</a:t>
+              <a:t>7 / 11</a:t>
             </a:r>
             <a:endParaRPr lang="en-US" sz="1100" dirty="0"/>
           </a:p>
@@ -8795,7 +9799,7 @@
                 <a:ea typeface="微软雅黑" panose="020B0503020204020204" pitchFamily="34" charset="-122"/>
                 <a:cs typeface="微软雅黑" panose="020B0503020204020204" pitchFamily="34" charset="-120"/>
               </a:rPr>
-              <a:t>EvidenceLoop · GOAI Boundless Agents · AI+教育</a:t>
+              <a:t>EvidenceRing · GOAI Boundless Agents · AI+教育</a:t>
             </a:r>
             <a:endParaRPr lang="en-US" sz="1100" dirty="0"/>
           </a:p>
@@ -8833,7 +9837,7 @@
                 <a:ea typeface="微软雅黑" panose="020B0503020204020204" pitchFamily="34" charset="-122"/>
                 <a:cs typeface="微软雅黑" panose="020B0503020204020204" pitchFamily="34" charset="-120"/>
               </a:rPr>
-              <a:t>8 / 10</a:t>
+              <a:t>8 / 11</a:t>
             </a:r>
             <a:endParaRPr lang="en-US" sz="1100" dirty="0"/>
           </a:p>
@@ -9236,7 +10240,7 @@
                 <a:ea typeface="微软雅黑" panose="020B0503020204020204" pitchFamily="34" charset="-122"/>
                 <a:cs typeface="微软雅黑" panose="020B0503020204020204" pitchFamily="34" charset="-120"/>
               </a:rPr>
-              <a:t>EvidenceLoop</a:t>
+              <a:t>EvidenceRing</a:t>
             </a:r>
             <a:endParaRPr lang="en-US" sz="1300" dirty="0"/>
           </a:p>
@@ -10572,7 +11576,7 @@
                 <a:ea typeface="微软雅黑" panose="020B0503020204020204" pitchFamily="34" charset="-122"/>
                 <a:cs typeface="微软雅黑" panose="020B0503020204020204" pitchFamily="34" charset="-120"/>
               </a:rPr>
-              <a:t>EvidenceLoop · GOAI Boundless Agents · AI+教育</a:t>
+              <a:t>EvidenceRing · GOAI Boundless Agents · AI+教育</a:t>
             </a:r>
             <a:endParaRPr lang="en-US" sz="1100" dirty="0"/>
           </a:p>
@@ -10610,7 +11614,7 @@
                 <a:ea typeface="微软雅黑" panose="020B0503020204020204" pitchFamily="34" charset="-122"/>
                 <a:cs typeface="微软雅黑" panose="020B0503020204020204" pitchFamily="34" charset="-120"/>
               </a:rPr>
-              <a:t>9 / 10</a:t>
+              <a:t>9 / 11</a:t>
             </a:r>
             <a:endParaRPr lang="en-US" sz="1100" dirty="0"/>
           </a:p>
